--- a/eval/out/ev_market_entry.spec.pptx
+++ b/eval/out/ev_market_entry.spec.pptx
@@ -3087,6 +3087,14 @@
 <file path=ppt/slides/slide1.xml><?xml version="1.0" encoding="utf-8"?>
 <p:sld xmlns:a="http://schemas.openxmlformats.org/drawingml/2006/main" xmlns:p="http://schemas.openxmlformats.org/presentationml/2006/main" xmlns:r="http://schemas.openxmlformats.org/officeDocument/2006/relationships">
   <p:cSld>
+    <p:bg>
+      <p:bgPr>
+        <a:solidFill>
+          <a:srgbClr val="FFFFFF"/>
+        </a:solidFill>
+        <a:effectLst/>
+      </p:bgPr>
+    </p:bg>
     <p:spTree>
       <p:nvGrpSpPr>
         <p:cNvPr id="1" name=""/>
@@ -3550,6 +3558,14 @@
 <file path=ppt/slides/slide2.xml><?xml version="1.0" encoding="utf-8"?>
 <p:sld xmlns:a="http://schemas.openxmlformats.org/drawingml/2006/main" xmlns:p="http://schemas.openxmlformats.org/presentationml/2006/main" xmlns:r="http://schemas.openxmlformats.org/officeDocument/2006/relationships">
   <p:cSld>
+    <p:bg>
+      <p:bgPr>
+        <a:solidFill>
+          <a:srgbClr val="FFFFFF"/>
+        </a:solidFill>
+        <a:effectLst/>
+      </p:bgPr>
+    </p:bg>
     <p:spTree>
       <p:nvGrpSpPr>
         <p:cNvPr id="1" name=""/>
@@ -5437,6 +5453,14 @@
 <file path=ppt/slides/slide3.xml><?xml version="1.0" encoding="utf-8"?>
 <p:sld xmlns:a="http://schemas.openxmlformats.org/drawingml/2006/main" xmlns:p="http://schemas.openxmlformats.org/presentationml/2006/main" xmlns:r="http://schemas.openxmlformats.org/officeDocument/2006/relationships">
   <p:cSld>
+    <p:bg>
+      <p:bgPr>
+        <a:solidFill>
+          <a:srgbClr val="FFFFFF"/>
+        </a:solidFill>
+        <a:effectLst/>
+      </p:bgPr>
+    </p:bg>
     <p:spTree>
       <p:nvGrpSpPr>
         <p:cNvPr id="1" name=""/>
@@ -5869,6 +5893,14 @@
 <file path=ppt/slides/slide4.xml><?xml version="1.0" encoding="utf-8"?>
 <p:sld xmlns:a="http://schemas.openxmlformats.org/drawingml/2006/main" xmlns:p="http://schemas.openxmlformats.org/presentationml/2006/main" xmlns:r="http://schemas.openxmlformats.org/officeDocument/2006/relationships">
   <p:cSld>
+    <p:bg>
+      <p:bgPr>
+        <a:solidFill>
+          <a:srgbClr val="FFFFFF"/>
+        </a:solidFill>
+        <a:effectLst/>
+      </p:bgPr>
+    </p:bg>
     <p:spTree>
       <p:nvGrpSpPr>
         <p:cNvPr id="1" name=""/>
@@ -10745,6 +10777,14 @@
 <file path=ppt/slides/slide5.xml><?xml version="1.0" encoding="utf-8"?>
 <p:sld xmlns:a="http://schemas.openxmlformats.org/drawingml/2006/main" xmlns:p="http://schemas.openxmlformats.org/presentationml/2006/main" xmlns:r="http://schemas.openxmlformats.org/officeDocument/2006/relationships">
   <p:cSld>
+    <p:bg>
+      <p:bgPr>
+        <a:solidFill>
+          <a:srgbClr val="FFFFFF"/>
+        </a:solidFill>
+        <a:effectLst/>
+      </p:bgPr>
+    </p:bg>
     <p:spTree>
       <p:nvGrpSpPr>
         <p:cNvPr id="1" name=""/>
@@ -17801,6 +17841,14 @@
 <file path=ppt/slides/slide6.xml><?xml version="1.0" encoding="utf-8"?>
 <p:sld xmlns:a="http://schemas.openxmlformats.org/drawingml/2006/main" xmlns:p="http://schemas.openxmlformats.org/presentationml/2006/main" xmlns:r="http://schemas.openxmlformats.org/officeDocument/2006/relationships">
   <p:cSld>
+    <p:bg>
+      <p:bgPr>
+        <a:solidFill>
+          <a:srgbClr val="FFFFFF"/>
+        </a:solidFill>
+        <a:effectLst/>
+      </p:bgPr>
+    </p:bg>
     <p:spTree>
       <p:nvGrpSpPr>
         <p:cNvPr id="1" name=""/>
@@ -21171,6 +21219,14 @@
 <file path=ppt/slides/slide7.xml><?xml version="1.0" encoding="utf-8"?>
 <p:sld xmlns:a="http://schemas.openxmlformats.org/drawingml/2006/main" xmlns:p="http://schemas.openxmlformats.org/presentationml/2006/main" xmlns:r="http://schemas.openxmlformats.org/officeDocument/2006/relationships">
   <p:cSld>
+    <p:bg>
+      <p:bgPr>
+        <a:solidFill>
+          <a:srgbClr val="FFFFFF"/>
+        </a:solidFill>
+        <a:effectLst/>
+      </p:bgPr>
+    </p:bg>
     <p:spTree>
       <p:nvGrpSpPr>
         <p:cNvPr id="1" name=""/>

--- a/eval/out/ev_market_entry.spec.pptx
+++ b/eval/out/ev_market_entry.spec.pptx
@@ -3110,14 +3110,14 @@
         </p:nvSpPr>
         <p:spPr>
           <a:xfrm>
-            <a:off x="0" y="2286000"/>
-            <a:ext cx="12192000" cy="54864"/>
+            <a:off x="0" y="0"/>
+            <a:ext cx="12192000" cy="6858000"/>
           </a:xfrm>
           <a:prstGeom prst="rect">
             <a:avLst/>
           </a:prstGeom>
           <a:solidFill>
-            <a:srgbClr val="C55A11"/>
+            <a:srgbClr val="16294A"/>
           </a:solidFill>
           <a:ln>
             <a:noFill/>
@@ -3154,8 +3154,8 @@
         </p:nvSpPr>
         <p:spPr>
           <a:xfrm>
-            <a:off x="914400" y="2606040"/>
-            <a:ext cx="10363200" cy="1298712"/>
+            <a:off x="9265920" y="320040"/>
+            <a:ext cx="2560320" cy="274320"/>
           </a:xfrm>
           <a:prstGeom prst="rect">
             <a:avLst/>
@@ -3168,204 +3168,22 @@
           </a:bodyPr>
           <a:lstStyle/>
           <a:p>
-            <a:pPr algn="l">
-              <a:lnSpc>
-                <a:spcPts val="3408"/>
-              </a:lnSpc>
-              <a:spcBef>
-                <a:spcPts val="0"/>
-              </a:spcBef>
-              <a:spcAft>
-                <a:spcPts val="0"/>
-              </a:spcAft>
-            </a:pPr>
-            <a:r>
-              <a:rPr sz="3000" b="0" i="0">
-                <a:solidFill>
-                  <a:srgbClr val="1F3864"/>
-                </a:solidFill>
-                <a:latin typeface="Georgia"/>
-              </a:rPr>
-              <a:t>India’s </a:t>
-            </a:r>
-            <a:r>
-              <a:rPr sz="3000" b="0" i="0">
-                <a:solidFill>
-                  <a:srgbClr val="1F3864"/>
-                </a:solidFill>
-                <a:latin typeface="Georgia"/>
-              </a:rPr>
-              <a:t>electric </a:t>
-            </a:r>
-            <a:r>
-              <a:rPr sz="3000" b="0" i="0">
-                <a:solidFill>
-                  <a:srgbClr val="1F3864"/>
-                </a:solidFill>
-                <a:latin typeface="Georgia"/>
-              </a:rPr>
-              <a:t>two-wheeler </a:t>
-            </a:r>
-            <a:r>
-              <a:rPr sz="3000" b="0" i="0">
-                <a:solidFill>
-                  <a:srgbClr val="1F3864"/>
-                </a:solidFill>
-                <a:latin typeface="Georgia"/>
-              </a:rPr>
-              <a:t>market </a:t>
-            </a:r>
-            <a:r>
-              <a:rPr sz="3000" b="0" i="0">
-                <a:solidFill>
-                  <a:srgbClr val="1F3864"/>
-                </a:solidFill>
-                <a:latin typeface="Georgia"/>
-              </a:rPr>
-              <a:t>offers </a:t>
-            </a:r>
-            <a:r>
-              <a:rPr sz="3000" b="0" i="0">
-                <a:solidFill>
-                  <a:srgbClr val="1F3864"/>
-                </a:solidFill>
-                <a:latin typeface="Georgia"/>
-              </a:rPr>
-              <a:t>a </a:t>
-            </a:r>
-            <a:r>
-              <a:rPr sz="3000" b="0" i="0">
-                <a:solidFill>
-                  <a:srgbClr val="1F3864"/>
-                </a:solidFill>
-                <a:latin typeface="Georgia"/>
-              </a:rPr>
-              <a:t>credible </a:t>
-            </a:r>
-            <a:r>
-              <a:rPr sz="3000" b="0" i="0">
-                <a:solidFill>
-                  <a:srgbClr val="1F3864"/>
-                </a:solidFill>
-                <a:latin typeface="Georgia"/>
-              </a:rPr>
-              <a:t>entry</a:t>
-            </a:r>
-          </a:p>
-          <a:p>
-            <a:pPr algn="l">
-              <a:lnSpc>
-                <a:spcPts val="3408"/>
-              </a:lnSpc>
-              <a:spcBef>
-                <a:spcPts val="0"/>
-              </a:spcBef>
-              <a:spcAft>
-                <a:spcPts val="0"/>
-              </a:spcAft>
-            </a:pPr>
-            <a:r>
-              <a:rPr sz="3000" b="0" i="0">
-                <a:solidFill>
-                  <a:srgbClr val="1F3864"/>
-                </a:solidFill>
-                <a:latin typeface="Georgia"/>
-              </a:rPr>
-              <a:t>window </a:t>
-            </a:r>
-            <a:r>
-              <a:rPr sz="3000" b="0" i="0">
-                <a:solidFill>
-                  <a:srgbClr val="1F3864"/>
-                </a:solidFill>
-                <a:latin typeface="Georgia"/>
-              </a:rPr>
-              <a:t>for </a:t>
-            </a:r>
-            <a:r>
-              <a:rPr sz="3000" b="0" i="0">
-                <a:solidFill>
-                  <a:srgbClr val="1F3864"/>
-                </a:solidFill>
-                <a:latin typeface="Georgia"/>
-              </a:rPr>
-              <a:t>a </a:t>
-            </a:r>
-            <a:r>
-              <a:rPr sz="3000" b="0" i="0">
-                <a:solidFill>
-                  <a:srgbClr val="1F3864"/>
-                </a:solidFill>
-                <a:latin typeface="Georgia"/>
-              </a:rPr>
-              <a:t>new </a:t>
-            </a:r>
-            <a:r>
-              <a:rPr sz="3000" b="0" i="0">
-                <a:solidFill>
-                  <a:srgbClr val="1F3864"/>
-                </a:solidFill>
-                <a:latin typeface="Georgia"/>
-              </a:rPr>
-              <a:t>OEM </a:t>
-            </a:r>
-            <a:r>
-              <a:rPr sz="3000" b="0" i="0">
-                <a:solidFill>
-                  <a:srgbClr val="1F3864"/>
-                </a:solidFill>
-                <a:latin typeface="Georgia"/>
-              </a:rPr>
-              <a:t>with </a:t>
-            </a:r>
-            <a:r>
-              <a:rPr sz="3000" b="0" i="0">
-                <a:solidFill>
-                  <a:srgbClr val="1F3864"/>
-                </a:solidFill>
-                <a:latin typeface="Georgia"/>
-              </a:rPr>
-              <a:t>a </a:t>
-            </a:r>
-            <a:r>
-              <a:rPr sz="3000" b="0" i="0">
-                <a:solidFill>
-                  <a:srgbClr val="1F3864"/>
-                </a:solidFill>
-                <a:latin typeface="Georgia"/>
-              </a:rPr>
-              <a:t>focused </a:t>
-            </a:r>
-            <a:r>
-              <a:rPr sz="3000" b="0" i="0">
-                <a:solidFill>
-                  <a:srgbClr val="1F3864"/>
-                </a:solidFill>
-                <a:latin typeface="Georgia"/>
-              </a:rPr>
-              <a:t>segment-first</a:t>
-            </a:r>
-          </a:p>
-          <a:p>
-            <a:pPr algn="l">
-              <a:lnSpc>
-                <a:spcPts val="3408"/>
-              </a:lnSpc>
-              <a:spcBef>
-                <a:spcPts val="0"/>
-              </a:spcBef>
-              <a:spcAft>
-                <a:spcPts val="0"/>
-              </a:spcAft>
-            </a:pPr>
-            <a:r>
-              <a:rPr sz="3000" b="0" i="0">
-                <a:solidFill>
-                  <a:srgbClr val="1F3864"/>
-                </a:solidFill>
-                <a:latin typeface="Georgia"/>
-              </a:rPr>
-              <a:t>strategy</a:t>
+            <a:pPr algn="r">
+              <a:spcBef>
+                <a:spcPts val="0"/>
+              </a:spcBef>
+              <a:spcAft>
+                <a:spcPts val="0"/>
+              </a:spcAft>
+            </a:pPr>
+            <a:r>
+              <a:rPr sz="900" b="0" i="0">
+                <a:solidFill>
+                  <a:srgbClr val="FFFFFF"/>
+                </a:solidFill>
+                <a:latin typeface="Segoe UI"/>
+              </a:rPr>
+              <a:t>illustrative data</a:t>
             </a:r>
           </a:p>
         </p:txBody>
@@ -3378,8 +3196,8 @@
         </p:nvSpPr>
         <p:spPr>
           <a:xfrm>
-            <a:off x="914400" y="4041912"/>
-            <a:ext cx="10363200" cy="236488"/>
+            <a:off x="1005840" y="1371600"/>
+            <a:ext cx="10180320" cy="1731615"/>
           </a:xfrm>
           <a:prstGeom prst="rect">
             <a:avLst/>
@@ -3394,7 +3212,7 @@
           <a:p>
             <a:pPr algn="l">
               <a:lnSpc>
-                <a:spcPts val="1862"/>
+                <a:spcPts val="4544"/>
               </a:lnSpc>
               <a:spcBef>
                 <a:spcPts val="0"/>
@@ -3404,103 +3222,192 @@
               </a:spcAft>
             </a:pPr>
             <a:r>
-              <a:rPr sz="1400" b="0" i="0">
-                <a:solidFill>
-                  <a:srgbClr val="757575"/>
-                </a:solidFill>
-                <a:latin typeface="Segoe UI"/>
-              </a:rPr>
-              <a:t>Market </a:t>
-            </a:r>
-            <a:r>
-              <a:rPr sz="1400" b="0" i="0">
-                <a:solidFill>
-                  <a:srgbClr val="757575"/>
-                </a:solidFill>
-                <a:latin typeface="Segoe UI"/>
+              <a:rPr sz="4000" b="0" i="0">
+                <a:solidFill>
+                  <a:srgbClr val="FFFFFF"/>
+                </a:solidFill>
+                <a:latin typeface="Georgia"/>
+              </a:rPr>
+              <a:t>India’s </a:t>
+            </a:r>
+            <a:r>
+              <a:rPr sz="4000" b="0" i="0">
+                <a:solidFill>
+                  <a:srgbClr val="FFFFFF"/>
+                </a:solidFill>
+                <a:latin typeface="Georgia"/>
+              </a:rPr>
+              <a:t>electric </a:t>
+            </a:r>
+            <a:r>
+              <a:rPr sz="4000" b="0" i="0">
+                <a:solidFill>
+                  <a:srgbClr val="FFFFFF"/>
+                </a:solidFill>
+                <a:latin typeface="Georgia"/>
+              </a:rPr>
+              <a:t>two-wheeler </a:t>
+            </a:r>
+            <a:r>
+              <a:rPr sz="4000" b="0" i="0">
+                <a:solidFill>
+                  <a:srgbClr val="FFFFFF"/>
+                </a:solidFill>
+                <a:latin typeface="Georgia"/>
+              </a:rPr>
+              <a:t>market </a:t>
+            </a:r>
+            <a:r>
+              <a:rPr sz="4000" b="0" i="0">
+                <a:solidFill>
+                  <a:srgbClr val="FFFFFF"/>
+                </a:solidFill>
+                <a:latin typeface="Georgia"/>
+              </a:rPr>
+              <a:t>offers </a:t>
+            </a:r>
+            <a:r>
+              <a:rPr sz="4000" b="0" i="0">
+                <a:solidFill>
+                  <a:srgbClr val="FFFFFF"/>
+                </a:solidFill>
+                <a:latin typeface="Georgia"/>
+              </a:rPr>
+              <a:t>a</a:t>
+            </a:r>
+          </a:p>
+          <a:p>
+            <a:pPr algn="l">
+              <a:lnSpc>
+                <a:spcPts val="4544"/>
+              </a:lnSpc>
+              <a:spcBef>
+                <a:spcPts val="0"/>
+              </a:spcBef>
+              <a:spcAft>
+                <a:spcPts val="0"/>
+              </a:spcAft>
+            </a:pPr>
+            <a:r>
+              <a:rPr sz="4000" b="0" i="0">
+                <a:solidFill>
+                  <a:srgbClr val="FFFFFF"/>
+                </a:solidFill>
+                <a:latin typeface="Georgia"/>
+              </a:rPr>
+              <a:t>credible </a:t>
+            </a:r>
+            <a:r>
+              <a:rPr sz="4000" b="0" i="0">
+                <a:solidFill>
+                  <a:srgbClr val="FFFFFF"/>
+                </a:solidFill>
+                <a:latin typeface="Georgia"/>
               </a:rPr>
               <a:t>entry </a:t>
             </a:r>
             <a:r>
-              <a:rPr sz="1400" b="0" i="0">
-                <a:solidFill>
-                  <a:srgbClr val="757575"/>
-                </a:solidFill>
-                <a:latin typeface="Segoe UI"/>
-              </a:rPr>
-              <a:t>strategy </a:t>
-            </a:r>
-            <a:r>
-              <a:rPr sz="1400" b="0" i="0">
-                <a:solidFill>
-                  <a:srgbClr val="757575"/>
-                </a:solidFill>
-                <a:latin typeface="Segoe UI"/>
+              <a:rPr sz="4000" b="0" i="0">
+                <a:solidFill>
+                  <a:srgbClr val="FFFFFF"/>
+                </a:solidFill>
+                <a:latin typeface="Georgia"/>
+              </a:rPr>
+              <a:t>window </a:t>
+            </a:r>
+            <a:r>
+              <a:rPr sz="4000" b="0" i="0">
+                <a:solidFill>
+                  <a:srgbClr val="FFFFFF"/>
+                </a:solidFill>
+                <a:latin typeface="Georgia"/>
               </a:rPr>
               <a:t>for </a:t>
             </a:r>
             <a:r>
-              <a:rPr sz="1400" b="0" i="0">
-                <a:solidFill>
-                  <a:srgbClr val="757575"/>
-                </a:solidFill>
-                <a:latin typeface="Segoe UI"/>
+              <a:rPr sz="4000" b="0" i="0">
+                <a:solidFill>
+                  <a:srgbClr val="FFFFFF"/>
+                </a:solidFill>
+                <a:latin typeface="Georgia"/>
               </a:rPr>
               <a:t>a </a:t>
             </a:r>
             <a:r>
-              <a:rPr sz="1400" b="0" i="0">
-                <a:solidFill>
-                  <a:srgbClr val="757575"/>
-                </a:solidFill>
-                <a:latin typeface="Segoe UI"/>
+              <a:rPr sz="4000" b="0" i="0">
+                <a:solidFill>
+                  <a:srgbClr val="FFFFFF"/>
+                </a:solidFill>
+                <a:latin typeface="Georgia"/>
               </a:rPr>
               <a:t>new </a:t>
             </a:r>
             <a:r>
-              <a:rPr sz="1400" b="0" i="0">
-                <a:solidFill>
-                  <a:srgbClr val="757575"/>
-                </a:solidFill>
-                <a:latin typeface="Segoe UI"/>
+              <a:rPr sz="4000" b="0" i="0">
+                <a:solidFill>
+                  <a:srgbClr val="FFFFFF"/>
+                </a:solidFill>
+                <a:latin typeface="Georgia"/>
               </a:rPr>
               <a:t>OEM </a:t>
             </a:r>
             <a:r>
-              <a:rPr sz="1400" b="0" i="0">
-                <a:solidFill>
-                  <a:srgbClr val="757575"/>
-                </a:solidFill>
-                <a:latin typeface="Segoe UI"/>
-              </a:rPr>
-              <a:t>in </a:t>
-            </a:r>
-            <a:r>
-              <a:rPr sz="1400" b="0" i="0">
-                <a:solidFill>
-                  <a:srgbClr val="757575"/>
-                </a:solidFill>
-                <a:latin typeface="Segoe UI"/>
-              </a:rPr>
-              <a:t>India </a:t>
-            </a:r>
-            <a:r>
-              <a:rPr sz="1400" b="0" i="0">
-                <a:solidFill>
-                  <a:srgbClr val="757575"/>
-                </a:solidFill>
-                <a:latin typeface="Segoe UI"/>
-              </a:rPr>
-              <a:t>electric </a:t>
-            </a:r>
-            <a:r>
-              <a:rPr sz="1400" b="0" i="0">
-                <a:solidFill>
-                  <a:srgbClr val="757575"/>
-                </a:solidFill>
-                <a:latin typeface="Segoe UI"/>
-              </a:rPr>
-              <a:t>two-wheelers</a:t>
+              <a:rPr sz="4000" b="0" i="0">
+                <a:solidFill>
+                  <a:srgbClr val="FFFFFF"/>
+                </a:solidFill>
+                <a:latin typeface="Georgia"/>
+              </a:rPr>
+              <a:t>with</a:t>
+            </a:r>
+          </a:p>
+          <a:p>
+            <a:pPr algn="l">
+              <a:lnSpc>
+                <a:spcPts val="4544"/>
+              </a:lnSpc>
+              <a:spcBef>
+                <a:spcPts val="0"/>
+              </a:spcBef>
+              <a:spcAft>
+                <a:spcPts val="0"/>
+              </a:spcAft>
+            </a:pPr>
+            <a:r>
+              <a:rPr sz="4000" b="0" i="0">
+                <a:solidFill>
+                  <a:srgbClr val="FFFFFF"/>
+                </a:solidFill>
+                <a:latin typeface="Georgia"/>
+              </a:rPr>
+              <a:t>a </a:t>
+            </a:r>
+            <a:r>
+              <a:rPr sz="4000" b="0" i="0">
+                <a:solidFill>
+                  <a:srgbClr val="FFFFFF"/>
+                </a:solidFill>
+                <a:latin typeface="Georgia"/>
+              </a:rPr>
+              <a:t>focused </a:t>
+            </a:r>
+            <a:r>
+              <a:rPr sz="4000" b="0" i="0">
+                <a:solidFill>
+                  <a:srgbClr val="FFFFFF"/>
+                </a:solidFill>
+                <a:latin typeface="Georgia"/>
+              </a:rPr>
+              <a:t>segment-first </a:t>
+            </a:r>
+            <a:r>
+              <a:rPr sz="4000" b="0" i="0">
+                <a:solidFill>
+                  <a:srgbClr val="FFFFFF"/>
+                </a:solidFill>
+                <a:latin typeface="Georgia"/>
+              </a:rPr>
+              <a:t>strategy</a:t>
             </a:r>
           </a:p>
         </p:txBody>
@@ -3513,8 +3420,8 @@
         </p:nvSpPr>
         <p:spPr>
           <a:xfrm>
-            <a:off x="914400" y="6035040"/>
-            <a:ext cx="10363200" cy="274320"/>
+            <a:off x="1005840" y="3212943"/>
+            <a:ext cx="10180320" cy="236488"/>
           </a:xfrm>
           <a:prstGeom prst="rect">
             <a:avLst/>
@@ -3528,6 +3435,141 @@
           <a:lstStyle/>
           <a:p>
             <a:pPr algn="l">
+              <a:lnSpc>
+                <a:spcPts val="1862"/>
+              </a:lnSpc>
+              <a:spcBef>
+                <a:spcPts val="0"/>
+              </a:spcBef>
+              <a:spcAft>
+                <a:spcPts val="0"/>
+              </a:spcAft>
+            </a:pPr>
+            <a:r>
+              <a:rPr sz="1400" b="0" i="0">
+                <a:solidFill>
+                  <a:srgbClr val="FFFFFF"/>
+                </a:solidFill>
+                <a:latin typeface="Segoe UI"/>
+              </a:rPr>
+              <a:t>Market </a:t>
+            </a:r>
+            <a:r>
+              <a:rPr sz="1400" b="0" i="0">
+                <a:solidFill>
+                  <a:srgbClr val="FFFFFF"/>
+                </a:solidFill>
+                <a:latin typeface="Segoe UI"/>
+              </a:rPr>
+              <a:t>entry </a:t>
+            </a:r>
+            <a:r>
+              <a:rPr sz="1400" b="0" i="0">
+                <a:solidFill>
+                  <a:srgbClr val="FFFFFF"/>
+                </a:solidFill>
+                <a:latin typeface="Segoe UI"/>
+              </a:rPr>
+              <a:t>strategy </a:t>
+            </a:r>
+            <a:r>
+              <a:rPr sz="1400" b="0" i="0">
+                <a:solidFill>
+                  <a:srgbClr val="FFFFFF"/>
+                </a:solidFill>
+                <a:latin typeface="Segoe UI"/>
+              </a:rPr>
+              <a:t>for </a:t>
+            </a:r>
+            <a:r>
+              <a:rPr sz="1400" b="0" i="0">
+                <a:solidFill>
+                  <a:srgbClr val="FFFFFF"/>
+                </a:solidFill>
+                <a:latin typeface="Segoe UI"/>
+              </a:rPr>
+              <a:t>a </a:t>
+            </a:r>
+            <a:r>
+              <a:rPr sz="1400" b="0" i="0">
+                <a:solidFill>
+                  <a:srgbClr val="FFFFFF"/>
+                </a:solidFill>
+                <a:latin typeface="Segoe UI"/>
+              </a:rPr>
+              <a:t>new </a:t>
+            </a:r>
+            <a:r>
+              <a:rPr sz="1400" b="0" i="0">
+                <a:solidFill>
+                  <a:srgbClr val="FFFFFF"/>
+                </a:solidFill>
+                <a:latin typeface="Segoe UI"/>
+              </a:rPr>
+              <a:t>OEM </a:t>
+            </a:r>
+            <a:r>
+              <a:rPr sz="1400" b="0" i="0">
+                <a:solidFill>
+                  <a:srgbClr val="FFFFFF"/>
+                </a:solidFill>
+                <a:latin typeface="Segoe UI"/>
+              </a:rPr>
+              <a:t>in </a:t>
+            </a:r>
+            <a:r>
+              <a:rPr sz="1400" b="0" i="0">
+                <a:solidFill>
+                  <a:srgbClr val="FFFFFF"/>
+                </a:solidFill>
+                <a:latin typeface="Segoe UI"/>
+              </a:rPr>
+              <a:t>India </a:t>
+            </a:r>
+            <a:r>
+              <a:rPr sz="1400" b="0" i="0">
+                <a:solidFill>
+                  <a:srgbClr val="FFFFFF"/>
+                </a:solidFill>
+                <a:latin typeface="Segoe UI"/>
+              </a:rPr>
+              <a:t>electric </a:t>
+            </a:r>
+            <a:r>
+              <a:rPr sz="1400" b="0" i="0">
+                <a:solidFill>
+                  <a:srgbClr val="FFFFFF"/>
+                </a:solidFill>
+                <a:latin typeface="Segoe UI"/>
+              </a:rPr>
+              <a:t>two-wheelers</a:t>
+            </a:r>
+          </a:p>
+        </p:txBody>
+      </p:sp>
+      <p:sp>
+        <p:nvSpPr>
+          <p:cNvPr id="6" name="TextBox 5"/>
+          <p:cNvSpPr txBox="1"/>
+          <p:nvPr/>
+        </p:nvSpPr>
+        <p:spPr>
+          <a:xfrm>
+            <a:off x="1005840" y="4572000"/>
+            <a:ext cx="10180320" cy="548640"/>
+          </a:xfrm>
+          <a:prstGeom prst="rect">
+            <a:avLst/>
+          </a:prstGeom>
+          <a:noFill/>
+        </p:spPr>
+        <p:txBody>
+          <a:bodyPr wrap="square" lIns="0" rIns="0" tIns="0" bIns="0" anchor="t">
+            <a:noAutofit/>
+          </a:bodyPr>
+          <a:lstStyle/>
+          <a:p>
+            <a:pPr algn="l">
               <a:spcBef>
                 <a:spcPts val="0"/>
               </a:spcBef>
@@ -3538,11 +3580,11 @@
             <a:r>
               <a:rPr sz="900" b="0" i="0">
                 <a:solidFill>
-                  <a:srgbClr val="757575"/>
-                </a:solidFill>
-                <a:latin typeface="Segoe UI"/>
-              </a:rPr>
-              <a:t>illustrative data | illustrative data</a:t>
+                  <a:srgbClr val="FFFFFF"/>
+                </a:solidFill>
+                <a:latin typeface="Segoe UI"/>
+              </a:rPr>
+              <a:t>illustrative data</a:t>
             </a:r>
           </a:p>
         </p:txBody>
@@ -5477,13 +5519,13 @@
         <p:spPr>
           <a:xfrm>
             <a:off x="0" y="0"/>
-            <a:ext cx="164592" cy="6858000"/>
+            <a:ext cx="12192000" cy="6858000"/>
           </a:xfrm>
           <a:prstGeom prst="rect">
             <a:avLst/>
           </a:prstGeom>
           <a:solidFill>
-            <a:srgbClr val="1F3864"/>
+            <a:srgbClr val="C55A11"/>
           </a:solidFill>
           <a:ln>
             <a:noFill/>
@@ -5520,8 +5562,8 @@
         </p:nvSpPr>
         <p:spPr>
           <a:xfrm>
-            <a:off x="914400" y="1463040"/>
-            <a:ext cx="10180320" cy="731520"/>
+            <a:off x="1371600" y="1600200"/>
+            <a:ext cx="9448800" cy="777240"/>
           </a:xfrm>
           <a:prstGeom prst="rect">
             <a:avLst/>
@@ -5534,7 +5576,7 @@
           </a:bodyPr>
           <a:lstStyle/>
           <a:p>
-            <a:pPr algn="l">
+            <a:pPr algn="ctr">
               <a:spcBef>
                 <a:spcPts val="0"/>
               </a:spcBef>
@@ -5545,7 +5587,7 @@
             <a:r>
               <a:rPr sz="4000" b="1" i="0">
                 <a:solidFill>
-                  <a:srgbClr val="C55A11"/>
+                  <a:srgbClr val="FFFFFF"/>
                 </a:solidFill>
                 <a:latin typeface="Georgia"/>
               </a:rPr>
@@ -5562,8 +5604,8 @@
         </p:nvSpPr>
         <p:spPr>
           <a:xfrm>
-            <a:off x="914400" y="2286000"/>
-            <a:ext cx="10180320" cy="750366"/>
+            <a:off x="1371600" y="2468880"/>
+            <a:ext cx="9448800" cy="851378"/>
           </a:xfrm>
           <a:prstGeom prst="rect">
             <a:avLst/>
@@ -5576,9 +5618,9 @@
           </a:bodyPr>
           <a:lstStyle/>
           <a:p>
-            <a:pPr algn="l">
+            <a:pPr algn="ctr">
               <a:lnSpc>
-                <a:spcPts val="2954"/>
+                <a:spcPts val="3351"/>
               </a:lnSpc>
               <a:spcBef>
                 <a:spcPts val="0"/>
@@ -5588,139 +5630,139 @@
               </a:spcAft>
             </a:pPr>
             <a:r>
-              <a:rPr sz="2600" b="0" i="0">
-                <a:solidFill>
-                  <a:srgbClr val="1F3864"/>
+              <a:rPr sz="2950" b="0" i="0">
+                <a:solidFill>
+                  <a:srgbClr val="FFFFFF"/>
                 </a:solidFill>
                 <a:latin typeface="Georgia"/>
               </a:rPr>
               <a:t>India’s </a:t>
             </a:r>
             <a:r>
-              <a:rPr sz="2600" b="0" i="0">
-                <a:solidFill>
-                  <a:srgbClr val="1F3864"/>
+              <a:rPr sz="2950" b="0" i="0">
+                <a:solidFill>
+                  <a:srgbClr val="FFFFFF"/>
                 </a:solidFill>
                 <a:latin typeface="Georgia"/>
               </a:rPr>
               <a:t>e-two-wheeler </a:t>
             </a:r>
             <a:r>
-              <a:rPr sz="2600" b="0" i="0">
-                <a:solidFill>
-                  <a:srgbClr val="1F3864"/>
+              <a:rPr sz="2950" b="0" i="0">
+                <a:solidFill>
+                  <a:srgbClr val="FFFFFF"/>
                 </a:solidFill>
                 <a:latin typeface="Georgia"/>
               </a:rPr>
               <a:t>market </a:t>
             </a:r>
             <a:r>
-              <a:rPr sz="2600" b="0" i="0">
-                <a:solidFill>
-                  <a:srgbClr val="1F3864"/>
+              <a:rPr sz="2950" b="0" i="0">
+                <a:solidFill>
+                  <a:srgbClr val="FFFFFF"/>
                 </a:solidFill>
                 <a:latin typeface="Georgia"/>
               </a:rPr>
               <a:t>is </a:t>
             </a:r>
             <a:r>
-              <a:rPr sz="2600" b="0" i="0">
-                <a:solidFill>
-                  <a:srgbClr val="1F3864"/>
+              <a:rPr sz="2950" b="0" i="0">
+                <a:solidFill>
+                  <a:srgbClr val="FFFFFF"/>
                 </a:solidFill>
                 <a:latin typeface="Georgia"/>
               </a:rPr>
               <a:t>attractive, </a:t>
             </a:r>
             <a:r>
-              <a:rPr sz="2600" b="0" i="0">
-                <a:solidFill>
-                  <a:srgbClr val="1F3864"/>
+              <a:rPr sz="2950" b="0" i="0">
+                <a:solidFill>
+                  <a:srgbClr val="FFFFFF"/>
                 </a:solidFill>
                 <a:latin typeface="Georgia"/>
               </a:rPr>
               <a:t>but </a:t>
             </a:r>
             <a:r>
-              <a:rPr sz="2600" b="0" i="0">
-                <a:solidFill>
-                  <a:srgbClr val="1F3864"/>
+              <a:rPr sz="2950" b="0" i="0">
+                <a:solidFill>
+                  <a:srgbClr val="FFFFFF"/>
                 </a:solidFill>
                 <a:latin typeface="Georgia"/>
               </a:rPr>
-              <a:t>winning </a:t>
-            </a:r>
-            <a:r>
-              <a:rPr sz="2600" b="0" i="0">
-                <a:solidFill>
-                  <a:srgbClr val="1F3864"/>
+              <a:t>winning</a:t>
+            </a:r>
+          </a:p>
+          <a:p>
+            <a:pPr algn="ctr">
+              <a:lnSpc>
+                <a:spcPts val="3351"/>
+              </a:lnSpc>
+              <a:spcBef>
+                <a:spcPts val="0"/>
+              </a:spcBef>
+              <a:spcAft>
+                <a:spcPts val="0"/>
+              </a:spcAft>
+            </a:pPr>
+            <a:r>
+              <a:rPr sz="2950" b="0" i="0">
+                <a:solidFill>
+                  <a:srgbClr val="FFFFFF"/>
                 </a:solidFill>
                 <a:latin typeface="Georgia"/>
               </a:rPr>
-              <a:t>requires</a:t>
-            </a:r>
-          </a:p>
-          <a:p>
-            <a:pPr algn="l">
-              <a:lnSpc>
-                <a:spcPts val="2954"/>
-              </a:lnSpc>
-              <a:spcBef>
-                <a:spcPts val="0"/>
-              </a:spcBef>
-              <a:spcAft>
-                <a:spcPts val="0"/>
-              </a:spcAft>
-            </a:pPr>
-            <a:r>
-              <a:rPr sz="2600" b="0" i="0">
-                <a:solidFill>
-                  <a:srgbClr val="1F3864"/>
+              <a:t>requires </a:t>
+            </a:r>
+            <a:r>
+              <a:rPr sz="2950" b="0" i="0">
+                <a:solidFill>
+                  <a:srgbClr val="FFFFFF"/>
                 </a:solidFill>
                 <a:latin typeface="Georgia"/>
               </a:rPr>
               <a:t>segment </a:t>
             </a:r>
             <a:r>
-              <a:rPr sz="2600" b="0" i="0">
-                <a:solidFill>
-                  <a:srgbClr val="1F3864"/>
+              <a:rPr sz="2950" b="0" i="0">
+                <a:solidFill>
+                  <a:srgbClr val="FFFFFF"/>
                 </a:solidFill>
                 <a:latin typeface="Georgia"/>
               </a:rPr>
               <a:t>focus </a:t>
             </a:r>
             <a:r>
-              <a:rPr sz="2600" b="0" i="0">
-                <a:solidFill>
-                  <a:srgbClr val="1F3864"/>
+              <a:rPr sz="2950" b="0" i="0">
+                <a:solidFill>
+                  <a:srgbClr val="FFFFFF"/>
                 </a:solidFill>
                 <a:latin typeface="Georgia"/>
               </a:rPr>
               <a:t>and </a:t>
             </a:r>
             <a:r>
-              <a:rPr sz="2600" b="0" i="0">
-                <a:solidFill>
-                  <a:srgbClr val="1F3864"/>
+              <a:rPr sz="2950" b="0" i="0">
+                <a:solidFill>
+                  <a:srgbClr val="FFFFFF"/>
                 </a:solidFill>
                 <a:latin typeface="Georgia"/>
               </a:rPr>
               <a:t>a </a:t>
             </a:r>
             <a:r>
-              <a:rPr sz="2600" b="0" i="0">
-                <a:solidFill>
-                  <a:srgbClr val="1F3864"/>
+              <a:rPr sz="2950" b="0" i="0">
+                <a:solidFill>
+                  <a:srgbClr val="FFFFFF"/>
                 </a:solidFill>
                 <a:latin typeface="Georgia"/>
               </a:rPr>
               <a:t>clear </a:t>
             </a:r>
             <a:r>
-              <a:rPr sz="2600" b="0" i="0">
-                <a:solidFill>
-                  <a:srgbClr val="1F3864"/>
+              <a:rPr sz="2950" b="0" i="0">
+                <a:solidFill>
+                  <a:srgbClr val="FFFFFF"/>
                 </a:solidFill>
                 <a:latin typeface="Georgia"/>
               </a:rPr>
@@ -5737,8 +5779,8 @@
         </p:nvSpPr>
         <p:spPr>
           <a:xfrm>
-            <a:off x="914400" y="3127806"/>
-            <a:ext cx="10180320" cy="236488"/>
+            <a:off x="1371600" y="3411698"/>
+            <a:ext cx="9448800" cy="236488"/>
           </a:xfrm>
           <a:prstGeom prst="rect">
             <a:avLst/>
@@ -5751,7 +5793,7 @@
           </a:bodyPr>
           <a:lstStyle/>
           <a:p>
-            <a:pPr algn="l">
+            <a:pPr algn="ctr">
               <a:lnSpc>
                 <a:spcPts val="1862"/>
               </a:lnSpc>
@@ -5765,7 +5807,7 @@
             <a:r>
               <a:rPr sz="1400" b="0" i="0">
                 <a:solidFill>
-                  <a:srgbClr val="757575"/>
+                  <a:srgbClr val="FFFFFF"/>
                 </a:solidFill>
                 <a:latin typeface="Segoe UI"/>
               </a:rPr>
@@ -5774,7 +5816,7 @@
             <a:r>
               <a:rPr sz="1400" b="0" i="0">
                 <a:solidFill>
-                  <a:srgbClr val="757575"/>
+                  <a:srgbClr val="FFFFFF"/>
                 </a:solidFill>
                 <a:latin typeface="Segoe UI"/>
               </a:rPr>
@@ -5783,7 +5825,7 @@
             <a:r>
               <a:rPr sz="1400" b="0" i="0">
                 <a:solidFill>
-                  <a:srgbClr val="757575"/>
+                  <a:srgbClr val="FFFFFF"/>
                 </a:solidFill>
                 <a:latin typeface="Segoe UI"/>
               </a:rPr>
@@ -5792,7 +5834,7 @@
             <a:r>
               <a:rPr sz="1400" b="0" i="0">
                 <a:solidFill>
-                  <a:srgbClr val="757575"/>
+                  <a:srgbClr val="FFFFFF"/>
                 </a:solidFill>
                 <a:latin typeface="Segoe UI"/>
               </a:rPr>
@@ -5801,7 +5843,7 @@
             <a:r>
               <a:rPr sz="1400" b="0" i="0">
                 <a:solidFill>
-                  <a:srgbClr val="757575"/>
+                  <a:srgbClr val="FFFFFF"/>
                 </a:solidFill>
                 <a:latin typeface="Segoe UI"/>
               </a:rPr>
@@ -5810,7 +5852,7 @@
             <a:r>
               <a:rPr sz="1400" b="0" i="0">
                 <a:solidFill>
-                  <a:srgbClr val="757575"/>
+                  <a:srgbClr val="FFFFFF"/>
                 </a:solidFill>
                 <a:latin typeface="Segoe UI"/>
               </a:rPr>
@@ -5819,7 +5861,7 @@
             <a:r>
               <a:rPr sz="1400" b="0" i="0">
                 <a:solidFill>
-                  <a:srgbClr val="757575"/>
+                  <a:srgbClr val="FFFFFF"/>
                 </a:solidFill>
                 <a:latin typeface="Segoe UI"/>
               </a:rPr>
@@ -5828,7 +5870,7 @@
             <a:r>
               <a:rPr sz="1400" b="0" i="0">
                 <a:solidFill>
-                  <a:srgbClr val="757575"/>
+                  <a:srgbClr val="FFFFFF"/>
                 </a:solidFill>
                 <a:latin typeface="Segoe UI"/>
               </a:rPr>
@@ -5837,7 +5879,7 @@
             <a:r>
               <a:rPr sz="1400" b="0" i="0">
                 <a:solidFill>
-                  <a:srgbClr val="757575"/>
+                  <a:srgbClr val="FFFFFF"/>
                 </a:solidFill>
                 <a:latin typeface="Segoe UI"/>
               </a:rPr>
@@ -5846,7 +5888,7 @@
             <a:r>
               <a:rPr sz="1400" b="0" i="0">
                 <a:solidFill>
-                  <a:srgbClr val="757575"/>
+                  <a:srgbClr val="FFFFFF"/>
                 </a:solidFill>
                 <a:latin typeface="Segoe UI"/>
               </a:rPr>
@@ -5855,7 +5897,7 @@
             <a:r>
               <a:rPr sz="1400" b="0" i="0">
                 <a:solidFill>
-                  <a:srgbClr val="757575"/>
+                  <a:srgbClr val="FFFFFF"/>
                 </a:solidFill>
                 <a:latin typeface="Segoe UI"/>
               </a:rPr>
@@ -5864,7 +5906,7 @@
             <a:r>
               <a:rPr sz="1400" b="0" i="0">
                 <a:solidFill>
-                  <a:srgbClr val="757575"/>
+                  <a:srgbClr val="FFFFFF"/>
                 </a:solidFill>
                 <a:latin typeface="Segoe UI"/>
               </a:rPr>
@@ -5873,7 +5915,7 @@
             <a:r>
               <a:rPr sz="1400" b="0" i="0">
                 <a:solidFill>
-                  <a:srgbClr val="757575"/>
+                  <a:srgbClr val="FFFFFF"/>
                 </a:solidFill>
                 <a:latin typeface="Segoe UI"/>
               </a:rPr>

--- a/eval/out/ev_market_entry.spec.pptx
+++ b/eval/out/ev_market_entry.spec.pptx
@@ -18147,17 +18147,63 @@
       </p:sp>
       <p:sp>
         <p:nvSpPr>
-          <p:cNvPr id="3" name="Oval 2"/>
+          <p:cNvPr id="3" name="Rectangle 2"/>
           <p:cNvSpPr/>
           <p:nvPr/>
         </p:nvSpPr>
         <p:spPr>
           <a:xfrm>
-            <a:off x="411480" y="1152697"/>
-            <a:ext cx="384048" cy="384048"/>
-          </a:xfrm>
-          <a:prstGeom prst="ellipse">
+            <a:off x="411480" y="1051560"/>
+            <a:ext cx="11369040" cy="548640"/>
+          </a:xfrm>
+          <a:prstGeom prst="rect">
             <a:avLst/>
+          </a:prstGeom>
+          <a:solidFill>
+            <a:srgbClr val="F2F3F5"/>
+          </a:solidFill>
+          <a:ln>
+            <a:noFill/>
+          </a:ln>
+          <a:effectLst/>
+        </p:spPr>
+        <p:style>
+          <a:lnRef idx="1">
+            <a:schemeClr val="accent1"/>
+          </a:lnRef>
+          <a:fillRef idx="3">
+            <a:schemeClr val="accent1"/>
+          </a:fillRef>
+          <a:effectRef idx="2">
+            <a:schemeClr val="accent1"/>
+          </a:effectRef>
+          <a:fontRef idx="minor">
+            <a:schemeClr val="lt1"/>
+          </a:fontRef>
+        </p:style>
+        <p:txBody>
+          <a:bodyPr rtlCol="0" anchor="ctr"/>
+          <a:lstStyle/>
+          <a:p>
+            <a:pPr algn="ctr"/>
+          </a:p>
+        </p:txBody>
+      </p:sp>
+      <p:sp>
+        <p:nvSpPr>
+          <p:cNvPr id="4" name="Rounded Rectangle 3"/>
+          <p:cNvSpPr/>
+          <p:nvPr/>
+        </p:nvSpPr>
+        <p:spPr>
+          <a:xfrm>
+            <a:off x="457200" y="1074420"/>
+            <a:ext cx="502920" cy="502920"/>
+          </a:xfrm>
+          <a:prstGeom prst="roundRect">
+            <a:avLst>
+              <a:gd name="adj" fmla="val 18000"/>
+            </a:avLst>
           </a:prstGeom>
           <a:solidFill>
             <a:srgbClr val="16294A"/>
@@ -18182,41 +18228,23 @@
           </a:fontRef>
         </p:style>
         <p:txBody>
-          <a:bodyPr rtlCol="0" anchor="ctr" wrap="square" lIns="0" rIns="0" tIns="0" bIns="0">
-            <a:noAutofit/>
-          </a:bodyPr>
-          <a:lstStyle/>
-          <a:p>
-            <a:pPr algn="ctr">
-              <a:spcBef>
-                <a:spcPts val="0"/>
-              </a:spcBef>
-              <a:spcAft>
-                <a:spcPts val="0"/>
-              </a:spcAft>
-            </a:pPr>
-            <a:r>
-              <a:rPr sz="1400" b="0" i="0">
-                <a:solidFill>
-                  <a:srgbClr val="FFFFFF"/>
-                </a:solidFill>
-                <a:latin typeface="Segoe UI"/>
-              </a:rPr>
-              <a:t>📈</a:t>
-            </a:r>
-          </a:p>
-        </p:txBody>
-      </p:sp>
-      <p:sp>
-        <p:nvSpPr>
-          <p:cNvPr id="4" name="TextBox 3"/>
+          <a:bodyPr rtlCol="0" anchor="ctr"/>
+          <a:lstStyle/>
+          <a:p>
+            <a:pPr algn="ctr"/>
+          </a:p>
+        </p:txBody>
+      </p:sp>
+      <p:sp>
+        <p:nvSpPr>
+          <p:cNvPr id="5" name="TextBox 4"/>
           <p:cNvSpPr txBox="1"/>
           <p:nvPr/>
         </p:nvSpPr>
         <p:spPr>
           <a:xfrm>
-            <a:off x="850392" y="1152697"/>
-            <a:ext cx="2404628" cy="384048"/>
+            <a:off x="1014984" y="1051560"/>
+            <a:ext cx="662706" cy="548640"/>
           </a:xfrm>
           <a:prstGeom prst="rect">
             <a:avLst/>
@@ -18230,9 +18258,6 @@
           <a:lstStyle/>
           <a:p>
             <a:pPr algn="l">
-              <a:lnSpc>
-                <a:spcPts val="1795"/>
-              </a:lnSpc>
               <a:spcBef>
                 <a:spcPts val="0"/>
               </a:spcBef>
@@ -18247,30 +18272,21 @@
                 </a:solidFill>
                 <a:latin typeface="Segoe UI"/>
               </a:rPr>
-              <a:t>₹500 </a:t>
-            </a:r>
-            <a:r>
-              <a:rPr sz="1350" b="1" i="0">
-                <a:solidFill>
-                  <a:srgbClr val="3F3F3F"/>
-                </a:solidFill>
-                <a:latin typeface="Segoe UI"/>
-              </a:rPr>
-              <a:t>Cr</a:t>
-            </a:r>
-          </a:p>
-        </p:txBody>
-      </p:sp>
-      <p:sp>
-        <p:nvSpPr>
-          <p:cNvPr id="5" name="TextBox 4"/>
+              <a:t>₹500 Cr</a:t>
+            </a:r>
+          </a:p>
+        </p:txBody>
+      </p:sp>
+      <p:sp>
+        <p:nvSpPr>
+          <p:cNvPr id="6" name="TextBox 5"/>
           <p:cNvSpPr txBox="1"/>
           <p:nvPr/>
         </p:nvSpPr>
         <p:spPr>
           <a:xfrm>
-            <a:off x="3309884" y="1152697"/>
-            <a:ext cx="8470636" cy="384048"/>
+            <a:off x="1677690" y="1249866"/>
+            <a:ext cx="10057110" cy="152028"/>
           </a:xfrm>
           <a:prstGeom prst="rect">
             <a:avLst/>
@@ -18278,7 +18294,7 @@
           <a:noFill/>
         </p:spPr>
         <p:txBody>
-          <a:bodyPr wrap="square" lIns="0" rIns="0" tIns="0" bIns="0" anchor="ctr">
+          <a:bodyPr wrap="square" lIns="0" rIns="0" tIns="0" bIns="0" anchor="t">
             <a:noAutofit/>
           </a:bodyPr>
           <a:lstStyle/>
@@ -18434,2033 +18450,14 @@
       </p:sp>
       <p:sp>
         <p:nvSpPr>
-          <p:cNvPr id="6" name="Oval 5"/>
+          <p:cNvPr id="7" name="Rectangle 6"/>
           <p:cNvSpPr/>
           <p:nvPr/>
         </p:nvSpPr>
         <p:spPr>
           <a:xfrm>
-            <a:off x="411480" y="1646473"/>
-            <a:ext cx="384048" cy="384048"/>
-          </a:xfrm>
-          <a:prstGeom prst="ellipse">
-            <a:avLst/>
-          </a:prstGeom>
-          <a:solidFill>
-            <a:srgbClr val="16294A"/>
-          </a:solidFill>
-          <a:ln>
-            <a:noFill/>
-          </a:ln>
-          <a:effectLst/>
-        </p:spPr>
-        <p:style>
-          <a:lnRef idx="1">
-            <a:schemeClr val="accent1"/>
-          </a:lnRef>
-          <a:fillRef idx="3">
-            <a:schemeClr val="accent1"/>
-          </a:fillRef>
-          <a:effectRef idx="2">
-            <a:schemeClr val="accent1"/>
-          </a:effectRef>
-          <a:fontRef idx="minor">
-            <a:schemeClr val="lt1"/>
-          </a:fontRef>
-        </p:style>
-        <p:txBody>
-          <a:bodyPr rtlCol="0" anchor="ctr" wrap="square" lIns="0" rIns="0" tIns="0" bIns="0">
-            <a:noAutofit/>
-          </a:bodyPr>
-          <a:lstStyle/>
-          <a:p>
-            <a:pPr algn="ctr">
-              <a:spcBef>
-                <a:spcPts val="0"/>
-              </a:spcBef>
-              <a:spcAft>
-                <a:spcPts val="0"/>
-              </a:spcAft>
-            </a:pPr>
-            <a:r>
-              <a:rPr sz="1400" b="0" i="0">
-                <a:solidFill>
-                  <a:srgbClr val="FFFFFF"/>
-                </a:solidFill>
-                <a:latin typeface="Segoe UI"/>
-              </a:rPr>
-              <a:t>🏍️</a:t>
-            </a:r>
-          </a:p>
-        </p:txBody>
-      </p:sp>
-      <p:sp>
-        <p:nvSpPr>
-          <p:cNvPr id="7" name="TextBox 6"/>
-          <p:cNvSpPr txBox="1"/>
-          <p:nvPr/>
-        </p:nvSpPr>
-        <p:spPr>
-          <a:xfrm>
-            <a:off x="850392" y="1646473"/>
-            <a:ext cx="2404628" cy="384048"/>
-          </a:xfrm>
-          <a:prstGeom prst="rect">
-            <a:avLst/>
-          </a:prstGeom>
-          <a:noFill/>
-        </p:spPr>
-        <p:txBody>
-          <a:bodyPr wrap="square" lIns="0" rIns="0" tIns="0" bIns="0" anchor="ctr">
-            <a:noAutofit/>
-          </a:bodyPr>
-          <a:lstStyle/>
-          <a:p>
-            <a:pPr algn="l">
-              <a:lnSpc>
-                <a:spcPts val="1795"/>
-              </a:lnSpc>
-              <a:spcBef>
-                <a:spcPts val="0"/>
-              </a:spcBef>
-              <a:spcAft>
-                <a:spcPts val="0"/>
-              </a:spcAft>
-            </a:pPr>
-            <a:r>
-              <a:rPr sz="1350" b="1" i="0">
-                <a:solidFill>
-                  <a:srgbClr val="3F3F3F"/>
-                </a:solidFill>
-                <a:latin typeface="Segoe UI"/>
-              </a:rPr>
-              <a:t>50,000</a:t>
-            </a:r>
-            <a:r>
-              <a:rPr sz="1350" b="0" i="0">
-                <a:solidFill>
-                  <a:srgbClr val="3F3F3F"/>
-                </a:solidFill>
-                <a:latin typeface="Segoe UI"/>
-              </a:rPr>
-              <a:t> </a:t>
-            </a:r>
-            <a:r>
-              <a:rPr sz="1350" b="0" i="0">
-                <a:solidFill>
-                  <a:srgbClr val="3F3F3F"/>
-                </a:solidFill>
-                <a:latin typeface="Segoe UI"/>
-              </a:rPr>
-              <a:t>units</a:t>
-            </a:r>
-          </a:p>
-        </p:txBody>
-      </p:sp>
-      <p:sp>
-        <p:nvSpPr>
-          <p:cNvPr id="8" name="TextBox 7"/>
-          <p:cNvSpPr txBox="1"/>
-          <p:nvPr/>
-        </p:nvSpPr>
-        <p:spPr>
-          <a:xfrm>
-            <a:off x="3309884" y="1646473"/>
-            <a:ext cx="8470636" cy="384048"/>
-          </a:xfrm>
-          <a:prstGeom prst="rect">
-            <a:avLst/>
-          </a:prstGeom>
-          <a:noFill/>
-        </p:spPr>
-        <p:txBody>
-          <a:bodyPr wrap="square" lIns="0" rIns="0" tIns="0" bIns="0" anchor="ctr">
-            <a:noAutofit/>
-          </a:bodyPr>
-          <a:lstStyle/>
-          <a:p>
-            <a:pPr algn="l">
-              <a:lnSpc>
-                <a:spcPts val="1197"/>
-              </a:lnSpc>
-              <a:spcBef>
-                <a:spcPts val="0"/>
-              </a:spcBef>
-              <a:spcAft>
-                <a:spcPts val="0"/>
-              </a:spcAft>
-            </a:pPr>
-            <a:r>
-              <a:rPr sz="900" b="0" i="0">
-                <a:solidFill>
-                  <a:srgbClr val="3F3F3F"/>
-                </a:solidFill>
-                <a:latin typeface="Segoe UI"/>
-              </a:rPr>
-              <a:t>Illustrative </a:t>
-            </a:r>
-            <a:r>
-              <a:rPr sz="900" b="0" i="0">
-                <a:solidFill>
-                  <a:srgbClr val="3F3F3F"/>
-                </a:solidFill>
-                <a:latin typeface="Segoe UI"/>
-              </a:rPr>
-              <a:t>annual </a:t>
-            </a:r>
-            <a:r>
-              <a:rPr sz="900" b="0" i="0">
-                <a:solidFill>
-                  <a:srgbClr val="3F3F3F"/>
-                </a:solidFill>
-                <a:latin typeface="Segoe UI"/>
-              </a:rPr>
-              <a:t>volume </a:t>
-            </a:r>
-            <a:r>
-              <a:rPr sz="900" b="0" i="0">
-                <a:solidFill>
-                  <a:srgbClr val="3F3F3F"/>
-                </a:solidFill>
-                <a:latin typeface="Segoe UI"/>
-              </a:rPr>
-              <a:t>at </a:t>
-            </a:r>
-            <a:r>
-              <a:rPr sz="900" b="0" i="0">
-                <a:solidFill>
-                  <a:srgbClr val="3F3F3F"/>
-                </a:solidFill>
-                <a:latin typeface="Segoe UI"/>
-              </a:rPr>
-              <a:t>scale, </a:t>
-            </a:r>
-            <a:r>
-              <a:rPr sz="900" b="0" i="0">
-                <a:solidFill>
-                  <a:srgbClr val="3F3F3F"/>
-                </a:solidFill>
-                <a:latin typeface="Segoe UI"/>
-              </a:rPr>
-              <a:t>anchored </a:t>
-            </a:r>
-            <a:r>
-              <a:rPr sz="900" b="0" i="0">
-                <a:solidFill>
-                  <a:srgbClr val="3F3F3F"/>
-                </a:solidFill>
-                <a:latin typeface="Segoe UI"/>
-              </a:rPr>
-              <a:t>on </a:t>
-            </a:r>
-            <a:r>
-              <a:rPr sz="900" b="0" i="0">
-                <a:solidFill>
-                  <a:srgbClr val="3F3F3F"/>
-                </a:solidFill>
-                <a:latin typeface="Segoe UI"/>
-              </a:rPr>
-              <a:t>focused </a:t>
-            </a:r>
-            <a:r>
-              <a:rPr sz="900" b="0" i="0">
-                <a:solidFill>
-                  <a:srgbClr val="3F3F3F"/>
-                </a:solidFill>
-                <a:latin typeface="Segoe UI"/>
-              </a:rPr>
-              <a:t>launch </a:t>
-            </a:r>
-            <a:r>
-              <a:rPr sz="900" b="0" i="0">
-                <a:solidFill>
-                  <a:srgbClr val="3F3F3F"/>
-                </a:solidFill>
-                <a:latin typeface="Segoe UI"/>
-              </a:rPr>
-              <a:t>economics </a:t>
-            </a:r>
-            <a:r>
-              <a:rPr sz="900" b="0" i="0">
-                <a:solidFill>
-                  <a:srgbClr val="3F3F3F"/>
-                </a:solidFill>
-                <a:latin typeface="Segoe UI"/>
-              </a:rPr>
-              <a:t>rather </a:t>
-            </a:r>
-            <a:r>
-              <a:rPr sz="900" b="0" i="0">
-                <a:solidFill>
-                  <a:srgbClr val="3F3F3F"/>
-                </a:solidFill>
-                <a:latin typeface="Segoe UI"/>
-              </a:rPr>
-              <a:t>than </a:t>
-            </a:r>
-            <a:r>
-              <a:rPr sz="900" b="0" i="0">
-                <a:solidFill>
-                  <a:srgbClr val="3F3F3F"/>
-                </a:solidFill>
-                <a:latin typeface="Segoe UI"/>
-              </a:rPr>
-              <a:t>all-segment </a:t>
-            </a:r>
-            <a:r>
-              <a:rPr sz="900" b="0" i="0">
-                <a:solidFill>
-                  <a:srgbClr val="3F3F3F"/>
-                </a:solidFill>
-                <a:latin typeface="Segoe UI"/>
-              </a:rPr>
-              <a:t>entry.</a:t>
-            </a:r>
-          </a:p>
-        </p:txBody>
-      </p:sp>
-      <p:sp>
-        <p:nvSpPr>
-          <p:cNvPr id="9" name="Oval 8"/>
-          <p:cNvSpPr/>
-          <p:nvPr/>
-        </p:nvSpPr>
-        <p:spPr>
-          <a:xfrm>
-            <a:off x="411480" y="2140249"/>
-            <a:ext cx="384048" cy="384048"/>
-          </a:xfrm>
-          <a:prstGeom prst="ellipse">
-            <a:avLst/>
-          </a:prstGeom>
-          <a:solidFill>
-            <a:srgbClr val="16294A"/>
-          </a:solidFill>
-          <a:ln>
-            <a:noFill/>
-          </a:ln>
-          <a:effectLst/>
-        </p:spPr>
-        <p:style>
-          <a:lnRef idx="1">
-            <a:schemeClr val="accent1"/>
-          </a:lnRef>
-          <a:fillRef idx="3">
-            <a:schemeClr val="accent1"/>
-          </a:fillRef>
-          <a:effectRef idx="2">
-            <a:schemeClr val="accent1"/>
-          </a:effectRef>
-          <a:fontRef idx="minor">
-            <a:schemeClr val="lt1"/>
-          </a:fontRef>
-        </p:style>
-        <p:txBody>
-          <a:bodyPr rtlCol="0" anchor="ctr" wrap="square" lIns="0" rIns="0" tIns="0" bIns="0">
-            <a:noAutofit/>
-          </a:bodyPr>
-          <a:lstStyle/>
-          <a:p>
-            <a:pPr algn="ctr">
-              <a:spcBef>
-                <a:spcPts val="0"/>
-              </a:spcBef>
-              <a:spcAft>
-                <a:spcPts val="0"/>
-              </a:spcAft>
-            </a:pPr>
-            <a:r>
-              <a:rPr sz="1400" b="0" i="0">
-                <a:solidFill>
-                  <a:srgbClr val="FFFFFF"/>
-                </a:solidFill>
-                <a:latin typeface="Segoe UI"/>
-              </a:rPr>
-              <a:t>🎯</a:t>
-            </a:r>
-          </a:p>
-        </p:txBody>
-      </p:sp>
-      <p:sp>
-        <p:nvSpPr>
-          <p:cNvPr id="10" name="TextBox 9"/>
-          <p:cNvSpPr txBox="1"/>
-          <p:nvPr/>
-        </p:nvSpPr>
-        <p:spPr>
-          <a:xfrm>
-            <a:off x="850392" y="2140249"/>
-            <a:ext cx="2404628" cy="384048"/>
-          </a:xfrm>
-          <a:prstGeom prst="rect">
-            <a:avLst/>
-          </a:prstGeom>
-          <a:noFill/>
-        </p:spPr>
-        <p:txBody>
-          <a:bodyPr wrap="square" lIns="0" rIns="0" tIns="0" bIns="0" anchor="ctr">
-            <a:noAutofit/>
-          </a:bodyPr>
-          <a:lstStyle/>
-          <a:p>
-            <a:pPr algn="l">
-              <a:lnSpc>
-                <a:spcPts val="1795"/>
-              </a:lnSpc>
-              <a:spcBef>
-                <a:spcPts val="0"/>
-              </a:spcBef>
-              <a:spcAft>
-                <a:spcPts val="0"/>
-              </a:spcAft>
-            </a:pPr>
-            <a:r>
-              <a:rPr sz="1350" b="1" i="0">
-                <a:solidFill>
-                  <a:srgbClr val="3F3F3F"/>
-                </a:solidFill>
-                <a:latin typeface="Segoe UI"/>
-              </a:rPr>
-              <a:t>15%</a:t>
-            </a:r>
-            <a:r>
-              <a:rPr sz="1350" b="0" i="0">
-                <a:solidFill>
-                  <a:srgbClr val="3F3F3F"/>
-                </a:solidFill>
-                <a:latin typeface="Segoe UI"/>
-              </a:rPr>
-              <a:t> </a:t>
-            </a:r>
-            <a:r>
-              <a:rPr sz="1350" b="0" i="0">
-                <a:solidFill>
-                  <a:srgbClr val="3F3F3F"/>
-                </a:solidFill>
-                <a:latin typeface="Segoe UI"/>
-              </a:rPr>
-              <a:t>share</a:t>
-            </a:r>
-          </a:p>
-        </p:txBody>
-      </p:sp>
-      <p:sp>
-        <p:nvSpPr>
-          <p:cNvPr id="11" name="TextBox 10"/>
-          <p:cNvSpPr txBox="1"/>
-          <p:nvPr/>
-        </p:nvSpPr>
-        <p:spPr>
-          <a:xfrm>
-            <a:off x="3309884" y="2140249"/>
-            <a:ext cx="8470636" cy="384048"/>
-          </a:xfrm>
-          <a:prstGeom prst="rect">
-            <a:avLst/>
-          </a:prstGeom>
-          <a:noFill/>
-        </p:spPr>
-        <p:txBody>
-          <a:bodyPr wrap="square" lIns="0" rIns="0" tIns="0" bIns="0" anchor="ctr">
-            <a:noAutofit/>
-          </a:bodyPr>
-          <a:lstStyle/>
-          <a:p>
-            <a:pPr algn="l">
-              <a:lnSpc>
-                <a:spcPts val="1197"/>
-              </a:lnSpc>
-              <a:spcBef>
-                <a:spcPts val="0"/>
-              </a:spcBef>
-              <a:spcAft>
-                <a:spcPts val="0"/>
-              </a:spcAft>
-            </a:pPr>
-            <a:r>
-              <a:rPr sz="900" b="0" i="0">
-                <a:solidFill>
-                  <a:srgbClr val="3F3F3F"/>
-                </a:solidFill>
-                <a:latin typeface="Segoe UI"/>
-              </a:rPr>
-              <a:t>Illustrative </a:t>
-            </a:r>
-            <a:r>
-              <a:rPr sz="900" b="0" i="0">
-                <a:solidFill>
-                  <a:srgbClr val="3F3F3F"/>
-                </a:solidFill>
-                <a:latin typeface="Segoe UI"/>
-              </a:rPr>
-              <a:t>target </a:t>
-            </a:r>
-            <a:r>
-              <a:rPr sz="900" b="0" i="0">
-                <a:solidFill>
-                  <a:srgbClr val="3F3F3F"/>
-                </a:solidFill>
-                <a:latin typeface="Segoe UI"/>
-              </a:rPr>
-              <a:t>niche </a:t>
-            </a:r>
-            <a:r>
-              <a:rPr sz="900" b="0" i="0">
-                <a:solidFill>
-                  <a:srgbClr val="3F3F3F"/>
-                </a:solidFill>
-                <a:latin typeface="Segoe UI"/>
-              </a:rPr>
-              <a:t>share, </a:t>
-            </a:r>
-            <a:r>
-              <a:rPr sz="900" b="0" i="0">
-                <a:solidFill>
-                  <a:srgbClr val="3F3F3F"/>
-                </a:solidFill>
-                <a:latin typeface="Segoe UI"/>
-              </a:rPr>
-              <a:t>concentrated </a:t>
-            </a:r>
-            <a:r>
-              <a:rPr sz="900" b="0" i="0">
-                <a:solidFill>
-                  <a:srgbClr val="3F3F3F"/>
-                </a:solidFill>
-                <a:latin typeface="Segoe UI"/>
-              </a:rPr>
-              <a:t>in </a:t>
-            </a:r>
-            <a:r>
-              <a:rPr sz="900" b="0" i="0">
-                <a:solidFill>
-                  <a:srgbClr val="3F3F3F"/>
-                </a:solidFill>
-                <a:latin typeface="Segoe UI"/>
-              </a:rPr>
-              <a:t>the </a:t>
-            </a:r>
-            <a:r>
-              <a:rPr sz="900" b="0" i="0">
-                <a:solidFill>
-                  <a:srgbClr val="3F3F3F"/>
-                </a:solidFill>
-                <a:latin typeface="Segoe UI"/>
-              </a:rPr>
-              <a:t>most </a:t>
-            </a:r>
-            <a:r>
-              <a:rPr sz="900" b="0" i="0">
-                <a:solidFill>
-                  <a:srgbClr val="3F3F3F"/>
-                </a:solidFill>
-                <a:latin typeface="Segoe UI"/>
-              </a:rPr>
-              <a:t>attractive </a:t>
-            </a:r>
-            <a:r>
-              <a:rPr sz="900" b="0" i="0">
-                <a:solidFill>
-                  <a:srgbClr val="3F3F3F"/>
-                </a:solidFill>
-                <a:latin typeface="Segoe UI"/>
-              </a:rPr>
-              <a:t>entry </a:t>
-            </a:r>
-            <a:r>
-              <a:rPr sz="900" b="0" i="0">
-                <a:solidFill>
-                  <a:srgbClr val="3F3F3F"/>
-                </a:solidFill>
-                <a:latin typeface="Segoe UI"/>
-              </a:rPr>
-              <a:t>segment </a:t>
-            </a:r>
-            <a:r>
-              <a:rPr sz="900" b="0" i="0">
-                <a:solidFill>
-                  <a:srgbClr val="3F3F3F"/>
-                </a:solidFill>
-                <a:latin typeface="Segoe UI"/>
-              </a:rPr>
-              <a:t>before </a:t>
-            </a:r>
-            <a:r>
-              <a:rPr sz="900" b="0" i="0">
-                <a:solidFill>
-                  <a:srgbClr val="3F3F3F"/>
-                </a:solidFill>
-                <a:latin typeface="Segoe UI"/>
-              </a:rPr>
-              <a:t>broader </a:t>
-            </a:r>
-            <a:r>
-              <a:rPr sz="900" b="0" i="0">
-                <a:solidFill>
-                  <a:srgbClr val="3F3F3F"/>
-                </a:solidFill>
-                <a:latin typeface="Segoe UI"/>
-              </a:rPr>
-              <a:t>expansion.</a:t>
-            </a:r>
-          </a:p>
-        </p:txBody>
-      </p:sp>
-      <p:sp>
-        <p:nvSpPr>
-          <p:cNvPr id="12" name="Oval 11"/>
-          <p:cNvSpPr/>
-          <p:nvPr/>
-        </p:nvSpPr>
-        <p:spPr>
-          <a:xfrm>
-            <a:off x="411480" y="2634025"/>
-            <a:ext cx="384048" cy="384048"/>
-          </a:xfrm>
-          <a:prstGeom prst="ellipse">
-            <a:avLst/>
-          </a:prstGeom>
-          <a:solidFill>
-            <a:srgbClr val="16294A"/>
-          </a:solidFill>
-          <a:ln>
-            <a:noFill/>
-          </a:ln>
-          <a:effectLst/>
-        </p:spPr>
-        <p:style>
-          <a:lnRef idx="1">
-            <a:schemeClr val="accent1"/>
-          </a:lnRef>
-          <a:fillRef idx="3">
-            <a:schemeClr val="accent1"/>
-          </a:fillRef>
-          <a:effectRef idx="2">
-            <a:schemeClr val="accent1"/>
-          </a:effectRef>
-          <a:fontRef idx="minor">
-            <a:schemeClr val="lt1"/>
-          </a:fontRef>
-        </p:style>
-        <p:txBody>
-          <a:bodyPr rtlCol="0" anchor="ctr" wrap="square" lIns="0" rIns="0" tIns="0" bIns="0">
-            <a:noAutofit/>
-          </a:bodyPr>
-          <a:lstStyle/>
-          <a:p>
-            <a:pPr algn="ctr">
-              <a:spcBef>
-                <a:spcPts val="0"/>
-              </a:spcBef>
-              <a:spcAft>
-                <a:spcPts val="0"/>
-              </a:spcAft>
-            </a:pPr>
-            <a:r>
-              <a:rPr sz="1400" b="0" i="0">
-                <a:solidFill>
-                  <a:srgbClr val="FFFFFF"/>
-                </a:solidFill>
-                <a:latin typeface="Segoe UI"/>
-              </a:rPr>
-              <a:t>🗺️</a:t>
-            </a:r>
-          </a:p>
-        </p:txBody>
-      </p:sp>
-      <p:sp>
-        <p:nvSpPr>
-          <p:cNvPr id="13" name="TextBox 12"/>
-          <p:cNvSpPr txBox="1"/>
-          <p:nvPr/>
-        </p:nvSpPr>
-        <p:spPr>
-          <a:xfrm>
-            <a:off x="850392" y="2634025"/>
-            <a:ext cx="2404628" cy="384048"/>
-          </a:xfrm>
-          <a:prstGeom prst="rect">
-            <a:avLst/>
-          </a:prstGeom>
-          <a:noFill/>
-        </p:spPr>
-        <p:txBody>
-          <a:bodyPr wrap="square" lIns="0" rIns="0" tIns="0" bIns="0" anchor="ctr">
-            <a:noAutofit/>
-          </a:bodyPr>
-          <a:lstStyle/>
-          <a:p>
-            <a:pPr algn="l">
-              <a:lnSpc>
-                <a:spcPts val="1795"/>
-              </a:lnSpc>
-              <a:spcBef>
-                <a:spcPts val="0"/>
-              </a:spcBef>
-              <a:spcAft>
-                <a:spcPts val="0"/>
-              </a:spcAft>
-            </a:pPr>
-            <a:r>
-              <a:rPr sz="1350" b="1" i="0">
-                <a:solidFill>
-                  <a:srgbClr val="3F3F3F"/>
-                </a:solidFill>
-                <a:latin typeface="Segoe UI"/>
-              </a:rPr>
-              <a:t>18 </a:t>
-            </a:r>
-            <a:r>
-              <a:rPr sz="1350" b="1" i="0">
-                <a:solidFill>
-                  <a:srgbClr val="3F3F3F"/>
-                </a:solidFill>
-                <a:latin typeface="Segoe UI"/>
-              </a:rPr>
-              <a:t>months</a:t>
-            </a:r>
-          </a:p>
-        </p:txBody>
-      </p:sp>
-      <p:sp>
-        <p:nvSpPr>
-          <p:cNvPr id="14" name="TextBox 13"/>
-          <p:cNvSpPr txBox="1"/>
-          <p:nvPr/>
-        </p:nvSpPr>
-        <p:spPr>
-          <a:xfrm>
-            <a:off x="3309884" y="2634025"/>
-            <a:ext cx="8470636" cy="384048"/>
-          </a:xfrm>
-          <a:prstGeom prst="rect">
-            <a:avLst/>
-          </a:prstGeom>
-          <a:noFill/>
-        </p:spPr>
-        <p:txBody>
-          <a:bodyPr wrap="square" lIns="0" rIns="0" tIns="0" bIns="0" anchor="ctr">
-            <a:noAutofit/>
-          </a:bodyPr>
-          <a:lstStyle/>
-          <a:p>
-            <a:pPr algn="l">
-              <a:lnSpc>
-                <a:spcPts val="1197"/>
-              </a:lnSpc>
-              <a:spcBef>
-                <a:spcPts val="0"/>
-              </a:spcBef>
-              <a:spcAft>
-                <a:spcPts val="0"/>
-              </a:spcAft>
-            </a:pPr>
-            <a:r>
-              <a:rPr sz="900" b="0" i="0">
-                <a:solidFill>
-                  <a:srgbClr val="3F3F3F"/>
-                </a:solidFill>
-                <a:latin typeface="Segoe UI"/>
-              </a:rPr>
-              <a:t>Phased </a:t>
-            </a:r>
-            <a:r>
-              <a:rPr sz="900" b="0" i="0">
-                <a:solidFill>
-                  <a:srgbClr val="3F3F3F"/>
-                </a:solidFill>
-                <a:latin typeface="Segoe UI"/>
-              </a:rPr>
-              <a:t>market </a:t>
-            </a:r>
-            <a:r>
-              <a:rPr sz="900" b="0" i="0">
-                <a:solidFill>
-                  <a:srgbClr val="3F3F3F"/>
-                </a:solidFill>
-                <a:latin typeface="Segoe UI"/>
-              </a:rPr>
-              <a:t>entry </a:t>
-            </a:r>
-            <a:r>
-              <a:rPr sz="900" b="0" i="0">
-                <a:solidFill>
-                  <a:srgbClr val="3F3F3F"/>
-                </a:solidFill>
-                <a:latin typeface="Segoe UI"/>
-              </a:rPr>
-              <a:t>timeline </a:t>
-            </a:r>
-            <a:r>
-              <a:rPr sz="900" b="0" i="0">
-                <a:solidFill>
-                  <a:srgbClr val="3F3F3F"/>
-                </a:solidFill>
-                <a:latin typeface="Segoe UI"/>
-              </a:rPr>
-              <a:t>from </a:t>
-            </a:r>
-            <a:r>
-              <a:rPr sz="900" b="0" i="0">
-                <a:solidFill>
-                  <a:srgbClr val="3F3F3F"/>
-                </a:solidFill>
-                <a:latin typeface="Segoe UI"/>
-              </a:rPr>
-              <a:t>launch </a:t>
-            </a:r>
-            <a:r>
-              <a:rPr sz="900" b="0" i="0">
-                <a:solidFill>
-                  <a:srgbClr val="3F3F3F"/>
-                </a:solidFill>
-                <a:latin typeface="Segoe UI"/>
-              </a:rPr>
-              <a:t>preparation </a:t>
-            </a:r>
-            <a:r>
-              <a:rPr sz="900" b="0" i="0">
-                <a:solidFill>
-                  <a:srgbClr val="3F3F3F"/>
-                </a:solidFill>
-                <a:latin typeface="Segoe UI"/>
-              </a:rPr>
-              <a:t>to </a:t>
-            </a:r>
-            <a:r>
-              <a:rPr sz="900" b="0" i="0">
-                <a:solidFill>
-                  <a:srgbClr val="3F3F3F"/>
-                </a:solidFill>
-                <a:latin typeface="Segoe UI"/>
-              </a:rPr>
-              <a:t>scale-up, </a:t>
-            </a:r>
-            <a:r>
-              <a:rPr sz="900" b="0" i="0">
-                <a:solidFill>
-                  <a:srgbClr val="3F3F3F"/>
-                </a:solidFill>
-                <a:latin typeface="Segoe UI"/>
-              </a:rPr>
-              <a:t>with </a:t>
-            </a:r>
-            <a:r>
-              <a:rPr sz="900" b="0" i="0">
-                <a:solidFill>
-                  <a:srgbClr val="3F3F3F"/>
-                </a:solidFill>
-                <a:latin typeface="Segoe UI"/>
-              </a:rPr>
-              <a:t>gates </a:t>
-            </a:r>
-            <a:r>
-              <a:rPr sz="900" b="0" i="0">
-                <a:solidFill>
-                  <a:srgbClr val="3F3F3F"/>
-                </a:solidFill>
-                <a:latin typeface="Segoe UI"/>
-              </a:rPr>
-              <a:t>to </a:t>
-            </a:r>
-            <a:r>
-              <a:rPr sz="900" b="0" i="0">
-                <a:solidFill>
-                  <a:srgbClr val="3F3F3F"/>
-                </a:solidFill>
-                <a:latin typeface="Segoe UI"/>
-              </a:rPr>
-              <a:t>manage </a:t>
-            </a:r>
-            <a:r>
-              <a:rPr sz="900" b="0" i="0">
-                <a:solidFill>
-                  <a:srgbClr val="3F3F3F"/>
-                </a:solidFill>
-                <a:latin typeface="Segoe UI"/>
-              </a:rPr>
-              <a:t>execution </a:t>
-            </a:r>
-            <a:r>
-              <a:rPr sz="900" b="0" i="0">
-                <a:solidFill>
-                  <a:srgbClr val="3F3F3F"/>
-                </a:solidFill>
-                <a:latin typeface="Segoe UI"/>
-              </a:rPr>
-              <a:t>risk.</a:t>
-            </a:r>
-          </a:p>
-        </p:txBody>
-      </p:sp>
-      <p:sp>
-        <p:nvSpPr>
-          <p:cNvPr id="15" name="Rectangle 14"/>
-          <p:cNvSpPr/>
-          <p:nvPr/>
-        </p:nvSpPr>
-        <p:spPr>
-          <a:xfrm>
-            <a:off x="411480" y="3237529"/>
-            <a:ext cx="2807970" cy="1234440"/>
-          </a:xfrm>
-          <a:prstGeom prst="rect">
-            <a:avLst/>
-          </a:prstGeom>
-          <a:solidFill>
-            <a:srgbClr val="16294A"/>
-          </a:solidFill>
-          <a:ln>
-            <a:noFill/>
-          </a:ln>
-          <a:effectLst/>
-        </p:spPr>
-        <p:style>
-          <a:lnRef idx="1">
-            <a:schemeClr val="accent1"/>
-          </a:lnRef>
-          <a:fillRef idx="3">
-            <a:schemeClr val="accent1"/>
-          </a:fillRef>
-          <a:effectRef idx="2">
-            <a:schemeClr val="accent1"/>
-          </a:effectRef>
-          <a:fontRef idx="minor">
-            <a:schemeClr val="lt1"/>
-          </a:fontRef>
-        </p:style>
-        <p:txBody>
-          <a:bodyPr rtlCol="0" anchor="ctr" wrap="square" lIns="0" rIns="0" tIns="0" bIns="0">
-            <a:noAutofit/>
-          </a:bodyPr>
-          <a:lstStyle/>
-          <a:p>
-            <a:pPr algn="ctr">
-              <a:lnSpc>
-                <a:spcPts val="1795"/>
-              </a:lnSpc>
-              <a:spcBef>
-                <a:spcPts val="0"/>
-              </a:spcBef>
-              <a:spcAft>
-                <a:spcPts val="0"/>
-              </a:spcAft>
-            </a:pPr>
-            <a:r>
-              <a:rPr sz="1350" b="0" i="0">
-                <a:solidFill>
-                  <a:srgbClr val="FFFFFF"/>
-                </a:solidFill>
-                <a:latin typeface="Segoe UI"/>
-              </a:rPr>
-              <a:t>Phase </a:t>
-            </a:r>
-            <a:r>
-              <a:rPr sz="1350" b="0" i="0">
-                <a:solidFill>
-                  <a:srgbClr val="FFFFFF"/>
-                </a:solidFill>
-                <a:latin typeface="Segoe UI"/>
-              </a:rPr>
-              <a:t>1 </a:t>
-            </a:r>
-            <a:r>
-              <a:rPr sz="1350" b="0" i="0">
-                <a:solidFill>
-                  <a:srgbClr val="FFFFFF"/>
-                </a:solidFill>
-                <a:latin typeface="Segoe UI"/>
-              </a:rPr>
-              <a:t>launch</a:t>
-            </a:r>
-          </a:p>
-          <a:p>
-            <a:pPr algn="ctr">
-              <a:lnSpc>
-                <a:spcPts val="216"/>
-              </a:lnSpc>
-              <a:spcBef>
-                <a:spcPts val="0"/>
-              </a:spcBef>
-              <a:spcAft>
-                <a:spcPts val="0"/>
-              </a:spcAft>
-            </a:pPr>
-            <a:r>
-              <a:rPr sz="750" b="0" i="0">
-                <a:solidFill>
-                  <a:srgbClr val="FFFFFF"/>
-                </a:solidFill>
-                <a:latin typeface="Segoe UI"/>
-              </a:rPr>
-              <a:t/>
-            </a:r>
-          </a:p>
-          <a:p>
-            <a:pPr algn="ctr">
-              <a:lnSpc>
-                <a:spcPts val="997"/>
-              </a:lnSpc>
-              <a:spcBef>
-                <a:spcPts val="0"/>
-              </a:spcBef>
-              <a:spcAft>
-                <a:spcPts val="0"/>
-              </a:spcAft>
-            </a:pPr>
-            <a:r>
-              <a:rPr sz="750" b="0" i="0">
-                <a:solidFill>
-                  <a:srgbClr val="FFFFFF"/>
-                </a:solidFill>
-                <a:latin typeface="Segoe UI"/>
-              </a:rPr>
-              <a:t>Enter </a:t>
-            </a:r>
-            <a:r>
-              <a:rPr sz="750" b="1" i="0">
-                <a:solidFill>
-                  <a:srgbClr val="FFFFFF"/>
-                </a:solidFill>
-                <a:latin typeface="Segoe UI"/>
-              </a:rPr>
-              <a:t>1</a:t>
-            </a:r>
-            <a:r>
-              <a:rPr sz="750" b="0" i="0">
-                <a:solidFill>
-                  <a:srgbClr val="FFFFFF"/>
-                </a:solidFill>
-                <a:latin typeface="Segoe UI"/>
-              </a:rPr>
-              <a:t> </a:t>
-            </a:r>
-            <a:r>
-              <a:rPr sz="750" b="0" i="0">
-                <a:solidFill>
-                  <a:srgbClr val="FFFFFF"/>
-                </a:solidFill>
-                <a:latin typeface="Segoe UI"/>
-              </a:rPr>
-              <a:t>priority </a:t>
-            </a:r>
-            <a:r>
-              <a:rPr sz="750" b="0" i="0">
-                <a:solidFill>
-                  <a:srgbClr val="FFFFFF"/>
-                </a:solidFill>
-                <a:latin typeface="Segoe UI"/>
-              </a:rPr>
-              <a:t>segment </a:t>
-            </a:r>
-            <a:r>
-              <a:rPr sz="750" b="0" i="0">
-                <a:solidFill>
-                  <a:srgbClr val="FFFFFF"/>
-                </a:solidFill>
-                <a:latin typeface="Segoe UI"/>
-              </a:rPr>
-              <a:t>with </a:t>
-            </a:r>
-            <a:r>
-              <a:rPr sz="750" b="1" i="0">
-                <a:solidFill>
-                  <a:srgbClr val="FFFFFF"/>
-                </a:solidFill>
-                <a:latin typeface="Segoe UI"/>
-              </a:rPr>
-              <a:t>3</a:t>
-            </a:r>
-            <a:r>
-              <a:rPr sz="750" b="0" i="0">
-                <a:solidFill>
-                  <a:srgbClr val="FFFFFF"/>
-                </a:solidFill>
-                <a:latin typeface="Segoe UI"/>
-              </a:rPr>
-              <a:t> </a:t>
-            </a:r>
-            <a:r>
-              <a:rPr sz="750" b="0" i="0">
-                <a:solidFill>
-                  <a:srgbClr val="FFFFFF"/>
-                </a:solidFill>
-                <a:latin typeface="Segoe UI"/>
-              </a:rPr>
-              <a:t>launch </a:t>
-            </a:r>
-            <a:r>
-              <a:rPr sz="750" b="0" i="0">
-                <a:solidFill>
-                  <a:srgbClr val="FFFFFF"/>
-                </a:solidFill>
-                <a:latin typeface="Segoe UI"/>
-              </a:rPr>
-              <a:t>cities </a:t>
-            </a:r>
-            <a:r>
-              <a:rPr sz="750" b="0" i="0">
-                <a:solidFill>
-                  <a:srgbClr val="FFFFFF"/>
-                </a:solidFill>
-                <a:latin typeface="Segoe UI"/>
-              </a:rPr>
-              <a:t>to </a:t>
-            </a:r>
-            <a:r>
-              <a:rPr sz="750" b="0" i="0">
-                <a:solidFill>
-                  <a:srgbClr val="FFFFFF"/>
-                </a:solidFill>
-                <a:latin typeface="Segoe UI"/>
-              </a:rPr>
-              <a:t>validate</a:t>
-            </a:r>
-          </a:p>
-          <a:p>
-            <a:pPr algn="ctr">
-              <a:lnSpc>
-                <a:spcPts val="997"/>
-              </a:lnSpc>
-              <a:spcBef>
-                <a:spcPts val="0"/>
-              </a:spcBef>
-              <a:spcAft>
-                <a:spcPts val="0"/>
-              </a:spcAft>
-            </a:pPr>
-            <a:r>
-              <a:rPr sz="750" b="0" i="0">
-                <a:solidFill>
-                  <a:srgbClr val="FFFFFF"/>
-                </a:solidFill>
-                <a:latin typeface="Segoe UI"/>
-              </a:rPr>
-              <a:t>product-market </a:t>
-            </a:r>
-            <a:r>
-              <a:rPr sz="750" b="0" i="0">
-                <a:solidFill>
-                  <a:srgbClr val="FFFFFF"/>
-                </a:solidFill>
-                <a:latin typeface="Segoe UI"/>
-              </a:rPr>
-              <a:t>fit </a:t>
-            </a:r>
-            <a:r>
-              <a:rPr sz="750" b="0" i="0">
-                <a:solidFill>
-                  <a:srgbClr val="FFFFFF"/>
-                </a:solidFill>
-                <a:latin typeface="Segoe UI"/>
-              </a:rPr>
-              <a:t>and </a:t>
-            </a:r>
-            <a:r>
-              <a:rPr sz="750" b="0" i="0">
-                <a:solidFill>
-                  <a:srgbClr val="FFFFFF"/>
-                </a:solidFill>
-                <a:latin typeface="Segoe UI"/>
-              </a:rPr>
-              <a:t>channel </a:t>
-            </a:r>
-            <a:r>
-              <a:rPr sz="750" b="0" i="0">
-                <a:solidFill>
-                  <a:srgbClr val="FFFFFF"/>
-                </a:solidFill>
-                <a:latin typeface="Segoe UI"/>
-              </a:rPr>
-              <a:t>economics.</a:t>
-            </a:r>
-          </a:p>
-        </p:txBody>
-      </p:sp>
-      <p:sp>
-        <p:nvSpPr>
-          <p:cNvPr id="16" name="Rectangle 15"/>
-          <p:cNvSpPr/>
-          <p:nvPr/>
-        </p:nvSpPr>
-        <p:spPr>
-          <a:xfrm>
-            <a:off x="3265170" y="3237529"/>
-            <a:ext cx="2807970" cy="1234440"/>
-          </a:xfrm>
-          <a:prstGeom prst="rect">
-            <a:avLst/>
-          </a:prstGeom>
-          <a:solidFill>
-            <a:srgbClr val="16294A"/>
-          </a:solidFill>
-          <a:ln>
-            <a:noFill/>
-          </a:ln>
-          <a:effectLst/>
-        </p:spPr>
-        <p:style>
-          <a:lnRef idx="1">
-            <a:schemeClr val="accent1"/>
-          </a:lnRef>
-          <a:fillRef idx="3">
-            <a:schemeClr val="accent1"/>
-          </a:fillRef>
-          <a:effectRef idx="2">
-            <a:schemeClr val="accent1"/>
-          </a:effectRef>
-          <a:fontRef idx="minor">
-            <a:schemeClr val="lt1"/>
-          </a:fontRef>
-        </p:style>
-        <p:txBody>
-          <a:bodyPr rtlCol="0" anchor="ctr" wrap="square" lIns="0" rIns="0" tIns="0" bIns="0">
-            <a:noAutofit/>
-          </a:bodyPr>
-          <a:lstStyle/>
-          <a:p>
-            <a:pPr algn="ctr">
-              <a:lnSpc>
-                <a:spcPts val="1795"/>
-              </a:lnSpc>
-              <a:spcBef>
-                <a:spcPts val="0"/>
-              </a:spcBef>
-              <a:spcAft>
-                <a:spcPts val="0"/>
-              </a:spcAft>
-            </a:pPr>
-            <a:r>
-              <a:rPr sz="1350" b="0" i="0">
-                <a:solidFill>
-                  <a:srgbClr val="FFFFFF"/>
-                </a:solidFill>
-                <a:latin typeface="Segoe UI"/>
-              </a:rPr>
-              <a:t>Phase </a:t>
-            </a:r>
-            <a:r>
-              <a:rPr sz="1350" b="0" i="0">
-                <a:solidFill>
-                  <a:srgbClr val="FFFFFF"/>
-                </a:solidFill>
-                <a:latin typeface="Segoe UI"/>
-              </a:rPr>
-              <a:t>2 </a:t>
-            </a:r>
-            <a:r>
-              <a:rPr sz="1350" b="0" i="0">
-                <a:solidFill>
-                  <a:srgbClr val="FFFFFF"/>
-                </a:solidFill>
-                <a:latin typeface="Segoe UI"/>
-              </a:rPr>
-              <a:t>expansion</a:t>
-            </a:r>
-          </a:p>
-          <a:p>
-            <a:pPr algn="ctr">
-              <a:lnSpc>
-                <a:spcPts val="216"/>
-              </a:lnSpc>
-              <a:spcBef>
-                <a:spcPts val="0"/>
-              </a:spcBef>
-              <a:spcAft>
-                <a:spcPts val="0"/>
-              </a:spcAft>
-            </a:pPr>
-            <a:r>
-              <a:rPr sz="750" b="0" i="0">
-                <a:solidFill>
-                  <a:srgbClr val="FFFFFF"/>
-                </a:solidFill>
-                <a:latin typeface="Segoe UI"/>
-              </a:rPr>
-              <a:t/>
-            </a:r>
-          </a:p>
-          <a:p>
-            <a:pPr algn="ctr">
-              <a:lnSpc>
-                <a:spcPts val="997"/>
-              </a:lnSpc>
-              <a:spcBef>
-                <a:spcPts val="0"/>
-              </a:spcBef>
-              <a:spcAft>
-                <a:spcPts val="0"/>
-              </a:spcAft>
-            </a:pPr>
-            <a:r>
-              <a:rPr sz="750" b="0" i="0">
-                <a:solidFill>
-                  <a:srgbClr val="FFFFFF"/>
-                </a:solidFill>
-                <a:latin typeface="Segoe UI"/>
-              </a:rPr>
-              <a:t>Expand </a:t>
-            </a:r>
-            <a:r>
-              <a:rPr sz="750" b="0" i="0">
-                <a:solidFill>
-                  <a:srgbClr val="FFFFFF"/>
-                </a:solidFill>
-                <a:latin typeface="Segoe UI"/>
-              </a:rPr>
-              <a:t>to </a:t>
-            </a:r>
-            <a:r>
-              <a:rPr sz="750" b="1" i="0">
-                <a:solidFill>
-                  <a:srgbClr val="FFFFFF"/>
-                </a:solidFill>
-                <a:latin typeface="Segoe UI"/>
-              </a:rPr>
-              <a:t>10</a:t>
-            </a:r>
-            <a:r>
-              <a:rPr sz="750" b="0" i="0">
-                <a:solidFill>
-                  <a:srgbClr val="FFFFFF"/>
-                </a:solidFill>
-                <a:latin typeface="Segoe UI"/>
-              </a:rPr>
-              <a:t> </a:t>
-            </a:r>
-            <a:r>
-              <a:rPr sz="750" b="0" i="0">
-                <a:solidFill>
-                  <a:srgbClr val="FFFFFF"/>
-                </a:solidFill>
-                <a:latin typeface="Segoe UI"/>
-              </a:rPr>
-              <a:t>cities </a:t>
-            </a:r>
-            <a:r>
-              <a:rPr sz="750" b="0" i="0">
-                <a:solidFill>
-                  <a:srgbClr val="FFFFFF"/>
-                </a:solidFill>
-                <a:latin typeface="Segoe UI"/>
-              </a:rPr>
-              <a:t>after </a:t>
-            </a:r>
-            <a:r>
-              <a:rPr sz="750" b="0" i="0">
-                <a:solidFill>
-                  <a:srgbClr val="FFFFFF"/>
-                </a:solidFill>
-                <a:latin typeface="Segoe UI"/>
-              </a:rPr>
-              <a:t>milestone </a:t>
-            </a:r>
-            <a:r>
-              <a:rPr sz="750" b="0" i="0">
-                <a:solidFill>
-                  <a:srgbClr val="FFFFFF"/>
-                </a:solidFill>
-                <a:latin typeface="Segoe UI"/>
-              </a:rPr>
-              <a:t>gates </a:t>
-            </a:r>
-            <a:r>
-              <a:rPr sz="750" b="0" i="0">
-                <a:solidFill>
-                  <a:srgbClr val="FFFFFF"/>
-                </a:solidFill>
-                <a:latin typeface="Segoe UI"/>
-              </a:rPr>
-              <a:t>are </a:t>
-            </a:r>
-            <a:r>
-              <a:rPr sz="750" b="0" i="0">
-                <a:solidFill>
-                  <a:srgbClr val="FFFFFF"/>
-                </a:solidFill>
-                <a:latin typeface="Segoe UI"/>
-              </a:rPr>
-              <a:t>met </a:t>
-            </a:r>
-            <a:r>
-              <a:rPr sz="750" b="0" i="0">
-                <a:solidFill>
-                  <a:srgbClr val="FFFFFF"/>
-                </a:solidFill>
-                <a:latin typeface="Segoe UI"/>
-              </a:rPr>
-              <a:t>on </a:t>
-            </a:r>
-            <a:r>
-              <a:rPr sz="750" b="0" i="0">
-                <a:solidFill>
-                  <a:srgbClr val="FFFFFF"/>
-                </a:solidFill>
-                <a:latin typeface="Segoe UI"/>
-              </a:rPr>
-              <a:t>demand,</a:t>
-            </a:r>
-          </a:p>
-          <a:p>
-            <a:pPr algn="ctr">
-              <a:lnSpc>
-                <a:spcPts val="997"/>
-              </a:lnSpc>
-              <a:spcBef>
-                <a:spcPts val="0"/>
-              </a:spcBef>
-              <a:spcAft>
-                <a:spcPts val="0"/>
-              </a:spcAft>
-            </a:pPr>
-            <a:r>
-              <a:rPr sz="750" b="0" i="0">
-                <a:solidFill>
-                  <a:srgbClr val="FFFFFF"/>
-                </a:solidFill>
-                <a:latin typeface="Segoe UI"/>
-              </a:rPr>
-              <a:t>service </a:t>
-            </a:r>
-            <a:r>
-              <a:rPr sz="750" b="0" i="0">
-                <a:solidFill>
-                  <a:srgbClr val="FFFFFF"/>
-                </a:solidFill>
-                <a:latin typeface="Segoe UI"/>
-              </a:rPr>
-              <a:t>readiness, </a:t>
-            </a:r>
-            <a:r>
-              <a:rPr sz="750" b="0" i="0">
-                <a:solidFill>
-                  <a:srgbClr val="FFFFFF"/>
-                </a:solidFill>
-                <a:latin typeface="Segoe UI"/>
-              </a:rPr>
-              <a:t>and </a:t>
-            </a:r>
-            <a:r>
-              <a:rPr sz="750" b="0" i="0">
-                <a:solidFill>
-                  <a:srgbClr val="FFFFFF"/>
-                </a:solidFill>
-                <a:latin typeface="Segoe UI"/>
-              </a:rPr>
-              <a:t>partner </a:t>
-            </a:r>
-            <a:r>
-              <a:rPr sz="750" b="0" i="0">
-                <a:solidFill>
-                  <a:srgbClr val="FFFFFF"/>
-                </a:solidFill>
-                <a:latin typeface="Segoe UI"/>
-              </a:rPr>
-              <a:t>performance.</a:t>
-            </a:r>
-          </a:p>
-        </p:txBody>
-      </p:sp>
-      <p:sp>
-        <p:nvSpPr>
-          <p:cNvPr id="17" name="Rectangle 16"/>
-          <p:cNvSpPr/>
-          <p:nvPr/>
-        </p:nvSpPr>
-        <p:spPr>
-          <a:xfrm>
-            <a:off x="6118860" y="3237529"/>
-            <a:ext cx="2807970" cy="1234440"/>
-          </a:xfrm>
-          <a:prstGeom prst="rect">
-            <a:avLst/>
-          </a:prstGeom>
-          <a:solidFill>
-            <a:srgbClr val="16294A"/>
-          </a:solidFill>
-          <a:ln>
-            <a:noFill/>
-          </a:ln>
-          <a:effectLst/>
-        </p:spPr>
-        <p:style>
-          <a:lnRef idx="1">
-            <a:schemeClr val="accent1"/>
-          </a:lnRef>
-          <a:fillRef idx="3">
-            <a:schemeClr val="accent1"/>
-          </a:fillRef>
-          <a:effectRef idx="2">
-            <a:schemeClr val="accent1"/>
-          </a:effectRef>
-          <a:fontRef idx="minor">
-            <a:schemeClr val="lt1"/>
-          </a:fontRef>
-        </p:style>
-        <p:txBody>
-          <a:bodyPr rtlCol="0" anchor="ctr" wrap="square" lIns="0" rIns="0" tIns="0" bIns="0">
-            <a:noAutofit/>
-          </a:bodyPr>
-          <a:lstStyle/>
-          <a:p>
-            <a:pPr algn="ctr">
-              <a:lnSpc>
-                <a:spcPts val="1795"/>
-              </a:lnSpc>
-              <a:spcBef>
-                <a:spcPts val="0"/>
-              </a:spcBef>
-              <a:spcAft>
-                <a:spcPts val="0"/>
-              </a:spcAft>
-            </a:pPr>
-            <a:r>
-              <a:rPr sz="1350" b="0" i="0">
-                <a:solidFill>
-                  <a:srgbClr val="FFFFFF"/>
-                </a:solidFill>
-                <a:latin typeface="Segoe UI"/>
-              </a:rPr>
-              <a:t>Portfolio </a:t>
-            </a:r>
-            <a:r>
-              <a:rPr sz="1350" b="0" i="0">
-                <a:solidFill>
-                  <a:srgbClr val="FFFFFF"/>
-                </a:solidFill>
-                <a:latin typeface="Segoe UI"/>
-              </a:rPr>
-              <a:t>focus</a:t>
-            </a:r>
-          </a:p>
-          <a:p>
-            <a:pPr algn="ctr">
-              <a:lnSpc>
-                <a:spcPts val="216"/>
-              </a:lnSpc>
-              <a:spcBef>
-                <a:spcPts val="0"/>
-              </a:spcBef>
-              <a:spcAft>
-                <a:spcPts val="0"/>
-              </a:spcAft>
-            </a:pPr>
-            <a:r>
-              <a:rPr sz="750" b="0" i="0">
-                <a:solidFill>
-                  <a:srgbClr val="FFFFFF"/>
-                </a:solidFill>
-                <a:latin typeface="Segoe UI"/>
-              </a:rPr>
-              <a:t/>
-            </a:r>
-          </a:p>
-          <a:p>
-            <a:pPr algn="ctr">
-              <a:lnSpc>
-                <a:spcPts val="997"/>
-              </a:lnSpc>
-              <a:spcBef>
-                <a:spcPts val="0"/>
-              </a:spcBef>
-              <a:spcAft>
-                <a:spcPts val="0"/>
-              </a:spcAft>
-            </a:pPr>
-            <a:r>
-              <a:rPr sz="750" b="0" i="0">
-                <a:solidFill>
-                  <a:srgbClr val="FFFFFF"/>
-                </a:solidFill>
-                <a:latin typeface="Segoe UI"/>
-              </a:rPr>
-              <a:t>Lead </a:t>
-            </a:r>
-            <a:r>
-              <a:rPr sz="750" b="0" i="0">
-                <a:solidFill>
-                  <a:srgbClr val="FFFFFF"/>
-                </a:solidFill>
-                <a:latin typeface="Segoe UI"/>
-              </a:rPr>
-              <a:t>with </a:t>
-            </a:r>
-            <a:r>
-              <a:rPr sz="750" b="1" i="0">
-                <a:solidFill>
-                  <a:srgbClr val="FFFFFF"/>
-                </a:solidFill>
-                <a:latin typeface="Segoe UI"/>
-              </a:rPr>
-              <a:t>1</a:t>
-            </a:r>
-            <a:r>
-              <a:rPr sz="750" b="0" i="0">
-                <a:solidFill>
-                  <a:srgbClr val="FFFFFF"/>
-                </a:solidFill>
-                <a:latin typeface="Segoe UI"/>
-              </a:rPr>
-              <a:t> </a:t>
-            </a:r>
-            <a:r>
-              <a:rPr sz="750" b="0" i="0">
-                <a:solidFill>
-                  <a:srgbClr val="FFFFFF"/>
-                </a:solidFill>
-                <a:latin typeface="Segoe UI"/>
-              </a:rPr>
-              <a:t>core </a:t>
-            </a:r>
-            <a:r>
-              <a:rPr sz="750" b="0" i="0">
-                <a:solidFill>
-                  <a:srgbClr val="FFFFFF"/>
-                </a:solidFill>
-                <a:latin typeface="Segoe UI"/>
-              </a:rPr>
-              <a:t>platform, </a:t>
-            </a:r>
-            <a:r>
-              <a:rPr sz="750" b="0" i="0">
-                <a:solidFill>
-                  <a:srgbClr val="FFFFFF"/>
-                </a:solidFill>
-                <a:latin typeface="Segoe UI"/>
-              </a:rPr>
-              <a:t>then </a:t>
-            </a:r>
-            <a:r>
-              <a:rPr sz="750" b="0" i="0">
-                <a:solidFill>
-                  <a:srgbClr val="FFFFFF"/>
-                </a:solidFill>
-                <a:latin typeface="Segoe UI"/>
-              </a:rPr>
-              <a:t>add </a:t>
-            </a:r>
-            <a:r>
-              <a:rPr sz="750" b="1" i="0">
-                <a:solidFill>
-                  <a:srgbClr val="FFFFFF"/>
-                </a:solidFill>
-                <a:latin typeface="Segoe UI"/>
-              </a:rPr>
-              <a:t>2</a:t>
-            </a:r>
-            <a:r>
-              <a:rPr sz="750" b="0" i="0">
-                <a:solidFill>
-                  <a:srgbClr val="FFFFFF"/>
-                </a:solidFill>
-                <a:latin typeface="Segoe UI"/>
-              </a:rPr>
-              <a:t> </a:t>
-            </a:r>
-            <a:r>
-              <a:rPr sz="750" b="0" i="0">
-                <a:solidFill>
-                  <a:srgbClr val="FFFFFF"/>
-                </a:solidFill>
-                <a:latin typeface="Segoe UI"/>
-              </a:rPr>
-              <a:t>adjacencies </a:t>
-            </a:r>
-            <a:r>
-              <a:rPr sz="750" b="0" i="0">
-                <a:solidFill>
-                  <a:srgbClr val="FFFFFF"/>
-                </a:solidFill>
-                <a:latin typeface="Segoe UI"/>
-              </a:rPr>
-              <a:t>after </a:t>
-            </a:r>
-            <a:r>
-              <a:rPr sz="750" b="0" i="0">
-                <a:solidFill>
-                  <a:srgbClr val="FFFFFF"/>
-                </a:solidFill>
-                <a:latin typeface="Segoe UI"/>
-              </a:rPr>
-              <a:t>initial</a:t>
-            </a:r>
-          </a:p>
-          <a:p>
-            <a:pPr algn="ctr">
-              <a:lnSpc>
-                <a:spcPts val="997"/>
-              </a:lnSpc>
-              <a:spcBef>
-                <a:spcPts val="0"/>
-              </a:spcBef>
-              <a:spcAft>
-                <a:spcPts val="0"/>
-              </a:spcAft>
-            </a:pPr>
-            <a:r>
-              <a:rPr sz="750" b="0" i="0">
-                <a:solidFill>
-                  <a:srgbClr val="FFFFFF"/>
-                </a:solidFill>
-                <a:latin typeface="Segoe UI"/>
-              </a:rPr>
-              <a:t>scale </a:t>
-            </a:r>
-            <a:r>
-              <a:rPr sz="750" b="0" i="0">
-                <a:solidFill>
-                  <a:srgbClr val="FFFFFF"/>
-                </a:solidFill>
-                <a:latin typeface="Segoe UI"/>
-              </a:rPr>
-              <a:t>and </a:t>
-            </a:r>
-            <a:r>
-              <a:rPr sz="750" b="0" i="0">
-                <a:solidFill>
-                  <a:srgbClr val="FFFFFF"/>
-                </a:solidFill>
-                <a:latin typeface="Segoe UI"/>
-              </a:rPr>
-              <a:t>brand </a:t>
-            </a:r>
-            <a:r>
-              <a:rPr sz="750" b="0" i="0">
-                <a:solidFill>
-                  <a:srgbClr val="FFFFFF"/>
-                </a:solidFill>
-                <a:latin typeface="Segoe UI"/>
-              </a:rPr>
-              <a:t>proof </a:t>
-            </a:r>
-            <a:r>
-              <a:rPr sz="750" b="0" i="0">
-                <a:solidFill>
-                  <a:srgbClr val="FFFFFF"/>
-                </a:solidFill>
-                <a:latin typeface="Segoe UI"/>
-              </a:rPr>
-              <a:t>points.</a:t>
-            </a:r>
-          </a:p>
-        </p:txBody>
-      </p:sp>
-      <p:sp>
-        <p:nvSpPr>
-          <p:cNvPr id="18" name="Rectangle 17"/>
-          <p:cNvSpPr/>
-          <p:nvPr/>
-        </p:nvSpPr>
-        <p:spPr>
-          <a:xfrm>
-            <a:off x="8972550" y="3237529"/>
-            <a:ext cx="2807970" cy="1234440"/>
-          </a:xfrm>
-          <a:prstGeom prst="rect">
-            <a:avLst/>
-          </a:prstGeom>
-          <a:solidFill>
-            <a:srgbClr val="16294A"/>
-          </a:solidFill>
-          <a:ln>
-            <a:noFill/>
-          </a:ln>
-          <a:effectLst/>
-        </p:spPr>
-        <p:style>
-          <a:lnRef idx="1">
-            <a:schemeClr val="accent1"/>
-          </a:lnRef>
-          <a:fillRef idx="3">
-            <a:schemeClr val="accent1"/>
-          </a:fillRef>
-          <a:effectRef idx="2">
-            <a:schemeClr val="accent1"/>
-          </a:effectRef>
-          <a:fontRef idx="minor">
-            <a:schemeClr val="lt1"/>
-          </a:fontRef>
-        </p:style>
-        <p:txBody>
-          <a:bodyPr rtlCol="0" anchor="ctr" wrap="square" lIns="0" rIns="0" tIns="0" bIns="0">
-            <a:noAutofit/>
-          </a:bodyPr>
-          <a:lstStyle/>
-          <a:p>
-            <a:pPr algn="ctr">
-              <a:lnSpc>
-                <a:spcPts val="1795"/>
-              </a:lnSpc>
-              <a:spcBef>
-                <a:spcPts val="0"/>
-              </a:spcBef>
-              <a:spcAft>
-                <a:spcPts val="0"/>
-              </a:spcAft>
-            </a:pPr>
-            <a:r>
-              <a:rPr sz="1350" b="0" i="0">
-                <a:solidFill>
-                  <a:srgbClr val="FFFFFF"/>
-                </a:solidFill>
-                <a:latin typeface="Segoe UI"/>
-              </a:rPr>
-              <a:t>Capital </a:t>
-            </a:r>
-            <a:r>
-              <a:rPr sz="1350" b="0" i="0">
-                <a:solidFill>
-                  <a:srgbClr val="FFFFFF"/>
-                </a:solidFill>
-                <a:latin typeface="Segoe UI"/>
-              </a:rPr>
-              <a:t>discipline</a:t>
-            </a:r>
-          </a:p>
-          <a:p>
-            <a:pPr algn="ctr">
-              <a:lnSpc>
-                <a:spcPts val="216"/>
-              </a:lnSpc>
-              <a:spcBef>
-                <a:spcPts val="0"/>
-              </a:spcBef>
-              <a:spcAft>
-                <a:spcPts val="0"/>
-              </a:spcAft>
-            </a:pPr>
-            <a:r>
-              <a:rPr sz="750" b="0" i="0">
-                <a:solidFill>
-                  <a:srgbClr val="FFFFFF"/>
-                </a:solidFill>
-                <a:latin typeface="Segoe UI"/>
-              </a:rPr>
-              <a:t/>
-            </a:r>
-          </a:p>
-          <a:p>
-            <a:pPr algn="ctr">
-              <a:lnSpc>
-                <a:spcPts val="997"/>
-              </a:lnSpc>
-              <a:spcBef>
-                <a:spcPts val="0"/>
-              </a:spcBef>
-              <a:spcAft>
-                <a:spcPts val="0"/>
-              </a:spcAft>
-            </a:pPr>
-            <a:r>
-              <a:rPr sz="750" b="0" i="0">
-                <a:solidFill>
-                  <a:srgbClr val="FFFFFF"/>
-                </a:solidFill>
-                <a:latin typeface="Segoe UI"/>
-              </a:rPr>
-              <a:t>Use </a:t>
-            </a:r>
-            <a:r>
-              <a:rPr sz="750" b="1" i="0">
-                <a:solidFill>
-                  <a:srgbClr val="FFFFFF"/>
-                </a:solidFill>
-                <a:latin typeface="Segoe UI"/>
-              </a:rPr>
-              <a:t>18 </a:t>
-            </a:r>
-            <a:r>
-              <a:rPr sz="750" b="1" i="0">
-                <a:solidFill>
-                  <a:srgbClr val="FFFFFF"/>
-                </a:solidFill>
-                <a:latin typeface="Segoe UI"/>
-              </a:rPr>
-              <a:t>months</a:t>
-            </a:r>
-            <a:r>
-              <a:rPr sz="750" b="0" i="0">
-                <a:solidFill>
-                  <a:srgbClr val="FFFFFF"/>
-                </a:solidFill>
-                <a:latin typeface="Segoe UI"/>
-              </a:rPr>
-              <a:t> </a:t>
-            </a:r>
-            <a:r>
-              <a:rPr sz="750" b="0" i="0">
-                <a:solidFill>
-                  <a:srgbClr val="FFFFFF"/>
-                </a:solidFill>
-                <a:latin typeface="Segoe UI"/>
-              </a:rPr>
-              <a:t>of </a:t>
-            </a:r>
-            <a:r>
-              <a:rPr sz="750" b="0" i="0">
-                <a:solidFill>
-                  <a:srgbClr val="FFFFFF"/>
-                </a:solidFill>
-                <a:latin typeface="Segoe UI"/>
-              </a:rPr>
-              <a:t>phased </a:t>
-            </a:r>
-            <a:r>
-              <a:rPr sz="750" b="0" i="0">
-                <a:solidFill>
-                  <a:srgbClr val="FFFFFF"/>
-                </a:solidFill>
-                <a:latin typeface="Segoe UI"/>
-              </a:rPr>
-              <a:t>milestones </a:t>
-            </a:r>
-            <a:r>
-              <a:rPr sz="750" b="0" i="0">
-                <a:solidFill>
-                  <a:srgbClr val="FFFFFF"/>
-                </a:solidFill>
-                <a:latin typeface="Segoe UI"/>
-              </a:rPr>
-              <a:t>to </a:t>
-            </a:r>
-            <a:r>
-              <a:rPr sz="750" b="0" i="0">
-                <a:solidFill>
-                  <a:srgbClr val="FFFFFF"/>
-                </a:solidFill>
-                <a:latin typeface="Segoe UI"/>
-              </a:rPr>
-              <a:t>sequence</a:t>
-            </a:r>
-          </a:p>
-          <a:p>
-            <a:pPr algn="ctr">
-              <a:lnSpc>
-                <a:spcPts val="997"/>
-              </a:lnSpc>
-              <a:spcBef>
-                <a:spcPts val="0"/>
-              </a:spcBef>
-              <a:spcAft>
-                <a:spcPts val="0"/>
-              </a:spcAft>
-            </a:pPr>
-            <a:r>
-              <a:rPr sz="750" b="0" i="0">
-                <a:solidFill>
-                  <a:srgbClr val="FFFFFF"/>
-                </a:solidFill>
-                <a:latin typeface="Segoe UI"/>
-              </a:rPr>
-              <a:t>investment </a:t>
-            </a:r>
-            <a:r>
-              <a:rPr sz="750" b="0" i="0">
-                <a:solidFill>
-                  <a:srgbClr val="FFFFFF"/>
-                </a:solidFill>
-                <a:latin typeface="Segoe UI"/>
-              </a:rPr>
-              <a:t>and </a:t>
-            </a:r>
-            <a:r>
-              <a:rPr sz="750" b="0" i="0">
-                <a:solidFill>
-                  <a:srgbClr val="FFFFFF"/>
-                </a:solidFill>
-                <a:latin typeface="Segoe UI"/>
-              </a:rPr>
-              <a:t>reduce </a:t>
-            </a:r>
-            <a:r>
-              <a:rPr sz="750" b="0" i="0">
-                <a:solidFill>
-                  <a:srgbClr val="FFFFFF"/>
-                </a:solidFill>
-                <a:latin typeface="Segoe UI"/>
-              </a:rPr>
-              <a:t>exposure </a:t>
-            </a:r>
-            <a:r>
-              <a:rPr sz="750" b="0" i="0">
-                <a:solidFill>
-                  <a:srgbClr val="FFFFFF"/>
-                </a:solidFill>
-                <a:latin typeface="Segoe UI"/>
-              </a:rPr>
-              <a:t>versus </a:t>
-            </a:r>
-            <a:r>
-              <a:rPr sz="750" b="0" i="0">
-                <a:solidFill>
-                  <a:srgbClr val="FFFFFF"/>
-                </a:solidFill>
-                <a:latin typeface="Segoe UI"/>
-              </a:rPr>
-              <a:t>a </a:t>
-            </a:r>
-            <a:r>
-              <a:rPr sz="750" b="0" i="0">
-                <a:solidFill>
-                  <a:srgbClr val="FFFFFF"/>
-                </a:solidFill>
-                <a:latin typeface="Segoe UI"/>
-              </a:rPr>
-              <a:t>national </a:t>
-            </a:r>
-            <a:r>
-              <a:rPr sz="750" b="0" i="0">
-                <a:solidFill>
-                  <a:srgbClr val="FFFFFF"/>
-                </a:solidFill>
-                <a:latin typeface="Segoe UI"/>
-              </a:rPr>
-              <a:t>Day </a:t>
-            </a:r>
-            <a:r>
-              <a:rPr sz="750" b="0" i="0">
-                <a:solidFill>
-                  <a:srgbClr val="FFFFFF"/>
-                </a:solidFill>
-                <a:latin typeface="Segoe UI"/>
-              </a:rPr>
-              <a:t>1</a:t>
-            </a:r>
-          </a:p>
-          <a:p>
-            <a:pPr algn="ctr">
-              <a:lnSpc>
-                <a:spcPts val="997"/>
-              </a:lnSpc>
-              <a:spcBef>
-                <a:spcPts val="0"/>
-              </a:spcBef>
-              <a:spcAft>
-                <a:spcPts val="0"/>
-              </a:spcAft>
-            </a:pPr>
-            <a:r>
-              <a:rPr sz="750" b="0" i="0">
-                <a:solidFill>
-                  <a:srgbClr val="FFFFFF"/>
-                </a:solidFill>
-                <a:latin typeface="Segoe UI"/>
-              </a:rPr>
-              <a:t>rollout.</a:t>
-            </a:r>
-          </a:p>
-        </p:txBody>
-      </p:sp>
-      <p:sp>
-        <p:nvSpPr>
-          <p:cNvPr id="19" name="Rectangle 18"/>
-          <p:cNvSpPr/>
-          <p:nvPr/>
-        </p:nvSpPr>
-        <p:spPr>
-          <a:xfrm>
-            <a:off x="411480" y="4773721"/>
-            <a:ext cx="11369040" cy="1211826"/>
+            <a:off x="411480" y="1627632"/>
+            <a:ext cx="11369040" cy="548640"/>
           </a:xfrm>
           <a:prstGeom prst="rect">
             <a:avLst/>
@@ -20497,14 +18494,2111 @@
       </p:sp>
       <p:sp>
         <p:nvSpPr>
+          <p:cNvPr id="8" name="Rounded Rectangle 7"/>
+          <p:cNvSpPr/>
+          <p:nvPr/>
+        </p:nvSpPr>
+        <p:spPr>
+          <a:xfrm>
+            <a:off x="457200" y="1650492"/>
+            <a:ext cx="502920" cy="502920"/>
+          </a:xfrm>
+          <a:prstGeom prst="roundRect">
+            <a:avLst>
+              <a:gd name="adj" fmla="val 18000"/>
+            </a:avLst>
+          </a:prstGeom>
+          <a:solidFill>
+            <a:srgbClr val="16294A"/>
+          </a:solidFill>
+          <a:ln>
+            <a:noFill/>
+          </a:ln>
+          <a:effectLst/>
+        </p:spPr>
+        <p:style>
+          <a:lnRef idx="1">
+            <a:schemeClr val="accent1"/>
+          </a:lnRef>
+          <a:fillRef idx="3">
+            <a:schemeClr val="accent1"/>
+          </a:fillRef>
+          <a:effectRef idx="2">
+            <a:schemeClr val="accent1"/>
+          </a:effectRef>
+          <a:fontRef idx="minor">
+            <a:schemeClr val="lt1"/>
+          </a:fontRef>
+        </p:style>
+        <p:txBody>
+          <a:bodyPr rtlCol="0" anchor="ctr"/>
+          <a:lstStyle/>
+          <a:p>
+            <a:pPr algn="ctr"/>
+          </a:p>
+        </p:txBody>
+      </p:sp>
+      <p:sp>
+        <p:nvSpPr>
+          <p:cNvPr id="9" name="TextBox 8"/>
+          <p:cNvSpPr txBox="1"/>
+          <p:nvPr/>
+        </p:nvSpPr>
+        <p:spPr>
+          <a:xfrm>
+            <a:off x="1014984" y="1627632"/>
+            <a:ext cx="1030887" cy="548640"/>
+          </a:xfrm>
+          <a:prstGeom prst="rect">
+            <a:avLst/>
+          </a:prstGeom>
+          <a:noFill/>
+        </p:spPr>
+        <p:txBody>
+          <a:bodyPr wrap="square" lIns="0" rIns="0" tIns="0" bIns="0" anchor="ctr">
+            <a:noAutofit/>
+          </a:bodyPr>
+          <a:lstStyle/>
+          <a:p>
+            <a:pPr algn="l">
+              <a:spcBef>
+                <a:spcPts val="0"/>
+              </a:spcBef>
+              <a:spcAft>
+                <a:spcPts val="0"/>
+              </a:spcAft>
+            </a:pPr>
+            <a:r>
+              <a:rPr sz="1350" b="1" i="0">
+                <a:solidFill>
+                  <a:srgbClr val="3F3F3F"/>
+                </a:solidFill>
+                <a:latin typeface="Segoe UI"/>
+              </a:rPr>
+              <a:t>50,000</a:t>
+            </a:r>
+            <a:r>
+              <a:rPr sz="1350" b="1" i="0">
+                <a:solidFill>
+                  <a:srgbClr val="3F3F3F"/>
+                </a:solidFill>
+                <a:latin typeface="Segoe UI"/>
+              </a:rPr>
+              <a:t> units</a:t>
+            </a:r>
+          </a:p>
+        </p:txBody>
+      </p:sp>
+      <p:sp>
+        <p:nvSpPr>
+          <p:cNvPr id="10" name="TextBox 9"/>
+          <p:cNvSpPr txBox="1"/>
+          <p:nvPr/>
+        </p:nvSpPr>
+        <p:spPr>
+          <a:xfrm>
+            <a:off x="2045871" y="1825938"/>
+            <a:ext cx="9688929" cy="152028"/>
+          </a:xfrm>
+          <a:prstGeom prst="rect">
+            <a:avLst/>
+          </a:prstGeom>
+          <a:noFill/>
+        </p:spPr>
+        <p:txBody>
+          <a:bodyPr wrap="square" lIns="0" rIns="0" tIns="0" bIns="0" anchor="t">
+            <a:noAutofit/>
+          </a:bodyPr>
+          <a:lstStyle/>
+          <a:p>
+            <a:pPr algn="l">
+              <a:lnSpc>
+                <a:spcPts val="1197"/>
+              </a:lnSpc>
+              <a:spcBef>
+                <a:spcPts val="0"/>
+              </a:spcBef>
+              <a:spcAft>
+                <a:spcPts val="0"/>
+              </a:spcAft>
+            </a:pPr>
+            <a:r>
+              <a:rPr sz="900" b="0" i="0">
+                <a:solidFill>
+                  <a:srgbClr val="3F3F3F"/>
+                </a:solidFill>
+                <a:latin typeface="Segoe UI"/>
+              </a:rPr>
+              <a:t>Illustrative </a:t>
+            </a:r>
+            <a:r>
+              <a:rPr sz="900" b="0" i="0">
+                <a:solidFill>
+                  <a:srgbClr val="3F3F3F"/>
+                </a:solidFill>
+                <a:latin typeface="Segoe UI"/>
+              </a:rPr>
+              <a:t>annual </a:t>
+            </a:r>
+            <a:r>
+              <a:rPr sz="900" b="0" i="0">
+                <a:solidFill>
+                  <a:srgbClr val="3F3F3F"/>
+                </a:solidFill>
+                <a:latin typeface="Segoe UI"/>
+              </a:rPr>
+              <a:t>volume </a:t>
+            </a:r>
+            <a:r>
+              <a:rPr sz="900" b="0" i="0">
+                <a:solidFill>
+                  <a:srgbClr val="3F3F3F"/>
+                </a:solidFill>
+                <a:latin typeface="Segoe UI"/>
+              </a:rPr>
+              <a:t>at </a:t>
+            </a:r>
+            <a:r>
+              <a:rPr sz="900" b="0" i="0">
+                <a:solidFill>
+                  <a:srgbClr val="3F3F3F"/>
+                </a:solidFill>
+                <a:latin typeface="Segoe UI"/>
+              </a:rPr>
+              <a:t>scale, </a:t>
+            </a:r>
+            <a:r>
+              <a:rPr sz="900" b="0" i="0">
+                <a:solidFill>
+                  <a:srgbClr val="3F3F3F"/>
+                </a:solidFill>
+                <a:latin typeface="Segoe UI"/>
+              </a:rPr>
+              <a:t>anchored </a:t>
+            </a:r>
+            <a:r>
+              <a:rPr sz="900" b="0" i="0">
+                <a:solidFill>
+                  <a:srgbClr val="3F3F3F"/>
+                </a:solidFill>
+                <a:latin typeface="Segoe UI"/>
+              </a:rPr>
+              <a:t>on </a:t>
+            </a:r>
+            <a:r>
+              <a:rPr sz="900" b="0" i="0">
+                <a:solidFill>
+                  <a:srgbClr val="3F3F3F"/>
+                </a:solidFill>
+                <a:latin typeface="Segoe UI"/>
+              </a:rPr>
+              <a:t>focused </a:t>
+            </a:r>
+            <a:r>
+              <a:rPr sz="900" b="0" i="0">
+                <a:solidFill>
+                  <a:srgbClr val="3F3F3F"/>
+                </a:solidFill>
+                <a:latin typeface="Segoe UI"/>
+              </a:rPr>
+              <a:t>launch </a:t>
+            </a:r>
+            <a:r>
+              <a:rPr sz="900" b="0" i="0">
+                <a:solidFill>
+                  <a:srgbClr val="3F3F3F"/>
+                </a:solidFill>
+                <a:latin typeface="Segoe UI"/>
+              </a:rPr>
+              <a:t>economics </a:t>
+            </a:r>
+            <a:r>
+              <a:rPr sz="900" b="0" i="0">
+                <a:solidFill>
+                  <a:srgbClr val="3F3F3F"/>
+                </a:solidFill>
+                <a:latin typeface="Segoe UI"/>
+              </a:rPr>
+              <a:t>rather </a:t>
+            </a:r>
+            <a:r>
+              <a:rPr sz="900" b="0" i="0">
+                <a:solidFill>
+                  <a:srgbClr val="3F3F3F"/>
+                </a:solidFill>
+                <a:latin typeface="Segoe UI"/>
+              </a:rPr>
+              <a:t>than </a:t>
+            </a:r>
+            <a:r>
+              <a:rPr sz="900" b="0" i="0">
+                <a:solidFill>
+                  <a:srgbClr val="3F3F3F"/>
+                </a:solidFill>
+                <a:latin typeface="Segoe UI"/>
+              </a:rPr>
+              <a:t>all-segment </a:t>
+            </a:r>
+            <a:r>
+              <a:rPr sz="900" b="0" i="0">
+                <a:solidFill>
+                  <a:srgbClr val="3F3F3F"/>
+                </a:solidFill>
+                <a:latin typeface="Segoe UI"/>
+              </a:rPr>
+              <a:t>entry.</a:t>
+            </a:r>
+          </a:p>
+        </p:txBody>
+      </p:sp>
+      <p:sp>
+        <p:nvSpPr>
+          <p:cNvPr id="11" name="Rectangle 10"/>
+          <p:cNvSpPr/>
+          <p:nvPr/>
+        </p:nvSpPr>
+        <p:spPr>
+          <a:xfrm>
+            <a:off x="411480" y="2203704"/>
+            <a:ext cx="11369040" cy="548640"/>
+          </a:xfrm>
+          <a:prstGeom prst="rect">
+            <a:avLst/>
+          </a:prstGeom>
+          <a:solidFill>
+            <a:srgbClr val="F2F3F5"/>
+          </a:solidFill>
+          <a:ln>
+            <a:noFill/>
+          </a:ln>
+          <a:effectLst/>
+        </p:spPr>
+        <p:style>
+          <a:lnRef idx="1">
+            <a:schemeClr val="accent1"/>
+          </a:lnRef>
+          <a:fillRef idx="3">
+            <a:schemeClr val="accent1"/>
+          </a:fillRef>
+          <a:effectRef idx="2">
+            <a:schemeClr val="accent1"/>
+          </a:effectRef>
+          <a:fontRef idx="minor">
+            <a:schemeClr val="lt1"/>
+          </a:fontRef>
+        </p:style>
+        <p:txBody>
+          <a:bodyPr rtlCol="0" anchor="ctr"/>
+          <a:lstStyle/>
+          <a:p>
+            <a:pPr algn="ctr"/>
+          </a:p>
+        </p:txBody>
+      </p:sp>
+      <p:sp>
+        <p:nvSpPr>
+          <p:cNvPr id="12" name="Rounded Rectangle 11"/>
+          <p:cNvSpPr/>
+          <p:nvPr/>
+        </p:nvSpPr>
+        <p:spPr>
+          <a:xfrm>
+            <a:off x="457200" y="2226564"/>
+            <a:ext cx="502920" cy="502920"/>
+          </a:xfrm>
+          <a:prstGeom prst="roundRect">
+            <a:avLst>
+              <a:gd name="adj" fmla="val 18000"/>
+            </a:avLst>
+          </a:prstGeom>
+          <a:solidFill>
+            <a:srgbClr val="16294A"/>
+          </a:solidFill>
+          <a:ln>
+            <a:noFill/>
+          </a:ln>
+          <a:effectLst/>
+        </p:spPr>
+        <p:style>
+          <a:lnRef idx="1">
+            <a:schemeClr val="accent1"/>
+          </a:lnRef>
+          <a:fillRef idx="3">
+            <a:schemeClr val="accent1"/>
+          </a:fillRef>
+          <a:effectRef idx="2">
+            <a:schemeClr val="accent1"/>
+          </a:effectRef>
+          <a:fontRef idx="minor">
+            <a:schemeClr val="lt1"/>
+          </a:fontRef>
+        </p:style>
+        <p:txBody>
+          <a:bodyPr rtlCol="0" anchor="ctr"/>
+          <a:lstStyle/>
+          <a:p>
+            <a:pPr algn="ctr"/>
+          </a:p>
+        </p:txBody>
+      </p:sp>
+      <p:sp>
+        <p:nvSpPr>
+          <p:cNvPr id="13" name="TextBox 12"/>
+          <p:cNvSpPr txBox="1"/>
+          <p:nvPr/>
+        </p:nvSpPr>
+        <p:spPr>
+          <a:xfrm>
+            <a:off x="1014984" y="2203704"/>
+            <a:ext cx="870154" cy="548640"/>
+          </a:xfrm>
+          <a:prstGeom prst="rect">
+            <a:avLst/>
+          </a:prstGeom>
+          <a:noFill/>
+        </p:spPr>
+        <p:txBody>
+          <a:bodyPr wrap="square" lIns="0" rIns="0" tIns="0" bIns="0" anchor="ctr">
+            <a:noAutofit/>
+          </a:bodyPr>
+          <a:lstStyle/>
+          <a:p>
+            <a:pPr algn="l">
+              <a:spcBef>
+                <a:spcPts val="0"/>
+              </a:spcBef>
+              <a:spcAft>
+                <a:spcPts val="0"/>
+              </a:spcAft>
+            </a:pPr>
+            <a:r>
+              <a:rPr sz="1350" b="1" i="0">
+                <a:solidFill>
+                  <a:srgbClr val="3F3F3F"/>
+                </a:solidFill>
+                <a:latin typeface="Segoe UI"/>
+              </a:rPr>
+              <a:t>15%</a:t>
+            </a:r>
+            <a:r>
+              <a:rPr sz="1350" b="1" i="0">
+                <a:solidFill>
+                  <a:srgbClr val="3F3F3F"/>
+                </a:solidFill>
+                <a:latin typeface="Segoe UI"/>
+              </a:rPr>
+              <a:t> share</a:t>
+            </a:r>
+          </a:p>
+        </p:txBody>
+      </p:sp>
+      <p:sp>
+        <p:nvSpPr>
+          <p:cNvPr id="14" name="TextBox 13"/>
+          <p:cNvSpPr txBox="1"/>
+          <p:nvPr/>
+        </p:nvSpPr>
+        <p:spPr>
+          <a:xfrm>
+            <a:off x="1885138" y="2402010"/>
+            <a:ext cx="9849662" cy="152028"/>
+          </a:xfrm>
+          <a:prstGeom prst="rect">
+            <a:avLst/>
+          </a:prstGeom>
+          <a:noFill/>
+        </p:spPr>
+        <p:txBody>
+          <a:bodyPr wrap="square" lIns="0" rIns="0" tIns="0" bIns="0" anchor="t">
+            <a:noAutofit/>
+          </a:bodyPr>
+          <a:lstStyle/>
+          <a:p>
+            <a:pPr algn="l">
+              <a:lnSpc>
+                <a:spcPts val="1197"/>
+              </a:lnSpc>
+              <a:spcBef>
+                <a:spcPts val="0"/>
+              </a:spcBef>
+              <a:spcAft>
+                <a:spcPts val="0"/>
+              </a:spcAft>
+            </a:pPr>
+            <a:r>
+              <a:rPr sz="900" b="0" i="0">
+                <a:solidFill>
+                  <a:srgbClr val="3F3F3F"/>
+                </a:solidFill>
+                <a:latin typeface="Segoe UI"/>
+              </a:rPr>
+              <a:t>Illustrative </a:t>
+            </a:r>
+            <a:r>
+              <a:rPr sz="900" b="0" i="0">
+                <a:solidFill>
+                  <a:srgbClr val="3F3F3F"/>
+                </a:solidFill>
+                <a:latin typeface="Segoe UI"/>
+              </a:rPr>
+              <a:t>target </a:t>
+            </a:r>
+            <a:r>
+              <a:rPr sz="900" b="0" i="0">
+                <a:solidFill>
+                  <a:srgbClr val="3F3F3F"/>
+                </a:solidFill>
+                <a:latin typeface="Segoe UI"/>
+              </a:rPr>
+              <a:t>niche </a:t>
+            </a:r>
+            <a:r>
+              <a:rPr sz="900" b="0" i="0">
+                <a:solidFill>
+                  <a:srgbClr val="3F3F3F"/>
+                </a:solidFill>
+                <a:latin typeface="Segoe UI"/>
+              </a:rPr>
+              <a:t>share, </a:t>
+            </a:r>
+            <a:r>
+              <a:rPr sz="900" b="0" i="0">
+                <a:solidFill>
+                  <a:srgbClr val="3F3F3F"/>
+                </a:solidFill>
+                <a:latin typeface="Segoe UI"/>
+              </a:rPr>
+              <a:t>concentrated </a:t>
+            </a:r>
+            <a:r>
+              <a:rPr sz="900" b="0" i="0">
+                <a:solidFill>
+                  <a:srgbClr val="3F3F3F"/>
+                </a:solidFill>
+                <a:latin typeface="Segoe UI"/>
+              </a:rPr>
+              <a:t>in </a:t>
+            </a:r>
+            <a:r>
+              <a:rPr sz="900" b="0" i="0">
+                <a:solidFill>
+                  <a:srgbClr val="3F3F3F"/>
+                </a:solidFill>
+                <a:latin typeface="Segoe UI"/>
+              </a:rPr>
+              <a:t>the </a:t>
+            </a:r>
+            <a:r>
+              <a:rPr sz="900" b="0" i="0">
+                <a:solidFill>
+                  <a:srgbClr val="3F3F3F"/>
+                </a:solidFill>
+                <a:latin typeface="Segoe UI"/>
+              </a:rPr>
+              <a:t>most </a:t>
+            </a:r>
+            <a:r>
+              <a:rPr sz="900" b="0" i="0">
+                <a:solidFill>
+                  <a:srgbClr val="3F3F3F"/>
+                </a:solidFill>
+                <a:latin typeface="Segoe UI"/>
+              </a:rPr>
+              <a:t>attractive </a:t>
+            </a:r>
+            <a:r>
+              <a:rPr sz="900" b="0" i="0">
+                <a:solidFill>
+                  <a:srgbClr val="3F3F3F"/>
+                </a:solidFill>
+                <a:latin typeface="Segoe UI"/>
+              </a:rPr>
+              <a:t>entry </a:t>
+            </a:r>
+            <a:r>
+              <a:rPr sz="900" b="0" i="0">
+                <a:solidFill>
+                  <a:srgbClr val="3F3F3F"/>
+                </a:solidFill>
+                <a:latin typeface="Segoe UI"/>
+              </a:rPr>
+              <a:t>segment </a:t>
+            </a:r>
+            <a:r>
+              <a:rPr sz="900" b="0" i="0">
+                <a:solidFill>
+                  <a:srgbClr val="3F3F3F"/>
+                </a:solidFill>
+                <a:latin typeface="Segoe UI"/>
+              </a:rPr>
+              <a:t>before </a:t>
+            </a:r>
+            <a:r>
+              <a:rPr sz="900" b="0" i="0">
+                <a:solidFill>
+                  <a:srgbClr val="3F3F3F"/>
+                </a:solidFill>
+                <a:latin typeface="Segoe UI"/>
+              </a:rPr>
+              <a:t>broader </a:t>
+            </a:r>
+            <a:r>
+              <a:rPr sz="900" b="0" i="0">
+                <a:solidFill>
+                  <a:srgbClr val="3F3F3F"/>
+                </a:solidFill>
+                <a:latin typeface="Segoe UI"/>
+              </a:rPr>
+              <a:t>expansion.</a:t>
+            </a:r>
+          </a:p>
+        </p:txBody>
+      </p:sp>
+      <p:sp>
+        <p:nvSpPr>
+          <p:cNvPr id="15" name="Rectangle 14"/>
+          <p:cNvSpPr/>
+          <p:nvPr/>
+        </p:nvSpPr>
+        <p:spPr>
+          <a:xfrm>
+            <a:off x="411480" y="2779776"/>
+            <a:ext cx="11369040" cy="548640"/>
+          </a:xfrm>
+          <a:prstGeom prst="rect">
+            <a:avLst/>
+          </a:prstGeom>
+          <a:solidFill>
+            <a:srgbClr val="E8EBEF"/>
+          </a:solidFill>
+          <a:ln>
+            <a:noFill/>
+          </a:ln>
+          <a:effectLst/>
+        </p:spPr>
+        <p:style>
+          <a:lnRef idx="1">
+            <a:schemeClr val="accent1"/>
+          </a:lnRef>
+          <a:fillRef idx="3">
+            <a:schemeClr val="accent1"/>
+          </a:fillRef>
+          <a:effectRef idx="2">
+            <a:schemeClr val="accent1"/>
+          </a:effectRef>
+          <a:fontRef idx="minor">
+            <a:schemeClr val="lt1"/>
+          </a:fontRef>
+        </p:style>
+        <p:txBody>
+          <a:bodyPr rtlCol="0" anchor="ctr"/>
+          <a:lstStyle/>
+          <a:p>
+            <a:pPr algn="ctr"/>
+          </a:p>
+        </p:txBody>
+      </p:sp>
+      <p:sp>
+        <p:nvSpPr>
+          <p:cNvPr id="16" name="Rounded Rectangle 15"/>
+          <p:cNvSpPr/>
+          <p:nvPr/>
+        </p:nvSpPr>
+        <p:spPr>
+          <a:xfrm>
+            <a:off x="457200" y="2802636"/>
+            <a:ext cx="502920" cy="502920"/>
+          </a:xfrm>
+          <a:prstGeom prst="roundRect">
+            <a:avLst>
+              <a:gd name="adj" fmla="val 18000"/>
+            </a:avLst>
+          </a:prstGeom>
+          <a:solidFill>
+            <a:srgbClr val="16294A"/>
+          </a:solidFill>
+          <a:ln>
+            <a:noFill/>
+          </a:ln>
+          <a:effectLst/>
+        </p:spPr>
+        <p:style>
+          <a:lnRef idx="1">
+            <a:schemeClr val="accent1"/>
+          </a:lnRef>
+          <a:fillRef idx="3">
+            <a:schemeClr val="accent1"/>
+          </a:fillRef>
+          <a:effectRef idx="2">
+            <a:schemeClr val="accent1"/>
+          </a:effectRef>
+          <a:fontRef idx="minor">
+            <a:schemeClr val="lt1"/>
+          </a:fontRef>
+        </p:style>
+        <p:txBody>
+          <a:bodyPr rtlCol="0" anchor="ctr"/>
+          <a:lstStyle/>
+          <a:p>
+            <a:pPr algn="ctr"/>
+          </a:p>
+        </p:txBody>
+      </p:sp>
+      <p:sp>
+        <p:nvSpPr>
+          <p:cNvPr id="17" name="TextBox 16"/>
+          <p:cNvSpPr txBox="1"/>
+          <p:nvPr/>
+        </p:nvSpPr>
+        <p:spPr>
+          <a:xfrm>
+            <a:off x="1014984" y="2779776"/>
+            <a:ext cx="901212" cy="548640"/>
+          </a:xfrm>
+          <a:prstGeom prst="rect">
+            <a:avLst/>
+          </a:prstGeom>
+          <a:noFill/>
+        </p:spPr>
+        <p:txBody>
+          <a:bodyPr wrap="square" lIns="0" rIns="0" tIns="0" bIns="0" anchor="ctr">
+            <a:noAutofit/>
+          </a:bodyPr>
+          <a:lstStyle/>
+          <a:p>
+            <a:pPr algn="l">
+              <a:spcBef>
+                <a:spcPts val="0"/>
+              </a:spcBef>
+              <a:spcAft>
+                <a:spcPts val="0"/>
+              </a:spcAft>
+            </a:pPr>
+            <a:r>
+              <a:rPr sz="1350" b="1" i="0">
+                <a:solidFill>
+                  <a:srgbClr val="3F3F3F"/>
+                </a:solidFill>
+                <a:latin typeface="Segoe UI"/>
+              </a:rPr>
+              <a:t>18 months</a:t>
+            </a:r>
+          </a:p>
+        </p:txBody>
+      </p:sp>
+      <p:sp>
+        <p:nvSpPr>
+          <p:cNvPr id="18" name="TextBox 17"/>
+          <p:cNvSpPr txBox="1"/>
+          <p:nvPr/>
+        </p:nvSpPr>
+        <p:spPr>
+          <a:xfrm>
+            <a:off x="1916196" y="2978082"/>
+            <a:ext cx="9818604" cy="152028"/>
+          </a:xfrm>
+          <a:prstGeom prst="rect">
+            <a:avLst/>
+          </a:prstGeom>
+          <a:noFill/>
+        </p:spPr>
+        <p:txBody>
+          <a:bodyPr wrap="square" lIns="0" rIns="0" tIns="0" bIns="0" anchor="t">
+            <a:noAutofit/>
+          </a:bodyPr>
+          <a:lstStyle/>
+          <a:p>
+            <a:pPr algn="l">
+              <a:lnSpc>
+                <a:spcPts val="1197"/>
+              </a:lnSpc>
+              <a:spcBef>
+                <a:spcPts val="0"/>
+              </a:spcBef>
+              <a:spcAft>
+                <a:spcPts val="0"/>
+              </a:spcAft>
+            </a:pPr>
+            <a:r>
+              <a:rPr sz="900" b="0" i="0">
+                <a:solidFill>
+                  <a:srgbClr val="3F3F3F"/>
+                </a:solidFill>
+                <a:latin typeface="Segoe UI"/>
+              </a:rPr>
+              <a:t>Phased </a:t>
+            </a:r>
+            <a:r>
+              <a:rPr sz="900" b="0" i="0">
+                <a:solidFill>
+                  <a:srgbClr val="3F3F3F"/>
+                </a:solidFill>
+                <a:latin typeface="Segoe UI"/>
+              </a:rPr>
+              <a:t>market </a:t>
+            </a:r>
+            <a:r>
+              <a:rPr sz="900" b="0" i="0">
+                <a:solidFill>
+                  <a:srgbClr val="3F3F3F"/>
+                </a:solidFill>
+                <a:latin typeface="Segoe UI"/>
+              </a:rPr>
+              <a:t>entry </a:t>
+            </a:r>
+            <a:r>
+              <a:rPr sz="900" b="0" i="0">
+                <a:solidFill>
+                  <a:srgbClr val="3F3F3F"/>
+                </a:solidFill>
+                <a:latin typeface="Segoe UI"/>
+              </a:rPr>
+              <a:t>timeline </a:t>
+            </a:r>
+            <a:r>
+              <a:rPr sz="900" b="0" i="0">
+                <a:solidFill>
+                  <a:srgbClr val="3F3F3F"/>
+                </a:solidFill>
+                <a:latin typeface="Segoe UI"/>
+              </a:rPr>
+              <a:t>from </a:t>
+            </a:r>
+            <a:r>
+              <a:rPr sz="900" b="0" i="0">
+                <a:solidFill>
+                  <a:srgbClr val="3F3F3F"/>
+                </a:solidFill>
+                <a:latin typeface="Segoe UI"/>
+              </a:rPr>
+              <a:t>launch </a:t>
+            </a:r>
+            <a:r>
+              <a:rPr sz="900" b="0" i="0">
+                <a:solidFill>
+                  <a:srgbClr val="3F3F3F"/>
+                </a:solidFill>
+                <a:latin typeface="Segoe UI"/>
+              </a:rPr>
+              <a:t>preparation </a:t>
+            </a:r>
+            <a:r>
+              <a:rPr sz="900" b="0" i="0">
+                <a:solidFill>
+                  <a:srgbClr val="3F3F3F"/>
+                </a:solidFill>
+                <a:latin typeface="Segoe UI"/>
+              </a:rPr>
+              <a:t>to </a:t>
+            </a:r>
+            <a:r>
+              <a:rPr sz="900" b="0" i="0">
+                <a:solidFill>
+                  <a:srgbClr val="3F3F3F"/>
+                </a:solidFill>
+                <a:latin typeface="Segoe UI"/>
+              </a:rPr>
+              <a:t>scale-up, </a:t>
+            </a:r>
+            <a:r>
+              <a:rPr sz="900" b="0" i="0">
+                <a:solidFill>
+                  <a:srgbClr val="3F3F3F"/>
+                </a:solidFill>
+                <a:latin typeface="Segoe UI"/>
+              </a:rPr>
+              <a:t>with </a:t>
+            </a:r>
+            <a:r>
+              <a:rPr sz="900" b="0" i="0">
+                <a:solidFill>
+                  <a:srgbClr val="3F3F3F"/>
+                </a:solidFill>
+                <a:latin typeface="Segoe UI"/>
+              </a:rPr>
+              <a:t>gates </a:t>
+            </a:r>
+            <a:r>
+              <a:rPr sz="900" b="0" i="0">
+                <a:solidFill>
+                  <a:srgbClr val="3F3F3F"/>
+                </a:solidFill>
+                <a:latin typeface="Segoe UI"/>
+              </a:rPr>
+              <a:t>to </a:t>
+            </a:r>
+            <a:r>
+              <a:rPr sz="900" b="0" i="0">
+                <a:solidFill>
+                  <a:srgbClr val="3F3F3F"/>
+                </a:solidFill>
+                <a:latin typeface="Segoe UI"/>
+              </a:rPr>
+              <a:t>manage </a:t>
+            </a:r>
+            <a:r>
+              <a:rPr sz="900" b="0" i="0">
+                <a:solidFill>
+                  <a:srgbClr val="3F3F3F"/>
+                </a:solidFill>
+                <a:latin typeface="Segoe UI"/>
+              </a:rPr>
+              <a:t>execution </a:t>
+            </a:r>
+            <a:r>
+              <a:rPr sz="900" b="0" i="0">
+                <a:solidFill>
+                  <a:srgbClr val="3F3F3F"/>
+                </a:solidFill>
+                <a:latin typeface="Segoe UI"/>
+              </a:rPr>
+              <a:t>risk.</a:t>
+            </a:r>
+          </a:p>
+        </p:txBody>
+      </p:sp>
+      <p:sp>
+        <p:nvSpPr>
+          <p:cNvPr id="19" name="Rectangle 18"/>
+          <p:cNvSpPr/>
+          <p:nvPr/>
+        </p:nvSpPr>
+        <p:spPr>
+          <a:xfrm>
+            <a:off x="411480" y="3817950"/>
+            <a:ext cx="2807970" cy="1093038"/>
+          </a:xfrm>
+          <a:prstGeom prst="rect">
+            <a:avLst/>
+          </a:prstGeom>
+          <a:solidFill>
+            <a:srgbClr val="16294A"/>
+          </a:solidFill>
+          <a:ln>
+            <a:noFill/>
+          </a:ln>
+          <a:effectLst>
+            <a:outerShdw blurRad="40000" dist="24000" dir="5400000" rotWithShape="0">
+              <a:srgbClr val="1A1A1A">
+                <a:alpha val="62000"/>
+              </a:srgbClr>
+            </a:outerShdw>
+          </a:effectLst>
+        </p:spPr>
+        <p:style>
+          <a:lnRef idx="1">
+            <a:schemeClr val="accent1"/>
+          </a:lnRef>
+          <a:fillRef idx="3">
+            <a:schemeClr val="accent1"/>
+          </a:fillRef>
+          <a:effectRef idx="2">
+            <a:schemeClr val="accent1"/>
+          </a:effectRef>
+          <a:fontRef idx="minor">
+            <a:schemeClr val="lt1"/>
+          </a:fontRef>
+        </p:style>
+        <p:txBody>
+          <a:bodyPr rtlCol="0" anchor="ctr" wrap="square" lIns="0" rIns="0" tIns="0" bIns="0">
+            <a:noAutofit/>
+          </a:bodyPr>
+          <a:lstStyle/>
+          <a:p>
+            <a:pPr algn="ctr">
+              <a:lnSpc>
+                <a:spcPts val="1795"/>
+              </a:lnSpc>
+              <a:spcBef>
+                <a:spcPts val="0"/>
+              </a:spcBef>
+              <a:spcAft>
+                <a:spcPts val="0"/>
+              </a:spcAft>
+            </a:pPr>
+            <a:r>
+              <a:rPr sz="1350" b="0" i="0">
+                <a:solidFill>
+                  <a:srgbClr val="FFFFFF"/>
+                </a:solidFill>
+                <a:latin typeface="Segoe UI"/>
+              </a:rPr>
+              <a:t>Phase </a:t>
+            </a:r>
+            <a:r>
+              <a:rPr sz="1350" b="0" i="0">
+                <a:solidFill>
+                  <a:srgbClr val="FFFFFF"/>
+                </a:solidFill>
+                <a:latin typeface="Segoe UI"/>
+              </a:rPr>
+              <a:t>1 </a:t>
+            </a:r>
+            <a:r>
+              <a:rPr sz="1350" b="0" i="0">
+                <a:solidFill>
+                  <a:srgbClr val="FFFFFF"/>
+                </a:solidFill>
+                <a:latin typeface="Segoe UI"/>
+              </a:rPr>
+              <a:t>launch</a:t>
+            </a:r>
+          </a:p>
+          <a:p>
+            <a:pPr algn="ctr">
+              <a:lnSpc>
+                <a:spcPts val="216"/>
+              </a:lnSpc>
+              <a:spcBef>
+                <a:spcPts val="0"/>
+              </a:spcBef>
+              <a:spcAft>
+                <a:spcPts val="0"/>
+              </a:spcAft>
+            </a:pPr>
+            <a:r>
+              <a:rPr sz="750" b="0" i="0">
+                <a:solidFill>
+                  <a:srgbClr val="FFFFFF"/>
+                </a:solidFill>
+                <a:latin typeface="Segoe UI"/>
+              </a:rPr>
+              <a:t/>
+            </a:r>
+          </a:p>
+          <a:p>
+            <a:pPr algn="ctr">
+              <a:lnSpc>
+                <a:spcPts val="997"/>
+              </a:lnSpc>
+              <a:spcBef>
+                <a:spcPts val="0"/>
+              </a:spcBef>
+              <a:spcAft>
+                <a:spcPts val="0"/>
+              </a:spcAft>
+            </a:pPr>
+            <a:r>
+              <a:rPr sz="750" b="0" i="0">
+                <a:solidFill>
+                  <a:srgbClr val="FFFFFF"/>
+                </a:solidFill>
+                <a:latin typeface="Segoe UI"/>
+              </a:rPr>
+              <a:t>Enter </a:t>
+            </a:r>
+            <a:r>
+              <a:rPr sz="750" b="1" i="0">
+                <a:solidFill>
+                  <a:srgbClr val="FFFFFF"/>
+                </a:solidFill>
+                <a:latin typeface="Segoe UI"/>
+              </a:rPr>
+              <a:t>1</a:t>
+            </a:r>
+            <a:r>
+              <a:rPr sz="750" b="0" i="0">
+                <a:solidFill>
+                  <a:srgbClr val="FFFFFF"/>
+                </a:solidFill>
+                <a:latin typeface="Segoe UI"/>
+              </a:rPr>
+              <a:t> </a:t>
+            </a:r>
+            <a:r>
+              <a:rPr sz="750" b="0" i="0">
+                <a:solidFill>
+                  <a:srgbClr val="FFFFFF"/>
+                </a:solidFill>
+                <a:latin typeface="Segoe UI"/>
+              </a:rPr>
+              <a:t>priority </a:t>
+            </a:r>
+            <a:r>
+              <a:rPr sz="750" b="0" i="0">
+                <a:solidFill>
+                  <a:srgbClr val="FFFFFF"/>
+                </a:solidFill>
+                <a:latin typeface="Segoe UI"/>
+              </a:rPr>
+              <a:t>segment </a:t>
+            </a:r>
+            <a:r>
+              <a:rPr sz="750" b="0" i="0">
+                <a:solidFill>
+                  <a:srgbClr val="FFFFFF"/>
+                </a:solidFill>
+                <a:latin typeface="Segoe UI"/>
+              </a:rPr>
+              <a:t>with </a:t>
+            </a:r>
+            <a:r>
+              <a:rPr sz="750" b="1" i="0">
+                <a:solidFill>
+                  <a:srgbClr val="FFFFFF"/>
+                </a:solidFill>
+                <a:latin typeface="Segoe UI"/>
+              </a:rPr>
+              <a:t>3</a:t>
+            </a:r>
+            <a:r>
+              <a:rPr sz="750" b="0" i="0">
+                <a:solidFill>
+                  <a:srgbClr val="FFFFFF"/>
+                </a:solidFill>
+                <a:latin typeface="Segoe UI"/>
+              </a:rPr>
+              <a:t> </a:t>
+            </a:r>
+            <a:r>
+              <a:rPr sz="750" b="0" i="0">
+                <a:solidFill>
+                  <a:srgbClr val="FFFFFF"/>
+                </a:solidFill>
+                <a:latin typeface="Segoe UI"/>
+              </a:rPr>
+              <a:t>launch </a:t>
+            </a:r>
+            <a:r>
+              <a:rPr sz="750" b="0" i="0">
+                <a:solidFill>
+                  <a:srgbClr val="FFFFFF"/>
+                </a:solidFill>
+                <a:latin typeface="Segoe UI"/>
+              </a:rPr>
+              <a:t>cities </a:t>
+            </a:r>
+            <a:r>
+              <a:rPr sz="750" b="0" i="0">
+                <a:solidFill>
+                  <a:srgbClr val="FFFFFF"/>
+                </a:solidFill>
+                <a:latin typeface="Segoe UI"/>
+              </a:rPr>
+              <a:t>to </a:t>
+            </a:r>
+            <a:r>
+              <a:rPr sz="750" b="0" i="0">
+                <a:solidFill>
+                  <a:srgbClr val="FFFFFF"/>
+                </a:solidFill>
+                <a:latin typeface="Segoe UI"/>
+              </a:rPr>
+              <a:t>validate</a:t>
+            </a:r>
+          </a:p>
+          <a:p>
+            <a:pPr algn="ctr">
+              <a:lnSpc>
+                <a:spcPts val="997"/>
+              </a:lnSpc>
+              <a:spcBef>
+                <a:spcPts val="0"/>
+              </a:spcBef>
+              <a:spcAft>
+                <a:spcPts val="0"/>
+              </a:spcAft>
+            </a:pPr>
+            <a:r>
+              <a:rPr sz="750" b="0" i="0">
+                <a:solidFill>
+                  <a:srgbClr val="FFFFFF"/>
+                </a:solidFill>
+                <a:latin typeface="Segoe UI"/>
+              </a:rPr>
+              <a:t>product-market </a:t>
+            </a:r>
+            <a:r>
+              <a:rPr sz="750" b="0" i="0">
+                <a:solidFill>
+                  <a:srgbClr val="FFFFFF"/>
+                </a:solidFill>
+                <a:latin typeface="Segoe UI"/>
+              </a:rPr>
+              <a:t>fit </a:t>
+            </a:r>
+            <a:r>
+              <a:rPr sz="750" b="0" i="0">
+                <a:solidFill>
+                  <a:srgbClr val="FFFFFF"/>
+                </a:solidFill>
+                <a:latin typeface="Segoe UI"/>
+              </a:rPr>
+              <a:t>and </a:t>
+            </a:r>
+            <a:r>
+              <a:rPr sz="750" b="0" i="0">
+                <a:solidFill>
+                  <a:srgbClr val="FFFFFF"/>
+                </a:solidFill>
+                <a:latin typeface="Segoe UI"/>
+              </a:rPr>
+              <a:t>channel </a:t>
+            </a:r>
+            <a:r>
+              <a:rPr sz="750" b="0" i="0">
+                <a:solidFill>
+                  <a:srgbClr val="FFFFFF"/>
+                </a:solidFill>
+                <a:latin typeface="Segoe UI"/>
+              </a:rPr>
+              <a:t>economics.</a:t>
+            </a:r>
+          </a:p>
+        </p:txBody>
+      </p:sp>
+      <p:sp>
+        <p:nvSpPr>
           <p:cNvPr id="20" name="Rectangle 19"/>
           <p:cNvSpPr/>
           <p:nvPr/>
         </p:nvSpPr>
         <p:spPr>
           <a:xfrm>
-            <a:off x="411480" y="4773721"/>
-            <a:ext cx="32004" cy="1211826"/>
+            <a:off x="3265170" y="3817950"/>
+            <a:ext cx="2807970" cy="1093038"/>
+          </a:xfrm>
+          <a:prstGeom prst="rect">
+            <a:avLst/>
+          </a:prstGeom>
+          <a:solidFill>
+            <a:srgbClr val="16294A"/>
+          </a:solidFill>
+          <a:ln>
+            <a:noFill/>
+          </a:ln>
+          <a:effectLst>
+            <a:outerShdw blurRad="40000" dist="24000" dir="5400000" rotWithShape="0">
+              <a:srgbClr val="1A1A1A">
+                <a:alpha val="62000"/>
+              </a:srgbClr>
+            </a:outerShdw>
+          </a:effectLst>
+        </p:spPr>
+        <p:style>
+          <a:lnRef idx="1">
+            <a:schemeClr val="accent1"/>
+          </a:lnRef>
+          <a:fillRef idx="3">
+            <a:schemeClr val="accent1"/>
+          </a:fillRef>
+          <a:effectRef idx="2">
+            <a:schemeClr val="accent1"/>
+          </a:effectRef>
+          <a:fontRef idx="minor">
+            <a:schemeClr val="lt1"/>
+          </a:fontRef>
+        </p:style>
+        <p:txBody>
+          <a:bodyPr rtlCol="0" anchor="ctr" wrap="square" lIns="0" rIns="0" tIns="0" bIns="0">
+            <a:noAutofit/>
+          </a:bodyPr>
+          <a:lstStyle/>
+          <a:p>
+            <a:pPr algn="ctr">
+              <a:lnSpc>
+                <a:spcPts val="1795"/>
+              </a:lnSpc>
+              <a:spcBef>
+                <a:spcPts val="0"/>
+              </a:spcBef>
+              <a:spcAft>
+                <a:spcPts val="0"/>
+              </a:spcAft>
+            </a:pPr>
+            <a:r>
+              <a:rPr sz="1350" b="0" i="0">
+                <a:solidFill>
+                  <a:srgbClr val="FFFFFF"/>
+                </a:solidFill>
+                <a:latin typeface="Segoe UI"/>
+              </a:rPr>
+              <a:t>Phase </a:t>
+            </a:r>
+            <a:r>
+              <a:rPr sz="1350" b="0" i="0">
+                <a:solidFill>
+                  <a:srgbClr val="FFFFFF"/>
+                </a:solidFill>
+                <a:latin typeface="Segoe UI"/>
+              </a:rPr>
+              <a:t>2 </a:t>
+            </a:r>
+            <a:r>
+              <a:rPr sz="1350" b="0" i="0">
+                <a:solidFill>
+                  <a:srgbClr val="FFFFFF"/>
+                </a:solidFill>
+                <a:latin typeface="Segoe UI"/>
+              </a:rPr>
+              <a:t>expansion</a:t>
+            </a:r>
+          </a:p>
+          <a:p>
+            <a:pPr algn="ctr">
+              <a:lnSpc>
+                <a:spcPts val="216"/>
+              </a:lnSpc>
+              <a:spcBef>
+                <a:spcPts val="0"/>
+              </a:spcBef>
+              <a:spcAft>
+                <a:spcPts val="0"/>
+              </a:spcAft>
+            </a:pPr>
+            <a:r>
+              <a:rPr sz="750" b="0" i="0">
+                <a:solidFill>
+                  <a:srgbClr val="FFFFFF"/>
+                </a:solidFill>
+                <a:latin typeface="Segoe UI"/>
+              </a:rPr>
+              <a:t/>
+            </a:r>
+          </a:p>
+          <a:p>
+            <a:pPr algn="ctr">
+              <a:lnSpc>
+                <a:spcPts val="997"/>
+              </a:lnSpc>
+              <a:spcBef>
+                <a:spcPts val="0"/>
+              </a:spcBef>
+              <a:spcAft>
+                <a:spcPts val="0"/>
+              </a:spcAft>
+            </a:pPr>
+            <a:r>
+              <a:rPr sz="750" b="0" i="0">
+                <a:solidFill>
+                  <a:srgbClr val="FFFFFF"/>
+                </a:solidFill>
+                <a:latin typeface="Segoe UI"/>
+              </a:rPr>
+              <a:t>Expand </a:t>
+            </a:r>
+            <a:r>
+              <a:rPr sz="750" b="0" i="0">
+                <a:solidFill>
+                  <a:srgbClr val="FFFFFF"/>
+                </a:solidFill>
+                <a:latin typeface="Segoe UI"/>
+              </a:rPr>
+              <a:t>to </a:t>
+            </a:r>
+            <a:r>
+              <a:rPr sz="750" b="1" i="0">
+                <a:solidFill>
+                  <a:srgbClr val="FFFFFF"/>
+                </a:solidFill>
+                <a:latin typeface="Segoe UI"/>
+              </a:rPr>
+              <a:t>10</a:t>
+            </a:r>
+            <a:r>
+              <a:rPr sz="750" b="0" i="0">
+                <a:solidFill>
+                  <a:srgbClr val="FFFFFF"/>
+                </a:solidFill>
+                <a:latin typeface="Segoe UI"/>
+              </a:rPr>
+              <a:t> </a:t>
+            </a:r>
+            <a:r>
+              <a:rPr sz="750" b="0" i="0">
+                <a:solidFill>
+                  <a:srgbClr val="FFFFFF"/>
+                </a:solidFill>
+                <a:latin typeface="Segoe UI"/>
+              </a:rPr>
+              <a:t>cities </a:t>
+            </a:r>
+            <a:r>
+              <a:rPr sz="750" b="0" i="0">
+                <a:solidFill>
+                  <a:srgbClr val="FFFFFF"/>
+                </a:solidFill>
+                <a:latin typeface="Segoe UI"/>
+              </a:rPr>
+              <a:t>after </a:t>
+            </a:r>
+            <a:r>
+              <a:rPr sz="750" b="0" i="0">
+                <a:solidFill>
+                  <a:srgbClr val="FFFFFF"/>
+                </a:solidFill>
+                <a:latin typeface="Segoe UI"/>
+              </a:rPr>
+              <a:t>milestone </a:t>
+            </a:r>
+            <a:r>
+              <a:rPr sz="750" b="0" i="0">
+                <a:solidFill>
+                  <a:srgbClr val="FFFFFF"/>
+                </a:solidFill>
+                <a:latin typeface="Segoe UI"/>
+              </a:rPr>
+              <a:t>gates </a:t>
+            </a:r>
+            <a:r>
+              <a:rPr sz="750" b="0" i="0">
+                <a:solidFill>
+                  <a:srgbClr val="FFFFFF"/>
+                </a:solidFill>
+                <a:latin typeface="Segoe UI"/>
+              </a:rPr>
+              <a:t>are </a:t>
+            </a:r>
+            <a:r>
+              <a:rPr sz="750" b="0" i="0">
+                <a:solidFill>
+                  <a:srgbClr val="FFFFFF"/>
+                </a:solidFill>
+                <a:latin typeface="Segoe UI"/>
+              </a:rPr>
+              <a:t>met </a:t>
+            </a:r>
+            <a:r>
+              <a:rPr sz="750" b="0" i="0">
+                <a:solidFill>
+                  <a:srgbClr val="FFFFFF"/>
+                </a:solidFill>
+                <a:latin typeface="Segoe UI"/>
+              </a:rPr>
+              <a:t>on </a:t>
+            </a:r>
+            <a:r>
+              <a:rPr sz="750" b="0" i="0">
+                <a:solidFill>
+                  <a:srgbClr val="FFFFFF"/>
+                </a:solidFill>
+                <a:latin typeface="Segoe UI"/>
+              </a:rPr>
+              <a:t>demand,</a:t>
+            </a:r>
+          </a:p>
+          <a:p>
+            <a:pPr algn="ctr">
+              <a:lnSpc>
+                <a:spcPts val="997"/>
+              </a:lnSpc>
+              <a:spcBef>
+                <a:spcPts val="0"/>
+              </a:spcBef>
+              <a:spcAft>
+                <a:spcPts val="0"/>
+              </a:spcAft>
+            </a:pPr>
+            <a:r>
+              <a:rPr sz="750" b="0" i="0">
+                <a:solidFill>
+                  <a:srgbClr val="FFFFFF"/>
+                </a:solidFill>
+                <a:latin typeface="Segoe UI"/>
+              </a:rPr>
+              <a:t>service </a:t>
+            </a:r>
+            <a:r>
+              <a:rPr sz="750" b="0" i="0">
+                <a:solidFill>
+                  <a:srgbClr val="FFFFFF"/>
+                </a:solidFill>
+                <a:latin typeface="Segoe UI"/>
+              </a:rPr>
+              <a:t>readiness, </a:t>
+            </a:r>
+            <a:r>
+              <a:rPr sz="750" b="0" i="0">
+                <a:solidFill>
+                  <a:srgbClr val="FFFFFF"/>
+                </a:solidFill>
+                <a:latin typeface="Segoe UI"/>
+              </a:rPr>
+              <a:t>and </a:t>
+            </a:r>
+            <a:r>
+              <a:rPr sz="750" b="0" i="0">
+                <a:solidFill>
+                  <a:srgbClr val="FFFFFF"/>
+                </a:solidFill>
+                <a:latin typeface="Segoe UI"/>
+              </a:rPr>
+              <a:t>partner </a:t>
+            </a:r>
+            <a:r>
+              <a:rPr sz="750" b="0" i="0">
+                <a:solidFill>
+                  <a:srgbClr val="FFFFFF"/>
+                </a:solidFill>
+                <a:latin typeface="Segoe UI"/>
+              </a:rPr>
+              <a:t>performance.</a:t>
+            </a:r>
+          </a:p>
+        </p:txBody>
+      </p:sp>
+      <p:sp>
+        <p:nvSpPr>
+          <p:cNvPr id="21" name="Rectangle 20"/>
+          <p:cNvSpPr/>
+          <p:nvPr/>
+        </p:nvSpPr>
+        <p:spPr>
+          <a:xfrm>
+            <a:off x="6118860" y="3817950"/>
+            <a:ext cx="2807970" cy="1093038"/>
+          </a:xfrm>
+          <a:prstGeom prst="rect">
+            <a:avLst/>
+          </a:prstGeom>
+          <a:solidFill>
+            <a:srgbClr val="16294A"/>
+          </a:solidFill>
+          <a:ln>
+            <a:noFill/>
+          </a:ln>
+          <a:effectLst>
+            <a:outerShdw blurRad="40000" dist="24000" dir="5400000" rotWithShape="0">
+              <a:srgbClr val="1A1A1A">
+                <a:alpha val="62000"/>
+              </a:srgbClr>
+            </a:outerShdw>
+          </a:effectLst>
+        </p:spPr>
+        <p:style>
+          <a:lnRef idx="1">
+            <a:schemeClr val="accent1"/>
+          </a:lnRef>
+          <a:fillRef idx="3">
+            <a:schemeClr val="accent1"/>
+          </a:fillRef>
+          <a:effectRef idx="2">
+            <a:schemeClr val="accent1"/>
+          </a:effectRef>
+          <a:fontRef idx="minor">
+            <a:schemeClr val="lt1"/>
+          </a:fontRef>
+        </p:style>
+        <p:txBody>
+          <a:bodyPr rtlCol="0" anchor="ctr" wrap="square" lIns="0" rIns="0" tIns="0" bIns="0">
+            <a:noAutofit/>
+          </a:bodyPr>
+          <a:lstStyle/>
+          <a:p>
+            <a:pPr algn="ctr">
+              <a:lnSpc>
+                <a:spcPts val="1795"/>
+              </a:lnSpc>
+              <a:spcBef>
+                <a:spcPts val="0"/>
+              </a:spcBef>
+              <a:spcAft>
+                <a:spcPts val="0"/>
+              </a:spcAft>
+            </a:pPr>
+            <a:r>
+              <a:rPr sz="1350" b="0" i="0">
+                <a:solidFill>
+                  <a:srgbClr val="FFFFFF"/>
+                </a:solidFill>
+                <a:latin typeface="Segoe UI"/>
+              </a:rPr>
+              <a:t>Portfolio </a:t>
+            </a:r>
+            <a:r>
+              <a:rPr sz="1350" b="0" i="0">
+                <a:solidFill>
+                  <a:srgbClr val="FFFFFF"/>
+                </a:solidFill>
+                <a:latin typeface="Segoe UI"/>
+              </a:rPr>
+              <a:t>focus</a:t>
+            </a:r>
+          </a:p>
+          <a:p>
+            <a:pPr algn="ctr">
+              <a:lnSpc>
+                <a:spcPts val="216"/>
+              </a:lnSpc>
+              <a:spcBef>
+                <a:spcPts val="0"/>
+              </a:spcBef>
+              <a:spcAft>
+                <a:spcPts val="0"/>
+              </a:spcAft>
+            </a:pPr>
+            <a:r>
+              <a:rPr sz="750" b="0" i="0">
+                <a:solidFill>
+                  <a:srgbClr val="FFFFFF"/>
+                </a:solidFill>
+                <a:latin typeface="Segoe UI"/>
+              </a:rPr>
+              <a:t/>
+            </a:r>
+          </a:p>
+          <a:p>
+            <a:pPr algn="ctr">
+              <a:lnSpc>
+                <a:spcPts val="997"/>
+              </a:lnSpc>
+              <a:spcBef>
+                <a:spcPts val="0"/>
+              </a:spcBef>
+              <a:spcAft>
+                <a:spcPts val="0"/>
+              </a:spcAft>
+            </a:pPr>
+            <a:r>
+              <a:rPr sz="750" b="0" i="0">
+                <a:solidFill>
+                  <a:srgbClr val="FFFFFF"/>
+                </a:solidFill>
+                <a:latin typeface="Segoe UI"/>
+              </a:rPr>
+              <a:t>Lead </a:t>
+            </a:r>
+            <a:r>
+              <a:rPr sz="750" b="0" i="0">
+                <a:solidFill>
+                  <a:srgbClr val="FFFFFF"/>
+                </a:solidFill>
+                <a:latin typeface="Segoe UI"/>
+              </a:rPr>
+              <a:t>with </a:t>
+            </a:r>
+            <a:r>
+              <a:rPr sz="750" b="1" i="0">
+                <a:solidFill>
+                  <a:srgbClr val="FFFFFF"/>
+                </a:solidFill>
+                <a:latin typeface="Segoe UI"/>
+              </a:rPr>
+              <a:t>1</a:t>
+            </a:r>
+            <a:r>
+              <a:rPr sz="750" b="0" i="0">
+                <a:solidFill>
+                  <a:srgbClr val="FFFFFF"/>
+                </a:solidFill>
+                <a:latin typeface="Segoe UI"/>
+              </a:rPr>
+              <a:t> </a:t>
+            </a:r>
+            <a:r>
+              <a:rPr sz="750" b="0" i="0">
+                <a:solidFill>
+                  <a:srgbClr val="FFFFFF"/>
+                </a:solidFill>
+                <a:latin typeface="Segoe UI"/>
+              </a:rPr>
+              <a:t>core </a:t>
+            </a:r>
+            <a:r>
+              <a:rPr sz="750" b="0" i="0">
+                <a:solidFill>
+                  <a:srgbClr val="FFFFFF"/>
+                </a:solidFill>
+                <a:latin typeface="Segoe UI"/>
+              </a:rPr>
+              <a:t>platform, </a:t>
+            </a:r>
+            <a:r>
+              <a:rPr sz="750" b="0" i="0">
+                <a:solidFill>
+                  <a:srgbClr val="FFFFFF"/>
+                </a:solidFill>
+                <a:latin typeface="Segoe UI"/>
+              </a:rPr>
+              <a:t>then </a:t>
+            </a:r>
+            <a:r>
+              <a:rPr sz="750" b="0" i="0">
+                <a:solidFill>
+                  <a:srgbClr val="FFFFFF"/>
+                </a:solidFill>
+                <a:latin typeface="Segoe UI"/>
+              </a:rPr>
+              <a:t>add </a:t>
+            </a:r>
+            <a:r>
+              <a:rPr sz="750" b="1" i="0">
+                <a:solidFill>
+                  <a:srgbClr val="FFFFFF"/>
+                </a:solidFill>
+                <a:latin typeface="Segoe UI"/>
+              </a:rPr>
+              <a:t>2</a:t>
+            </a:r>
+            <a:r>
+              <a:rPr sz="750" b="0" i="0">
+                <a:solidFill>
+                  <a:srgbClr val="FFFFFF"/>
+                </a:solidFill>
+                <a:latin typeface="Segoe UI"/>
+              </a:rPr>
+              <a:t> </a:t>
+            </a:r>
+            <a:r>
+              <a:rPr sz="750" b="0" i="0">
+                <a:solidFill>
+                  <a:srgbClr val="FFFFFF"/>
+                </a:solidFill>
+                <a:latin typeface="Segoe UI"/>
+              </a:rPr>
+              <a:t>adjacencies </a:t>
+            </a:r>
+            <a:r>
+              <a:rPr sz="750" b="0" i="0">
+                <a:solidFill>
+                  <a:srgbClr val="FFFFFF"/>
+                </a:solidFill>
+                <a:latin typeface="Segoe UI"/>
+              </a:rPr>
+              <a:t>after </a:t>
+            </a:r>
+            <a:r>
+              <a:rPr sz="750" b="0" i="0">
+                <a:solidFill>
+                  <a:srgbClr val="FFFFFF"/>
+                </a:solidFill>
+                <a:latin typeface="Segoe UI"/>
+              </a:rPr>
+              <a:t>initial</a:t>
+            </a:r>
+          </a:p>
+          <a:p>
+            <a:pPr algn="ctr">
+              <a:lnSpc>
+                <a:spcPts val="997"/>
+              </a:lnSpc>
+              <a:spcBef>
+                <a:spcPts val="0"/>
+              </a:spcBef>
+              <a:spcAft>
+                <a:spcPts val="0"/>
+              </a:spcAft>
+            </a:pPr>
+            <a:r>
+              <a:rPr sz="750" b="0" i="0">
+                <a:solidFill>
+                  <a:srgbClr val="FFFFFF"/>
+                </a:solidFill>
+                <a:latin typeface="Segoe UI"/>
+              </a:rPr>
+              <a:t>scale </a:t>
+            </a:r>
+            <a:r>
+              <a:rPr sz="750" b="0" i="0">
+                <a:solidFill>
+                  <a:srgbClr val="FFFFFF"/>
+                </a:solidFill>
+                <a:latin typeface="Segoe UI"/>
+              </a:rPr>
+              <a:t>and </a:t>
+            </a:r>
+            <a:r>
+              <a:rPr sz="750" b="0" i="0">
+                <a:solidFill>
+                  <a:srgbClr val="FFFFFF"/>
+                </a:solidFill>
+                <a:latin typeface="Segoe UI"/>
+              </a:rPr>
+              <a:t>brand </a:t>
+            </a:r>
+            <a:r>
+              <a:rPr sz="750" b="0" i="0">
+                <a:solidFill>
+                  <a:srgbClr val="FFFFFF"/>
+                </a:solidFill>
+                <a:latin typeface="Segoe UI"/>
+              </a:rPr>
+              <a:t>proof </a:t>
+            </a:r>
+            <a:r>
+              <a:rPr sz="750" b="0" i="0">
+                <a:solidFill>
+                  <a:srgbClr val="FFFFFF"/>
+                </a:solidFill>
+                <a:latin typeface="Segoe UI"/>
+              </a:rPr>
+              <a:t>points.</a:t>
+            </a:r>
+          </a:p>
+        </p:txBody>
+      </p:sp>
+      <p:sp>
+        <p:nvSpPr>
+          <p:cNvPr id="22" name="Rectangle 21"/>
+          <p:cNvSpPr/>
+          <p:nvPr/>
+        </p:nvSpPr>
+        <p:spPr>
+          <a:xfrm>
+            <a:off x="8972550" y="3817950"/>
+            <a:ext cx="2807970" cy="1093038"/>
+          </a:xfrm>
+          <a:prstGeom prst="rect">
+            <a:avLst/>
+          </a:prstGeom>
+          <a:solidFill>
+            <a:srgbClr val="16294A"/>
+          </a:solidFill>
+          <a:ln>
+            <a:noFill/>
+          </a:ln>
+          <a:effectLst>
+            <a:outerShdw blurRad="40000" dist="24000" dir="5400000" rotWithShape="0">
+              <a:srgbClr val="1A1A1A">
+                <a:alpha val="62000"/>
+              </a:srgbClr>
+            </a:outerShdw>
+          </a:effectLst>
+        </p:spPr>
+        <p:style>
+          <a:lnRef idx="1">
+            <a:schemeClr val="accent1"/>
+          </a:lnRef>
+          <a:fillRef idx="3">
+            <a:schemeClr val="accent1"/>
+          </a:fillRef>
+          <a:effectRef idx="2">
+            <a:schemeClr val="accent1"/>
+          </a:effectRef>
+          <a:fontRef idx="minor">
+            <a:schemeClr val="lt1"/>
+          </a:fontRef>
+        </p:style>
+        <p:txBody>
+          <a:bodyPr rtlCol="0" anchor="ctr" wrap="square" lIns="0" rIns="0" tIns="0" bIns="0">
+            <a:noAutofit/>
+          </a:bodyPr>
+          <a:lstStyle/>
+          <a:p>
+            <a:pPr algn="ctr">
+              <a:lnSpc>
+                <a:spcPts val="1795"/>
+              </a:lnSpc>
+              <a:spcBef>
+                <a:spcPts val="0"/>
+              </a:spcBef>
+              <a:spcAft>
+                <a:spcPts val="0"/>
+              </a:spcAft>
+            </a:pPr>
+            <a:r>
+              <a:rPr sz="1350" b="0" i="0">
+                <a:solidFill>
+                  <a:srgbClr val="FFFFFF"/>
+                </a:solidFill>
+                <a:latin typeface="Segoe UI"/>
+              </a:rPr>
+              <a:t>Capital </a:t>
+            </a:r>
+            <a:r>
+              <a:rPr sz="1350" b="0" i="0">
+                <a:solidFill>
+                  <a:srgbClr val="FFFFFF"/>
+                </a:solidFill>
+                <a:latin typeface="Segoe UI"/>
+              </a:rPr>
+              <a:t>discipline</a:t>
+            </a:r>
+          </a:p>
+          <a:p>
+            <a:pPr algn="ctr">
+              <a:lnSpc>
+                <a:spcPts val="216"/>
+              </a:lnSpc>
+              <a:spcBef>
+                <a:spcPts val="0"/>
+              </a:spcBef>
+              <a:spcAft>
+                <a:spcPts val="0"/>
+              </a:spcAft>
+            </a:pPr>
+            <a:r>
+              <a:rPr sz="750" b="0" i="0">
+                <a:solidFill>
+                  <a:srgbClr val="FFFFFF"/>
+                </a:solidFill>
+                <a:latin typeface="Segoe UI"/>
+              </a:rPr>
+              <a:t/>
+            </a:r>
+          </a:p>
+          <a:p>
+            <a:pPr algn="ctr">
+              <a:lnSpc>
+                <a:spcPts val="997"/>
+              </a:lnSpc>
+              <a:spcBef>
+                <a:spcPts val="0"/>
+              </a:spcBef>
+              <a:spcAft>
+                <a:spcPts val="0"/>
+              </a:spcAft>
+            </a:pPr>
+            <a:r>
+              <a:rPr sz="750" b="0" i="0">
+                <a:solidFill>
+                  <a:srgbClr val="FFFFFF"/>
+                </a:solidFill>
+                <a:latin typeface="Segoe UI"/>
+              </a:rPr>
+              <a:t>Use </a:t>
+            </a:r>
+            <a:r>
+              <a:rPr sz="750" b="1" i="0">
+                <a:solidFill>
+                  <a:srgbClr val="FFFFFF"/>
+                </a:solidFill>
+                <a:latin typeface="Segoe UI"/>
+              </a:rPr>
+              <a:t>18 </a:t>
+            </a:r>
+            <a:r>
+              <a:rPr sz="750" b="1" i="0">
+                <a:solidFill>
+                  <a:srgbClr val="FFFFFF"/>
+                </a:solidFill>
+                <a:latin typeface="Segoe UI"/>
+              </a:rPr>
+              <a:t>months</a:t>
+            </a:r>
+            <a:r>
+              <a:rPr sz="750" b="0" i="0">
+                <a:solidFill>
+                  <a:srgbClr val="FFFFFF"/>
+                </a:solidFill>
+                <a:latin typeface="Segoe UI"/>
+              </a:rPr>
+              <a:t> </a:t>
+            </a:r>
+            <a:r>
+              <a:rPr sz="750" b="0" i="0">
+                <a:solidFill>
+                  <a:srgbClr val="FFFFFF"/>
+                </a:solidFill>
+                <a:latin typeface="Segoe UI"/>
+              </a:rPr>
+              <a:t>of </a:t>
+            </a:r>
+            <a:r>
+              <a:rPr sz="750" b="0" i="0">
+                <a:solidFill>
+                  <a:srgbClr val="FFFFFF"/>
+                </a:solidFill>
+                <a:latin typeface="Segoe UI"/>
+              </a:rPr>
+              <a:t>phased </a:t>
+            </a:r>
+            <a:r>
+              <a:rPr sz="750" b="0" i="0">
+                <a:solidFill>
+                  <a:srgbClr val="FFFFFF"/>
+                </a:solidFill>
+                <a:latin typeface="Segoe UI"/>
+              </a:rPr>
+              <a:t>milestones </a:t>
+            </a:r>
+            <a:r>
+              <a:rPr sz="750" b="0" i="0">
+                <a:solidFill>
+                  <a:srgbClr val="FFFFFF"/>
+                </a:solidFill>
+                <a:latin typeface="Segoe UI"/>
+              </a:rPr>
+              <a:t>to </a:t>
+            </a:r>
+            <a:r>
+              <a:rPr sz="750" b="0" i="0">
+                <a:solidFill>
+                  <a:srgbClr val="FFFFFF"/>
+                </a:solidFill>
+                <a:latin typeface="Segoe UI"/>
+              </a:rPr>
+              <a:t>sequence</a:t>
+            </a:r>
+          </a:p>
+          <a:p>
+            <a:pPr algn="ctr">
+              <a:lnSpc>
+                <a:spcPts val="997"/>
+              </a:lnSpc>
+              <a:spcBef>
+                <a:spcPts val="0"/>
+              </a:spcBef>
+              <a:spcAft>
+                <a:spcPts val="0"/>
+              </a:spcAft>
+            </a:pPr>
+            <a:r>
+              <a:rPr sz="750" b="0" i="0">
+                <a:solidFill>
+                  <a:srgbClr val="FFFFFF"/>
+                </a:solidFill>
+                <a:latin typeface="Segoe UI"/>
+              </a:rPr>
+              <a:t>investment </a:t>
+            </a:r>
+            <a:r>
+              <a:rPr sz="750" b="0" i="0">
+                <a:solidFill>
+                  <a:srgbClr val="FFFFFF"/>
+                </a:solidFill>
+                <a:latin typeface="Segoe UI"/>
+              </a:rPr>
+              <a:t>and </a:t>
+            </a:r>
+            <a:r>
+              <a:rPr sz="750" b="0" i="0">
+                <a:solidFill>
+                  <a:srgbClr val="FFFFFF"/>
+                </a:solidFill>
+                <a:latin typeface="Segoe UI"/>
+              </a:rPr>
+              <a:t>reduce </a:t>
+            </a:r>
+            <a:r>
+              <a:rPr sz="750" b="0" i="0">
+                <a:solidFill>
+                  <a:srgbClr val="FFFFFF"/>
+                </a:solidFill>
+                <a:latin typeface="Segoe UI"/>
+              </a:rPr>
+              <a:t>exposure </a:t>
+            </a:r>
+            <a:r>
+              <a:rPr sz="750" b="0" i="0">
+                <a:solidFill>
+                  <a:srgbClr val="FFFFFF"/>
+                </a:solidFill>
+                <a:latin typeface="Segoe UI"/>
+              </a:rPr>
+              <a:t>versus </a:t>
+            </a:r>
+            <a:r>
+              <a:rPr sz="750" b="0" i="0">
+                <a:solidFill>
+                  <a:srgbClr val="FFFFFF"/>
+                </a:solidFill>
+                <a:latin typeface="Segoe UI"/>
+              </a:rPr>
+              <a:t>a </a:t>
+            </a:r>
+            <a:r>
+              <a:rPr sz="750" b="0" i="0">
+                <a:solidFill>
+                  <a:srgbClr val="FFFFFF"/>
+                </a:solidFill>
+                <a:latin typeface="Segoe UI"/>
+              </a:rPr>
+              <a:t>national </a:t>
+            </a:r>
+            <a:r>
+              <a:rPr sz="750" b="0" i="0">
+                <a:solidFill>
+                  <a:srgbClr val="FFFFFF"/>
+                </a:solidFill>
+                <a:latin typeface="Segoe UI"/>
+              </a:rPr>
+              <a:t>Day </a:t>
+            </a:r>
+            <a:r>
+              <a:rPr sz="750" b="0" i="0">
+                <a:solidFill>
+                  <a:srgbClr val="FFFFFF"/>
+                </a:solidFill>
+                <a:latin typeface="Segoe UI"/>
+              </a:rPr>
+              <a:t>1</a:t>
+            </a:r>
+          </a:p>
+          <a:p>
+            <a:pPr algn="ctr">
+              <a:lnSpc>
+                <a:spcPts val="997"/>
+              </a:lnSpc>
+              <a:spcBef>
+                <a:spcPts val="0"/>
+              </a:spcBef>
+              <a:spcAft>
+                <a:spcPts val="0"/>
+              </a:spcAft>
+            </a:pPr>
+            <a:r>
+              <a:rPr sz="750" b="0" i="0">
+                <a:solidFill>
+                  <a:srgbClr val="FFFFFF"/>
+                </a:solidFill>
+                <a:latin typeface="Segoe UI"/>
+              </a:rPr>
+              <a:t>rollout.</a:t>
+            </a:r>
+          </a:p>
+        </p:txBody>
+      </p:sp>
+      <p:sp>
+        <p:nvSpPr>
+          <p:cNvPr id="23" name="Rectangle 22"/>
+          <p:cNvSpPr/>
+          <p:nvPr/>
+        </p:nvSpPr>
+        <p:spPr>
+          <a:xfrm>
+            <a:off x="411480" y="5130444"/>
+            <a:ext cx="11369040" cy="969931"/>
+          </a:xfrm>
+          <a:prstGeom prst="rect">
+            <a:avLst/>
+          </a:prstGeom>
+          <a:solidFill>
+            <a:srgbClr val="E8EBEF"/>
+          </a:solidFill>
+          <a:ln>
+            <a:noFill/>
+          </a:ln>
+          <a:effectLst>
+            <a:outerShdw blurRad="40000" dist="24000" dir="5400000" rotWithShape="0">
+              <a:srgbClr val="1A1A1A">
+                <a:alpha val="62000"/>
+              </a:srgbClr>
+            </a:outerShdw>
+          </a:effectLst>
+        </p:spPr>
+        <p:style>
+          <a:lnRef idx="1">
+            <a:schemeClr val="accent1"/>
+          </a:lnRef>
+          <a:fillRef idx="3">
+            <a:schemeClr val="accent1"/>
+          </a:fillRef>
+          <a:effectRef idx="2">
+            <a:schemeClr val="accent1"/>
+          </a:effectRef>
+          <a:fontRef idx="minor">
+            <a:schemeClr val="lt1"/>
+          </a:fontRef>
+        </p:style>
+        <p:txBody>
+          <a:bodyPr rtlCol="0" anchor="ctr"/>
+          <a:lstStyle/>
+          <a:p>
+            <a:pPr algn="ctr"/>
+          </a:p>
+        </p:txBody>
+      </p:sp>
+      <p:sp>
+        <p:nvSpPr>
+          <p:cNvPr id="24" name="Rectangle 23"/>
+          <p:cNvSpPr/>
+          <p:nvPr/>
+        </p:nvSpPr>
+        <p:spPr>
+          <a:xfrm>
+            <a:off x="411480" y="5130444"/>
+            <a:ext cx="32004" cy="969931"/>
           </a:xfrm>
           <a:prstGeom prst="rect">
             <a:avLst/>
@@ -20541,13 +20635,13 @@
       </p:sp>
       <p:sp>
         <p:nvSpPr>
-          <p:cNvPr id="21" name="TextBox 20"/>
+          <p:cNvPr id="25" name="TextBox 24"/>
           <p:cNvSpPr txBox="1"/>
           <p:nvPr/>
         </p:nvSpPr>
         <p:spPr>
           <a:xfrm>
-            <a:off x="484632" y="4846873"/>
+            <a:off x="484632" y="5203596"/>
             <a:ext cx="11222736" cy="472976"/>
           </a:xfrm>
           <a:prstGeom prst="rect">
@@ -20806,13 +20900,13 @@
       </p:sp>
       <p:sp>
         <p:nvSpPr>
-          <p:cNvPr id="22" name="TextBox 21"/>
+          <p:cNvPr id="26" name="TextBox 25"/>
           <p:cNvSpPr txBox="1"/>
           <p:nvPr/>
         </p:nvSpPr>
         <p:spPr>
           <a:xfrm>
-            <a:off x="484632" y="5356425"/>
+            <a:off x="484632" y="5713148"/>
             <a:ext cx="11222736" cy="152028"/>
           </a:xfrm>
           <a:prstGeom prst="rect">
@@ -21121,14 +21215,14 @@
       </p:sp>
       <p:sp>
         <p:nvSpPr>
-          <p:cNvPr id="23" name="TextBox 22"/>
+          <p:cNvPr id="27" name="TextBox 26"/>
           <p:cNvSpPr txBox="1"/>
           <p:nvPr/>
         </p:nvSpPr>
         <p:spPr>
           <a:xfrm>
-            <a:off x="411480" y="6108964"/>
-            <a:ext cx="11369040" cy="126690"/>
+            <a:off x="411480" y="6210103"/>
+            <a:ext cx="11369040" cy="118244"/>
           </a:xfrm>
           <a:prstGeom prst="rect">
             <a:avLst/>
@@ -21143,7 +21237,7 @@
           <a:p>
             <a:pPr algn="l">
               <a:lnSpc>
-                <a:spcPts val="997"/>
+                <a:spcPts val="931"/>
               </a:lnSpc>
               <a:spcBef>
                 <a:spcPts val="0"/>
@@ -21153,7 +21247,7 @@
               </a:spcAft>
             </a:pPr>
             <a:r>
-              <a:rPr sz="750" b="0" i="0">
+              <a:rPr sz="700" b="0" i="0">
                 <a:solidFill>
                   <a:srgbClr val="757575"/>
                 </a:solidFill>
@@ -21162,7 +21256,7 @@
               <a:t>illustrative </a:t>
             </a:r>
             <a:r>
-              <a:rPr sz="750" b="0" i="0">
+              <a:rPr sz="700" b="0" i="0">
                 <a:solidFill>
                   <a:srgbClr val="757575"/>
                 </a:solidFill>
@@ -21175,7 +21269,7 @@
       </p:sp>
       <p:cxnSp>
         <p:nvCxnSpPr>
-          <p:cNvPr id="24" name="Connector 23"/>
+          <p:cNvPr id="28" name="Connector 27"/>
           <p:cNvCxnSpPr/>
           <p:nvPr/>
         </p:nvCxnSpPr>
@@ -21210,7 +21304,7 @@
       </p:cxnSp>
       <p:sp>
         <p:nvSpPr>
-          <p:cNvPr id="25" name="TextBox 24"/>
+          <p:cNvPr id="29" name="TextBox 28"/>
           <p:cNvSpPr txBox="1"/>
           <p:nvPr/>
         </p:nvSpPr>

--- a/eval/out/ev_market_entry.spec.pptx
+++ b/eval/out/ev_market_entry.spec.pptx
@@ -3154,7 +3154,7 @@
         </p:nvSpPr>
         <p:spPr>
           <a:xfrm>
-            <a:off x="9265920" y="320040"/>
+            <a:off x="1005840" y="320040"/>
             <a:ext cx="2560320" cy="274320"/>
           </a:xfrm>
           <a:prstGeom prst="rect">
@@ -3168,7 +3168,7 @@
           </a:bodyPr>
           <a:lstStyle/>
           <a:p>
-            <a:pPr algn="r">
+            <a:pPr algn="l">
               <a:spcBef>
                 <a:spcPts val="0"/>
               </a:spcBef>

--- a/eval/out/ev_market_entry.spec.pptx
+++ b/eval/out/ev_market_entry.spec.pptx
@@ -3197,7 +3197,7 @@
         <p:spPr>
           <a:xfrm>
             <a:off x="1005840" y="1371600"/>
-            <a:ext cx="10180320" cy="1731615"/>
+            <a:ext cx="10180320" cy="1774905"/>
           </a:xfrm>
           <a:prstGeom prst="rect">
             <a:avLst/>
@@ -3212,7 +3212,7 @@
           <a:p>
             <a:pPr algn="l">
               <a:lnSpc>
-                <a:spcPts val="4544"/>
+                <a:spcPts val="4658"/>
               </a:lnSpc>
               <a:spcBef>
                 <a:spcPts val="0"/>
@@ -3279,7 +3279,7 @@
           <a:p>
             <a:pPr algn="l">
               <a:lnSpc>
-                <a:spcPts val="4544"/>
+                <a:spcPts val="4658"/>
               </a:lnSpc>
               <a:spcBef>
                 <a:spcPts val="0"/>
@@ -3364,7 +3364,7 @@
           <a:p>
             <a:pPr algn="l">
               <a:lnSpc>
-                <a:spcPts val="4544"/>
+                <a:spcPts val="4658"/>
               </a:lnSpc>
               <a:spcBef>
                 <a:spcPts val="0"/>
@@ -3420,8 +3420,8 @@
         </p:nvSpPr>
         <p:spPr>
           <a:xfrm>
-            <a:off x="1005840" y="3212943"/>
-            <a:ext cx="10180320" cy="236488"/>
+            <a:off x="1005840" y="3256233"/>
+            <a:ext cx="10180320" cy="242400"/>
           </a:xfrm>
           <a:prstGeom prst="rect">
             <a:avLst/>
@@ -3436,7 +3436,7 @@
           <a:p>
             <a:pPr algn="l">
               <a:lnSpc>
-                <a:spcPts val="1862"/>
+                <a:spcPts val="1908"/>
               </a:lnSpc>
               <a:spcBef>
                 <a:spcPts val="0"/>
@@ -3623,8 +3623,8 @@
         </p:nvSpPr>
         <p:spPr>
           <a:xfrm>
-            <a:off x="411480" y="415294"/>
-            <a:ext cx="11369040" cy="577206"/>
+            <a:off x="411480" y="274320"/>
+            <a:ext cx="11369040" cy="591636"/>
           </a:xfrm>
           <a:prstGeom prst="rect">
             <a:avLst/>
@@ -3639,7 +3639,7 @@
           <a:p>
             <a:pPr algn="l">
               <a:lnSpc>
-                <a:spcPts val="2272"/>
+                <a:spcPts val="2329"/>
               </a:lnSpc>
               <a:spcBef>
                 <a:spcPts val="0"/>
@@ -3787,7 +3787,7 @@
           <a:p>
             <a:pPr algn="l">
               <a:lnSpc>
-                <a:spcPts val="2272"/>
+                <a:spcPts val="2329"/>
               </a:lnSpc>
               <a:spcBef>
                 <a:spcPts val="0"/>
@@ -3889,51 +3889,16 @@
           </a:p>
         </p:txBody>
       </p:sp>
-      <p:cxnSp>
-        <p:nvCxnSpPr>
-          <p:cNvPr id="3" name="Connector 2"/>
-          <p:cNvCxnSpPr/>
-          <p:nvPr/>
-        </p:nvCxnSpPr>
-        <p:spPr>
-          <a:xfrm>
-            <a:off x="411480" y="1038220"/>
-            <a:ext cx="11369040" cy="0"/>
-          </a:xfrm>
-          <a:prstGeom prst="line">
-            <a:avLst/>
-          </a:prstGeom>
-          <a:ln w="9525">
-            <a:solidFill>
-              <a:srgbClr val="BFBFBF"/>
-            </a:solidFill>
-          </a:ln>
-        </p:spPr>
-        <p:style>
-          <a:lnRef idx="2">
-            <a:schemeClr val="accent1"/>
-          </a:lnRef>
-          <a:fillRef idx="0">
-            <a:schemeClr val="accent1"/>
-          </a:fillRef>
-          <a:effectRef idx="1">
-            <a:schemeClr val="accent1"/>
-          </a:effectRef>
-          <a:fontRef idx="minor">
-            <a:schemeClr val="tx1"/>
-          </a:fontRef>
-        </p:style>
-      </p:cxnSp>
-      <p:sp>
-        <p:nvSpPr>
-          <p:cNvPr id="4" name="TextBox 3"/>
+      <p:sp>
+        <p:nvSpPr>
+          <p:cNvPr id="3" name="TextBox 2"/>
           <p:cNvSpPr txBox="1"/>
           <p:nvPr/>
         </p:nvSpPr>
         <p:spPr>
           <a:xfrm>
-            <a:off x="411480" y="1691640"/>
-            <a:ext cx="11369040" cy="236488"/>
+            <a:off x="411480" y="1554480"/>
+            <a:ext cx="11369040" cy="242400"/>
           </a:xfrm>
           <a:prstGeom prst="rect">
             <a:avLst/>
@@ -3948,7 +3913,7 @@
           <a:p>
             <a:pPr algn="l">
               <a:lnSpc>
-                <a:spcPts val="1862"/>
+                <a:spcPts val="1908"/>
               </a:lnSpc>
               <a:spcBef>
                 <a:spcPts val="0"/>
@@ -3971,14 +3936,14 @@
       </p:sp>
       <p:sp>
         <p:nvSpPr>
-          <p:cNvPr id="5" name="TextBox 4"/>
+          <p:cNvPr id="4" name="TextBox 3"/>
           <p:cNvSpPr txBox="1"/>
           <p:nvPr/>
         </p:nvSpPr>
         <p:spPr>
           <a:xfrm>
-            <a:off x="411480" y="2010424"/>
-            <a:ext cx="11369040" cy="337840"/>
+            <a:off x="411480" y="1879176"/>
+            <a:ext cx="11369040" cy="346286"/>
           </a:xfrm>
           <a:prstGeom prst="rect">
             <a:avLst/>
@@ -3993,7 +3958,7 @@
           <a:p>
             <a:pPr algn="l">
               <a:lnSpc>
-                <a:spcPts val="1330"/>
+                <a:spcPts val="1363"/>
               </a:lnSpc>
               <a:spcBef>
                 <a:spcPts val="0"/>
@@ -4249,7 +4214,7 @@
           <a:p>
             <a:pPr algn="l">
               <a:lnSpc>
-                <a:spcPts val="1330"/>
+                <a:spcPts val="1363"/>
               </a:lnSpc>
               <a:spcBef>
                 <a:spcPts val="0"/>
@@ -4290,14 +4255,14 @@
       </p:sp>
       <p:sp>
         <p:nvSpPr>
-          <p:cNvPr id="6" name="TextBox 5"/>
+          <p:cNvPr id="5" name="TextBox 4"/>
           <p:cNvSpPr txBox="1"/>
           <p:nvPr/>
         </p:nvSpPr>
         <p:spPr>
           <a:xfrm>
-            <a:off x="411480" y="2604296"/>
-            <a:ext cx="11369040" cy="236488"/>
+            <a:off x="411480" y="2481494"/>
+            <a:ext cx="11369040" cy="242400"/>
           </a:xfrm>
           <a:prstGeom prst="rect">
             <a:avLst/>
@@ -4312,7 +4277,7 @@
           <a:p>
             <a:pPr algn="l">
               <a:lnSpc>
-                <a:spcPts val="1862"/>
+                <a:spcPts val="1908"/>
               </a:lnSpc>
               <a:spcBef>
                 <a:spcPts val="0"/>
@@ -4335,14 +4300,14 @@
       </p:sp>
       <p:sp>
         <p:nvSpPr>
-          <p:cNvPr id="7" name="TextBox 6"/>
+          <p:cNvPr id="6" name="TextBox 5"/>
           <p:cNvSpPr txBox="1"/>
           <p:nvPr/>
         </p:nvSpPr>
         <p:spPr>
           <a:xfrm>
-            <a:off x="411480" y="2923080"/>
-            <a:ext cx="11369040" cy="337840"/>
+            <a:off x="411480" y="2806190"/>
+            <a:ext cx="11369040" cy="346286"/>
           </a:xfrm>
           <a:prstGeom prst="rect">
             <a:avLst/>
@@ -4357,7 +4322,7 @@
           <a:p>
             <a:pPr algn="l">
               <a:lnSpc>
-                <a:spcPts val="1330"/>
+                <a:spcPts val="1363"/>
               </a:lnSpc>
               <a:spcBef>
                 <a:spcPts val="0"/>
@@ -4658,7 +4623,7 @@
           <a:p>
             <a:pPr algn="l">
               <a:lnSpc>
-                <a:spcPts val="1330"/>
+                <a:spcPts val="1363"/>
               </a:lnSpc>
               <a:spcBef>
                 <a:spcPts val="0"/>
@@ -4681,14 +4646,14 @@
       </p:sp>
       <p:sp>
         <p:nvSpPr>
-          <p:cNvPr id="8" name="TextBox 7"/>
+          <p:cNvPr id="7" name="TextBox 6"/>
           <p:cNvSpPr txBox="1"/>
           <p:nvPr/>
         </p:nvSpPr>
         <p:spPr>
           <a:xfrm>
-            <a:off x="411480" y="3516952"/>
-            <a:ext cx="11369040" cy="236488"/>
+            <a:off x="411480" y="3408508"/>
+            <a:ext cx="11369040" cy="242400"/>
           </a:xfrm>
           <a:prstGeom prst="rect">
             <a:avLst/>
@@ -4703,7 +4668,7 @@
           <a:p>
             <a:pPr algn="l">
               <a:lnSpc>
-                <a:spcPts val="1862"/>
+                <a:spcPts val="1908"/>
               </a:lnSpc>
               <a:spcBef>
                 <a:spcPts val="0"/>
@@ -4735,14 +4700,14 @@
       </p:sp>
       <p:sp>
         <p:nvSpPr>
-          <p:cNvPr id="9" name="TextBox 8"/>
+          <p:cNvPr id="8" name="TextBox 7"/>
           <p:cNvSpPr txBox="1"/>
           <p:nvPr/>
         </p:nvSpPr>
         <p:spPr>
           <a:xfrm>
-            <a:off x="411480" y="3835736"/>
-            <a:ext cx="11369040" cy="337840"/>
+            <a:off x="411480" y="3733204"/>
+            <a:ext cx="11369040" cy="346286"/>
           </a:xfrm>
           <a:prstGeom prst="rect">
             <a:avLst/>
@@ -4757,7 +4722,7 @@
           <a:p>
             <a:pPr algn="l">
               <a:lnSpc>
-                <a:spcPts val="1330"/>
+                <a:spcPts val="1363"/>
               </a:lnSpc>
               <a:spcBef>
                 <a:spcPts val="0"/>
@@ -5013,7 +4978,7 @@
           <a:p>
             <a:pPr algn="l">
               <a:lnSpc>
-                <a:spcPts val="1330"/>
+                <a:spcPts val="1363"/>
               </a:lnSpc>
               <a:spcBef>
                 <a:spcPts val="0"/>
@@ -5054,14 +5019,14 @@
       </p:sp>
       <p:sp>
         <p:nvSpPr>
-          <p:cNvPr id="10" name="TextBox 9"/>
+          <p:cNvPr id="9" name="TextBox 8"/>
           <p:cNvSpPr txBox="1"/>
           <p:nvPr/>
         </p:nvSpPr>
         <p:spPr>
           <a:xfrm>
-            <a:off x="411480" y="4429608"/>
-            <a:ext cx="11369040" cy="236488"/>
+            <a:off x="411480" y="4335522"/>
+            <a:ext cx="11369040" cy="242400"/>
           </a:xfrm>
           <a:prstGeom prst="rect">
             <a:avLst/>
@@ -5076,7 +5041,7 @@
           <a:p>
             <a:pPr algn="l">
               <a:lnSpc>
-                <a:spcPts val="1862"/>
+                <a:spcPts val="1908"/>
               </a:lnSpc>
               <a:spcBef>
                 <a:spcPts val="0"/>
@@ -5099,14 +5064,14 @@
       </p:sp>
       <p:sp>
         <p:nvSpPr>
-          <p:cNvPr id="11" name="TextBox 10"/>
+          <p:cNvPr id="10" name="TextBox 9"/>
           <p:cNvSpPr txBox="1"/>
           <p:nvPr/>
         </p:nvSpPr>
         <p:spPr>
           <a:xfrm>
-            <a:off x="411480" y="4748392"/>
-            <a:ext cx="11369040" cy="337840"/>
+            <a:off x="411480" y="4660218"/>
+            <a:ext cx="11369040" cy="346286"/>
           </a:xfrm>
           <a:prstGeom prst="rect">
             <a:avLst/>
@@ -5121,7 +5086,7 @@
           <a:p>
             <a:pPr algn="l">
               <a:lnSpc>
-                <a:spcPts val="1330"/>
+                <a:spcPts val="1363"/>
               </a:lnSpc>
               <a:spcBef>
                 <a:spcPts val="0"/>
@@ -5368,7 +5333,7 @@
           <a:p>
             <a:pPr algn="l">
               <a:lnSpc>
-                <a:spcPts val="1330"/>
+                <a:spcPts val="1363"/>
               </a:lnSpc>
               <a:spcBef>
                 <a:spcPts val="0"/>
@@ -5409,7 +5374,7 @@
       </p:sp>
       <p:cxnSp>
         <p:nvCxnSpPr>
-          <p:cNvPr id="12" name="Connector 11"/>
+          <p:cNvPr id="11" name="Connector 10"/>
           <p:cNvCxnSpPr/>
           <p:nvPr/>
         </p:nvCxnSpPr>
@@ -5444,7 +5409,7 @@
       </p:cxnSp>
       <p:sp>
         <p:nvSpPr>
-          <p:cNvPr id="13" name="TextBox 12"/>
+          <p:cNvPr id="12" name="TextBox 11"/>
           <p:cNvSpPr txBox="1"/>
           <p:nvPr/>
         </p:nvSpPr>
@@ -5605,7 +5570,7 @@
         <p:spPr>
           <a:xfrm>
             <a:off x="1371600" y="2468880"/>
-            <a:ext cx="9448800" cy="851378"/>
+            <a:ext cx="9448800" cy="872662"/>
           </a:xfrm>
           <a:prstGeom prst="rect">
             <a:avLst/>
@@ -5620,7 +5585,7 @@
           <a:p>
             <a:pPr algn="ctr">
               <a:lnSpc>
-                <a:spcPts val="3351"/>
+                <a:spcPts val="3435"/>
               </a:lnSpc>
               <a:spcBef>
                 <a:spcPts val="0"/>
@@ -5696,7 +5661,7 @@
           <a:p>
             <a:pPr algn="ctr">
               <a:lnSpc>
-                <a:spcPts val="3351"/>
+                <a:spcPts val="3435"/>
               </a:lnSpc>
               <a:spcBef>
                 <a:spcPts val="0"/>
@@ -5779,8 +5744,8 @@
         </p:nvSpPr>
         <p:spPr>
           <a:xfrm>
-            <a:off x="1371600" y="3411698"/>
-            <a:ext cx="9448800" cy="236488"/>
+            <a:off x="1371600" y="3432982"/>
+            <a:ext cx="9448800" cy="242400"/>
           </a:xfrm>
           <a:prstGeom prst="rect">
             <a:avLst/>
@@ -5795,7 +5760,7 @@
           <a:p>
             <a:pPr algn="ctr">
               <a:lnSpc>
-                <a:spcPts val="1862"/>
+                <a:spcPts val="1908"/>
               </a:lnSpc>
               <a:spcBef>
                 <a:spcPts val="0"/>
@@ -5958,8 +5923,8 @@
         </p:nvSpPr>
         <p:spPr>
           <a:xfrm>
-            <a:off x="411480" y="398907"/>
-            <a:ext cx="11369040" cy="577206"/>
+            <a:off x="411480" y="274320"/>
+            <a:ext cx="11369040" cy="591636"/>
           </a:xfrm>
           <a:prstGeom prst="rect">
             <a:avLst/>
@@ -5974,7 +5939,7 @@
           <a:p>
             <a:pPr algn="l">
               <a:lnSpc>
-                <a:spcPts val="2272"/>
+                <a:spcPts val="2329"/>
               </a:lnSpc>
               <a:spcBef>
                 <a:spcPts val="0"/>
@@ -6131,7 +6096,7 @@
           <a:p>
             <a:pPr algn="l">
               <a:lnSpc>
-                <a:spcPts val="2272"/>
+                <a:spcPts val="2329"/>
               </a:lnSpc>
               <a:spcBef>
                 <a:spcPts val="0"/>
@@ -6205,8 +6170,8 @@
         </p:nvSpPr>
         <p:spPr>
           <a:xfrm>
-            <a:off x="411480" y="1003545"/>
-            <a:ext cx="11369040" cy="152028"/>
+            <a:off x="411480" y="893388"/>
+            <a:ext cx="11369040" cy="155829"/>
           </a:xfrm>
           <a:prstGeom prst="rect">
             <a:avLst/>
@@ -6221,7 +6186,7 @@
           <a:p>
             <a:pPr algn="l">
               <a:lnSpc>
-                <a:spcPts val="1197"/>
+                <a:spcPts val="1227"/>
               </a:lnSpc>
               <a:spcBef>
                 <a:spcPts val="0"/>
@@ -6386,7 +6351,7 @@
         <p:spPr>
           <a:xfrm>
             <a:off x="411480" y="1691640"/>
-            <a:ext cx="3765296" cy="188604"/>
+            <a:ext cx="3765296" cy="192405"/>
           </a:xfrm>
           <a:prstGeom prst="rect">
             <a:avLst/>
@@ -6448,7 +6413,7 @@
         <p:spPr>
           <a:xfrm>
             <a:off x="4213352" y="1691640"/>
-            <a:ext cx="3765296" cy="188604"/>
+            <a:ext cx="3765296" cy="192405"/>
           </a:xfrm>
           <a:prstGeom prst="rect">
             <a:avLst/>
@@ -6510,7 +6475,7 @@
         <p:spPr>
           <a:xfrm>
             <a:off x="8015224" y="1691640"/>
-            <a:ext cx="3765296" cy="188604"/>
+            <a:ext cx="3765296" cy="192405"/>
           </a:xfrm>
           <a:prstGeom prst="rect">
             <a:avLst/>
@@ -6571,8 +6536,8 @@
         </p:nvSpPr>
         <p:spPr>
           <a:xfrm>
-            <a:off x="411480" y="1916820"/>
-            <a:ext cx="1255099" cy="152028"/>
+            <a:off x="411480" y="1920621"/>
+            <a:ext cx="1255099" cy="155829"/>
           </a:xfrm>
           <a:prstGeom prst="rect">
             <a:avLst/>
@@ -6587,7 +6552,7 @@
           <a:p>
             <a:pPr algn="ctr">
               <a:lnSpc>
-                <a:spcPts val="1197"/>
+                <a:spcPts val="1227"/>
               </a:lnSpc>
               <a:spcBef>
                 <a:spcPts val="0"/>
@@ -6616,8 +6581,8 @@
         </p:nvSpPr>
         <p:spPr>
           <a:xfrm>
-            <a:off x="411480" y="2091708"/>
-            <a:ext cx="1255099" cy="228042"/>
+            <a:off x="411480" y="2099310"/>
+            <a:ext cx="1255099" cy="233743"/>
           </a:xfrm>
           <a:prstGeom prst="rect">
             <a:avLst/>
@@ -6632,7 +6597,7 @@
           <a:p>
             <a:pPr algn="ctr">
               <a:lnSpc>
-                <a:spcPts val="1795"/>
+                <a:spcPts val="1840"/>
               </a:lnSpc>
               <a:spcBef>
                 <a:spcPts val="0"/>
@@ -6661,7 +6626,7 @@
         </p:nvCxnSpPr>
         <p:spPr>
           <a:xfrm>
-            <a:off x="662500" y="2339816"/>
+            <a:off x="662500" y="2353119"/>
             <a:ext cx="753059" cy="0"/>
           </a:xfrm>
           <a:prstGeom prst="line">
@@ -6696,8 +6661,8 @@
         </p:nvSpPr>
         <p:spPr>
           <a:xfrm>
-            <a:off x="1666579" y="1916820"/>
-            <a:ext cx="1255099" cy="152028"/>
+            <a:off x="1666579" y="1920621"/>
+            <a:ext cx="1255099" cy="155829"/>
           </a:xfrm>
           <a:prstGeom prst="rect">
             <a:avLst/>
@@ -6712,7 +6677,7 @@
           <a:p>
             <a:pPr algn="ctr">
               <a:lnSpc>
-                <a:spcPts val="1197"/>
+                <a:spcPts val="1227"/>
               </a:lnSpc>
               <a:spcBef>
                 <a:spcPts val="0"/>
@@ -6741,8 +6706,8 @@
         </p:nvSpPr>
         <p:spPr>
           <a:xfrm>
-            <a:off x="1666579" y="2091708"/>
-            <a:ext cx="1255099" cy="228042"/>
+            <a:off x="1666579" y="2099310"/>
+            <a:ext cx="1255099" cy="233743"/>
           </a:xfrm>
           <a:prstGeom prst="rect">
             <a:avLst/>
@@ -6757,7 +6722,7 @@
           <a:p>
             <a:pPr algn="ctr">
               <a:lnSpc>
-                <a:spcPts val="1795"/>
+                <a:spcPts val="1840"/>
               </a:lnSpc>
               <a:spcBef>
                 <a:spcPts val="0"/>
@@ -6786,7 +6751,7 @@
         </p:nvCxnSpPr>
         <p:spPr>
           <a:xfrm>
-            <a:off x="1917599" y="2339816"/>
+            <a:off x="1917599" y="2353119"/>
             <a:ext cx="753059" cy="0"/>
           </a:xfrm>
           <a:prstGeom prst="line">
@@ -6821,8 +6786,8 @@
         </p:nvSpPr>
         <p:spPr>
           <a:xfrm>
-            <a:off x="2921678" y="1916820"/>
-            <a:ext cx="1255098" cy="152028"/>
+            <a:off x="2921678" y="1920621"/>
+            <a:ext cx="1255098" cy="155829"/>
           </a:xfrm>
           <a:prstGeom prst="rect">
             <a:avLst/>
@@ -6837,7 +6802,7 @@
           <a:p>
             <a:pPr algn="ctr">
               <a:lnSpc>
-                <a:spcPts val="1197"/>
+                <a:spcPts val="1227"/>
               </a:lnSpc>
               <a:spcBef>
                 <a:spcPts val="0"/>
@@ -6866,8 +6831,8 @@
         </p:nvSpPr>
         <p:spPr>
           <a:xfrm>
-            <a:off x="2921678" y="2091708"/>
-            <a:ext cx="1255098" cy="228042"/>
+            <a:off x="2921678" y="2099310"/>
+            <a:ext cx="1255098" cy="233743"/>
           </a:xfrm>
           <a:prstGeom prst="rect">
             <a:avLst/>
@@ -6882,7 +6847,7 @@
           <a:p>
             <a:pPr algn="ctr">
               <a:lnSpc>
-                <a:spcPts val="1795"/>
+                <a:spcPts val="1840"/>
               </a:lnSpc>
               <a:spcBef>
                 <a:spcPts val="0"/>
@@ -6911,7 +6876,7 @@
         </p:nvCxnSpPr>
         <p:spPr>
           <a:xfrm>
-            <a:off x="3172697" y="2339816"/>
+            <a:off x="3172697" y="2353119"/>
             <a:ext cx="753059" cy="0"/>
           </a:xfrm>
           <a:prstGeom prst="line">
@@ -6946,8 +6911,8 @@
         </p:nvSpPr>
         <p:spPr>
           <a:xfrm>
-            <a:off x="4213352" y="1916820"/>
-            <a:ext cx="1255099" cy="152028"/>
+            <a:off x="4213352" y="1920621"/>
+            <a:ext cx="1255099" cy="155829"/>
           </a:xfrm>
           <a:prstGeom prst="rect">
             <a:avLst/>
@@ -6962,7 +6927,7 @@
           <a:p>
             <a:pPr algn="ctr">
               <a:lnSpc>
-                <a:spcPts val="1197"/>
+                <a:spcPts val="1227"/>
               </a:lnSpc>
               <a:spcBef>
                 <a:spcPts val="0"/>
@@ -6991,8 +6956,8 @@
         </p:nvSpPr>
         <p:spPr>
           <a:xfrm>
-            <a:off x="4213352" y="2091708"/>
-            <a:ext cx="1255099" cy="228042"/>
+            <a:off x="4213352" y="2099310"/>
+            <a:ext cx="1255099" cy="233743"/>
           </a:xfrm>
           <a:prstGeom prst="rect">
             <a:avLst/>
@@ -7007,7 +6972,7 @@
           <a:p>
             <a:pPr algn="ctr">
               <a:lnSpc>
-                <a:spcPts val="1795"/>
+                <a:spcPts val="1840"/>
               </a:lnSpc>
               <a:spcBef>
                 <a:spcPts val="0"/>
@@ -7036,7 +7001,7 @@
         </p:nvCxnSpPr>
         <p:spPr>
           <a:xfrm>
-            <a:off x="4464372" y="2339816"/>
+            <a:off x="4464372" y="2353119"/>
             <a:ext cx="753059" cy="0"/>
           </a:xfrm>
           <a:prstGeom prst="line">
@@ -7071,8 +7036,8 @@
         </p:nvSpPr>
         <p:spPr>
           <a:xfrm>
-            <a:off x="5468451" y="1916820"/>
-            <a:ext cx="1255099" cy="152028"/>
+            <a:off x="5468451" y="1920621"/>
+            <a:ext cx="1255099" cy="155829"/>
           </a:xfrm>
           <a:prstGeom prst="rect">
             <a:avLst/>
@@ -7087,7 +7052,7 @@
           <a:p>
             <a:pPr algn="ctr">
               <a:lnSpc>
-                <a:spcPts val="1197"/>
+                <a:spcPts val="1227"/>
               </a:lnSpc>
               <a:spcBef>
                 <a:spcPts val="0"/>
@@ -7116,8 +7081,8 @@
         </p:nvSpPr>
         <p:spPr>
           <a:xfrm>
-            <a:off x="5468451" y="2091708"/>
-            <a:ext cx="1255099" cy="228042"/>
+            <a:off x="5468451" y="2099310"/>
+            <a:ext cx="1255099" cy="233743"/>
           </a:xfrm>
           <a:prstGeom prst="rect">
             <a:avLst/>
@@ -7132,7 +7097,7 @@
           <a:p>
             <a:pPr algn="ctr">
               <a:lnSpc>
-                <a:spcPts val="1795"/>
+                <a:spcPts val="1840"/>
               </a:lnSpc>
               <a:spcBef>
                 <a:spcPts val="0"/>
@@ -7161,7 +7126,7 @@
         </p:nvCxnSpPr>
         <p:spPr>
           <a:xfrm>
-            <a:off x="5719471" y="2339816"/>
+            <a:off x="5719471" y="2353119"/>
             <a:ext cx="753059" cy="0"/>
           </a:xfrm>
           <a:prstGeom prst="line">
@@ -7196,8 +7161,8 @@
         </p:nvSpPr>
         <p:spPr>
           <a:xfrm>
-            <a:off x="6723550" y="1916820"/>
-            <a:ext cx="1255098" cy="152028"/>
+            <a:off x="6723550" y="1920621"/>
+            <a:ext cx="1255098" cy="155829"/>
           </a:xfrm>
           <a:prstGeom prst="rect">
             <a:avLst/>
@@ -7212,7 +7177,7 @@
           <a:p>
             <a:pPr algn="ctr">
               <a:lnSpc>
-                <a:spcPts val="1197"/>
+                <a:spcPts val="1227"/>
               </a:lnSpc>
               <a:spcBef>
                 <a:spcPts val="0"/>
@@ -7241,8 +7206,8 @@
         </p:nvSpPr>
         <p:spPr>
           <a:xfrm>
-            <a:off x="6723550" y="2091708"/>
-            <a:ext cx="1255098" cy="228042"/>
+            <a:off x="6723550" y="2099310"/>
+            <a:ext cx="1255098" cy="233743"/>
           </a:xfrm>
           <a:prstGeom prst="rect">
             <a:avLst/>
@@ -7257,7 +7222,7 @@
           <a:p>
             <a:pPr algn="ctr">
               <a:lnSpc>
-                <a:spcPts val="1795"/>
+                <a:spcPts val="1840"/>
               </a:lnSpc>
               <a:spcBef>
                 <a:spcPts val="0"/>
@@ -7286,7 +7251,7 @@
         </p:nvCxnSpPr>
         <p:spPr>
           <a:xfrm>
-            <a:off x="6974569" y="2339816"/>
+            <a:off x="6974569" y="2353119"/>
             <a:ext cx="753059" cy="0"/>
           </a:xfrm>
           <a:prstGeom prst="line">
@@ -7321,8 +7286,8 @@
         </p:nvSpPr>
         <p:spPr>
           <a:xfrm>
-            <a:off x="8015224" y="1916820"/>
-            <a:ext cx="1255099" cy="152028"/>
+            <a:off x="8015224" y="1920621"/>
+            <a:ext cx="1255099" cy="155829"/>
           </a:xfrm>
           <a:prstGeom prst="rect">
             <a:avLst/>
@@ -7337,7 +7302,7 @@
           <a:p>
             <a:pPr algn="ctr">
               <a:lnSpc>
-                <a:spcPts val="1197"/>
+                <a:spcPts val="1227"/>
               </a:lnSpc>
               <a:spcBef>
                 <a:spcPts val="0"/>
@@ -7366,8 +7331,8 @@
         </p:nvSpPr>
         <p:spPr>
           <a:xfrm>
-            <a:off x="8015224" y="2091708"/>
-            <a:ext cx="1255099" cy="228042"/>
+            <a:off x="8015224" y="2099310"/>
+            <a:ext cx="1255099" cy="233743"/>
           </a:xfrm>
           <a:prstGeom prst="rect">
             <a:avLst/>
@@ -7382,7 +7347,7 @@
           <a:p>
             <a:pPr algn="ctr">
               <a:lnSpc>
-                <a:spcPts val="1795"/>
+                <a:spcPts val="1840"/>
               </a:lnSpc>
               <a:spcBef>
                 <a:spcPts val="0"/>
@@ -7411,7 +7376,7 @@
         </p:nvCxnSpPr>
         <p:spPr>
           <a:xfrm>
-            <a:off x="8266244" y="2339816"/>
+            <a:off x="8266244" y="2353119"/>
             <a:ext cx="753059" cy="0"/>
           </a:xfrm>
           <a:prstGeom prst="line">
@@ -7446,8 +7411,8 @@
         </p:nvSpPr>
         <p:spPr>
           <a:xfrm>
-            <a:off x="9270323" y="1916820"/>
-            <a:ext cx="1255099" cy="152028"/>
+            <a:off x="9270323" y="1920621"/>
+            <a:ext cx="1255099" cy="155829"/>
           </a:xfrm>
           <a:prstGeom prst="rect">
             <a:avLst/>
@@ -7462,7 +7427,7 @@
           <a:p>
             <a:pPr algn="ctr">
               <a:lnSpc>
-                <a:spcPts val="1197"/>
+                <a:spcPts val="1227"/>
               </a:lnSpc>
               <a:spcBef>
                 <a:spcPts val="0"/>
@@ -7491,8 +7456,8 @@
         </p:nvSpPr>
         <p:spPr>
           <a:xfrm>
-            <a:off x="9270323" y="2091708"/>
-            <a:ext cx="1255099" cy="228042"/>
+            <a:off x="9270323" y="2099310"/>
+            <a:ext cx="1255099" cy="233743"/>
           </a:xfrm>
           <a:prstGeom prst="rect">
             <a:avLst/>
@@ -7507,7 +7472,7 @@
           <a:p>
             <a:pPr algn="ctr">
               <a:lnSpc>
-                <a:spcPts val="1795"/>
+                <a:spcPts val="1840"/>
               </a:lnSpc>
               <a:spcBef>
                 <a:spcPts val="0"/>
@@ -7536,7 +7501,7 @@
         </p:nvCxnSpPr>
         <p:spPr>
           <a:xfrm>
-            <a:off x="9521343" y="2339816"/>
+            <a:off x="9521343" y="2353119"/>
             <a:ext cx="753059" cy="0"/>
           </a:xfrm>
           <a:prstGeom prst="line">
@@ -7571,8 +7536,8 @@
         </p:nvSpPr>
         <p:spPr>
           <a:xfrm>
-            <a:off x="10525422" y="1916820"/>
-            <a:ext cx="1255098" cy="152028"/>
+            <a:off x="10525422" y="1920621"/>
+            <a:ext cx="1255098" cy="155829"/>
           </a:xfrm>
           <a:prstGeom prst="rect">
             <a:avLst/>
@@ -7587,7 +7552,7 @@
           <a:p>
             <a:pPr algn="ctr">
               <a:lnSpc>
-                <a:spcPts val="1197"/>
+                <a:spcPts val="1227"/>
               </a:lnSpc>
               <a:spcBef>
                 <a:spcPts val="0"/>
@@ -7616,8 +7581,8 @@
         </p:nvSpPr>
         <p:spPr>
           <a:xfrm>
-            <a:off x="10525422" y="2091708"/>
-            <a:ext cx="1255098" cy="228042"/>
+            <a:off x="10525422" y="2099310"/>
+            <a:ext cx="1255098" cy="233743"/>
           </a:xfrm>
           <a:prstGeom prst="rect">
             <a:avLst/>
@@ -7632,7 +7597,7 @@
           <a:p>
             <a:pPr algn="ctr">
               <a:lnSpc>
-                <a:spcPts val="1795"/>
+                <a:spcPts val="1840"/>
               </a:lnSpc>
               <a:spcBef>
                 <a:spcPts val="0"/>
@@ -7661,7 +7626,7 @@
         </p:nvCxnSpPr>
         <p:spPr>
           <a:xfrm>
-            <a:off x="10776441" y="2339816"/>
+            <a:off x="10776441" y="2353119"/>
             <a:ext cx="753059" cy="0"/>
           </a:xfrm>
           <a:prstGeom prst="line">
@@ -7696,8 +7661,8 @@
         </p:nvSpPr>
         <p:spPr>
           <a:xfrm>
-            <a:off x="411480" y="2695558"/>
-            <a:ext cx="3765296" cy="506760"/>
+            <a:off x="411480" y="2715195"/>
+            <a:ext cx="3765296" cy="519429"/>
           </a:xfrm>
           <a:prstGeom prst="rect">
             <a:avLst/>
@@ -7712,7 +7677,7 @@
           <a:p>
             <a:pPr algn="l">
               <a:lnSpc>
-                <a:spcPts val="1330"/>
+                <a:spcPts val="1363"/>
               </a:lnSpc>
               <a:spcBef>
                 <a:spcPts val="0"/>
@@ -7806,7 +7771,7 @@
           <a:p>
             <a:pPr algn="l">
               <a:lnSpc>
-                <a:spcPts val="1330"/>
+                <a:spcPts val="1363"/>
               </a:lnSpc>
               <a:spcBef>
                 <a:spcPts val="0"/>
@@ -7891,7 +7856,7 @@
           <a:p>
             <a:pPr algn="l">
               <a:lnSpc>
-                <a:spcPts val="1330"/>
+                <a:spcPts val="1363"/>
               </a:lnSpc>
               <a:spcBef>
                 <a:spcPts val="0"/>
@@ -7920,8 +7885,8 @@
         </p:nvSpPr>
         <p:spPr>
           <a:xfrm>
-            <a:off x="4213352" y="2695558"/>
-            <a:ext cx="3765296" cy="506760"/>
+            <a:off x="4213352" y="2715195"/>
+            <a:ext cx="3765296" cy="519429"/>
           </a:xfrm>
           <a:prstGeom prst="rect">
             <a:avLst/>
@@ -7936,7 +7901,7 @@
           <a:p>
             <a:pPr algn="l">
               <a:lnSpc>
-                <a:spcPts val="1330"/>
+                <a:spcPts val="1363"/>
               </a:lnSpc>
               <a:spcBef>
                 <a:spcPts val="0"/>
@@ -8012,7 +7977,7 @@
           <a:p>
             <a:pPr algn="l">
               <a:lnSpc>
-                <a:spcPts val="1330"/>
+                <a:spcPts val="1363"/>
               </a:lnSpc>
               <a:spcBef>
                 <a:spcPts val="0"/>
@@ -8097,7 +8062,7 @@
           <a:p>
             <a:pPr algn="l">
               <a:lnSpc>
-                <a:spcPts val="1330"/>
+                <a:spcPts val="1363"/>
               </a:lnSpc>
               <a:spcBef>
                 <a:spcPts val="0"/>
@@ -8135,8 +8100,8 @@
         </p:nvSpPr>
         <p:spPr>
           <a:xfrm>
-            <a:off x="8015224" y="2695558"/>
-            <a:ext cx="3765296" cy="506760"/>
+            <a:off x="8015224" y="2715195"/>
+            <a:ext cx="3765296" cy="519429"/>
           </a:xfrm>
           <a:prstGeom prst="rect">
             <a:avLst/>
@@ -8151,7 +8116,7 @@
           <a:p>
             <a:pPr algn="l">
               <a:lnSpc>
-                <a:spcPts val="1330"/>
+                <a:spcPts val="1363"/>
               </a:lnSpc>
               <a:spcBef>
                 <a:spcPts val="0"/>
@@ -8236,7 +8201,7 @@
           <a:p>
             <a:pPr algn="l">
               <a:lnSpc>
-                <a:spcPts val="1330"/>
+                <a:spcPts val="1363"/>
               </a:lnSpc>
               <a:spcBef>
                 <a:spcPts val="0"/>
@@ -8321,7 +8286,7 @@
           <a:p>
             <a:pPr algn="l">
               <a:lnSpc>
-                <a:spcPts val="1330"/>
+                <a:spcPts val="1363"/>
               </a:lnSpc>
               <a:spcBef>
                 <a:spcPts val="0"/>
@@ -8350,8 +8315,8 @@
         </p:nvSpPr>
         <p:spPr>
           <a:xfrm>
-            <a:off x="411480" y="3551710"/>
-            <a:ext cx="1882648" cy="154122"/>
+            <a:off x="411480" y="3590350"/>
+            <a:ext cx="1882648" cy="157289"/>
           </a:xfrm>
           <a:prstGeom prst="rect">
             <a:avLst/>
@@ -8381,14 +8346,14 @@
           </a:fontRef>
         </p:style>
         <p:txBody>
-          <a:bodyPr rtlCol="0" anchor="ctr" wrap="none" lIns="0" rIns="0" tIns="0" bIns="0">
+          <a:bodyPr rtlCol="0" anchor="ctr" wrap="none" lIns="22860" rIns="22860" tIns="0" bIns="0">
             <a:noAutofit/>
           </a:bodyPr>
           <a:lstStyle/>
           <a:p>
             <a:pPr algn="l">
               <a:lnSpc>
-                <a:spcPts val="997"/>
+                <a:spcPts val="1022"/>
               </a:lnSpc>
               <a:spcBef>
                 <a:spcPts val="0"/>
@@ -8404,7 +8369,16 @@
                 </a:solidFill>
                 <a:latin typeface="Segoe UI"/>
               </a:rPr>
-              <a:t>Top players</a:t>
+              <a:t>Top </a:t>
+            </a:r>
+            <a:r>
+              <a:rPr sz="750" b="1" i="0">
+                <a:solidFill>
+                  <a:srgbClr val="3F3F3F"/>
+                </a:solidFill>
+                <a:latin typeface="Segoe UI"/>
+              </a:rPr>
+              <a:t>players</a:t>
             </a:r>
           </a:p>
         </p:txBody>
@@ -8417,8 +8391,8 @@
         </p:nvSpPr>
         <p:spPr>
           <a:xfrm>
-            <a:off x="2294128" y="3551710"/>
-            <a:ext cx="1882648" cy="154122"/>
+            <a:off x="2294128" y="3590350"/>
+            <a:ext cx="1882648" cy="157289"/>
           </a:xfrm>
           <a:prstGeom prst="rect">
             <a:avLst/>
@@ -8448,14 +8422,14 @@
           </a:fontRef>
         </p:style>
         <p:txBody>
-          <a:bodyPr rtlCol="0" anchor="ctr" wrap="none" lIns="0" rIns="0" tIns="0" bIns="0">
+          <a:bodyPr rtlCol="0" anchor="ctr" wrap="none" lIns="22860" rIns="22860" tIns="0" bIns="0">
             <a:noAutofit/>
           </a:bodyPr>
           <a:lstStyle/>
           <a:p>
             <a:pPr algn="l">
               <a:lnSpc>
-                <a:spcPts val="997"/>
+                <a:spcPts val="1022"/>
               </a:lnSpc>
               <a:spcBef>
                 <a:spcPts val="0"/>
@@ -8484,8 +8458,8 @@
         </p:nvSpPr>
         <p:spPr>
           <a:xfrm>
-            <a:off x="411480" y="3705832"/>
-            <a:ext cx="1882648" cy="154122"/>
+            <a:off x="411480" y="3747639"/>
+            <a:ext cx="1882648" cy="157289"/>
           </a:xfrm>
           <a:prstGeom prst="rect">
             <a:avLst/>
@@ -8515,14 +8489,14 @@
           </a:fontRef>
         </p:style>
         <p:txBody>
-          <a:bodyPr rtlCol="0" anchor="ctr" wrap="none" lIns="0" rIns="0" tIns="0" bIns="0">
+          <a:bodyPr rtlCol="0" anchor="ctr" wrap="none" lIns="22860" rIns="22860" tIns="0" bIns="0">
             <a:noAutofit/>
           </a:bodyPr>
           <a:lstStyle/>
           <a:p>
             <a:pPr algn="l">
               <a:lnSpc>
-                <a:spcPts val="997"/>
+                <a:spcPts val="1022"/>
               </a:lnSpc>
               <a:spcBef>
                 <a:spcPts val="0"/>
@@ -8538,7 +8512,16 @@
                 </a:solidFill>
                 <a:latin typeface="Segoe UI"/>
               </a:rPr>
-              <a:t>Ola Electric</a:t>
+              <a:t>Ola </a:t>
+            </a:r>
+            <a:r>
+              <a:rPr sz="750" b="0" i="0">
+                <a:solidFill>
+                  <a:srgbClr val="3F3F3F"/>
+                </a:solidFill>
+                <a:latin typeface="Segoe UI"/>
+              </a:rPr>
+              <a:t>Electric</a:t>
             </a:r>
           </a:p>
         </p:txBody>
@@ -8551,8 +8534,8 @@
         </p:nvSpPr>
         <p:spPr>
           <a:xfrm>
-            <a:off x="2294128" y="3705832"/>
-            <a:ext cx="1882648" cy="154122"/>
+            <a:off x="2294128" y="3747639"/>
+            <a:ext cx="1882648" cy="157289"/>
           </a:xfrm>
           <a:prstGeom prst="rect">
             <a:avLst/>
@@ -8582,14 +8565,14 @@
           </a:fontRef>
         </p:style>
         <p:txBody>
-          <a:bodyPr rtlCol="0" anchor="ctr" wrap="none" lIns="0" rIns="0" tIns="0" bIns="0">
+          <a:bodyPr rtlCol="0" anchor="ctr" wrap="none" lIns="22860" rIns="22860" tIns="0" bIns="0">
             <a:noAutofit/>
           </a:bodyPr>
           <a:lstStyle/>
           <a:p>
             <a:pPr algn="l">
               <a:lnSpc>
-                <a:spcPts val="997"/>
+                <a:spcPts val="1022"/>
               </a:lnSpc>
               <a:spcBef>
                 <a:spcPts val="0"/>
@@ -8618,8 +8601,8 @@
         </p:nvSpPr>
         <p:spPr>
           <a:xfrm>
-            <a:off x="411480" y="3859954"/>
-            <a:ext cx="1882648" cy="154122"/>
+            <a:off x="411480" y="3904928"/>
+            <a:ext cx="1882648" cy="157289"/>
           </a:xfrm>
           <a:prstGeom prst="rect">
             <a:avLst/>
@@ -8649,14 +8632,14 @@
           </a:fontRef>
         </p:style>
         <p:txBody>
-          <a:bodyPr rtlCol="0" anchor="ctr" wrap="none" lIns="0" rIns="0" tIns="0" bIns="0">
+          <a:bodyPr rtlCol="0" anchor="ctr" wrap="none" lIns="22860" rIns="22860" tIns="0" bIns="0">
             <a:noAutofit/>
           </a:bodyPr>
           <a:lstStyle/>
           <a:p>
             <a:pPr algn="l">
               <a:lnSpc>
-                <a:spcPts val="997"/>
+                <a:spcPts val="1022"/>
               </a:lnSpc>
               <a:spcBef>
                 <a:spcPts val="0"/>
@@ -8672,7 +8655,16 @@
                 </a:solidFill>
                 <a:latin typeface="Segoe UI"/>
               </a:rPr>
-              <a:t>TVS iQube</a:t>
+              <a:t>TVS </a:t>
+            </a:r>
+            <a:r>
+              <a:rPr sz="750" b="0" i="0">
+                <a:solidFill>
+                  <a:srgbClr val="3F3F3F"/>
+                </a:solidFill>
+                <a:latin typeface="Segoe UI"/>
+              </a:rPr>
+              <a:t>iQube</a:t>
             </a:r>
           </a:p>
         </p:txBody>
@@ -8685,8 +8677,8 @@
         </p:nvSpPr>
         <p:spPr>
           <a:xfrm>
-            <a:off x="2294128" y="3859954"/>
-            <a:ext cx="1882648" cy="154122"/>
+            <a:off x="2294128" y="3904928"/>
+            <a:ext cx="1882648" cy="157289"/>
           </a:xfrm>
           <a:prstGeom prst="rect">
             <a:avLst/>
@@ -8716,14 +8708,14 @@
           </a:fontRef>
         </p:style>
         <p:txBody>
-          <a:bodyPr rtlCol="0" anchor="ctr" wrap="none" lIns="0" rIns="0" tIns="0" bIns="0">
+          <a:bodyPr rtlCol="0" anchor="ctr" wrap="none" lIns="22860" rIns="22860" tIns="0" bIns="0">
             <a:noAutofit/>
           </a:bodyPr>
           <a:lstStyle/>
           <a:p>
             <a:pPr algn="l">
               <a:lnSpc>
-                <a:spcPts val="997"/>
+                <a:spcPts val="1022"/>
               </a:lnSpc>
               <a:spcBef>
                 <a:spcPts val="0"/>
@@ -8752,8 +8744,8 @@
         </p:nvSpPr>
         <p:spPr>
           <a:xfrm>
-            <a:off x="411480" y="4014076"/>
-            <a:ext cx="1882648" cy="154122"/>
+            <a:off x="411480" y="4062217"/>
+            <a:ext cx="1882648" cy="157289"/>
           </a:xfrm>
           <a:prstGeom prst="rect">
             <a:avLst/>
@@ -8783,14 +8775,14 @@
           </a:fontRef>
         </p:style>
         <p:txBody>
-          <a:bodyPr rtlCol="0" anchor="ctr" wrap="none" lIns="0" rIns="0" tIns="0" bIns="0">
+          <a:bodyPr rtlCol="0" anchor="ctr" wrap="none" lIns="22860" rIns="22860" tIns="0" bIns="0">
             <a:noAutofit/>
           </a:bodyPr>
           <a:lstStyle/>
           <a:p>
             <a:pPr algn="l">
               <a:lnSpc>
-                <a:spcPts val="997"/>
+                <a:spcPts val="1022"/>
               </a:lnSpc>
               <a:spcBef>
                 <a:spcPts val="0"/>
@@ -8806,7 +8798,16 @@
                 </a:solidFill>
                 <a:latin typeface="Segoe UI"/>
               </a:rPr>
-              <a:t>Bajaj Chetak</a:t>
+              <a:t>Bajaj </a:t>
+            </a:r>
+            <a:r>
+              <a:rPr sz="750" b="0" i="0">
+                <a:solidFill>
+                  <a:srgbClr val="3F3F3F"/>
+                </a:solidFill>
+                <a:latin typeface="Segoe UI"/>
+              </a:rPr>
+              <a:t>Chetak</a:t>
             </a:r>
           </a:p>
         </p:txBody>
@@ -8819,8 +8820,8 @@
         </p:nvSpPr>
         <p:spPr>
           <a:xfrm>
-            <a:off x="2294128" y="4014076"/>
-            <a:ext cx="1882648" cy="154122"/>
+            <a:off x="2294128" y="4062217"/>
+            <a:ext cx="1882648" cy="157289"/>
           </a:xfrm>
           <a:prstGeom prst="rect">
             <a:avLst/>
@@ -8850,14 +8851,14 @@
           </a:fontRef>
         </p:style>
         <p:txBody>
-          <a:bodyPr rtlCol="0" anchor="ctr" wrap="none" lIns="0" rIns="0" tIns="0" bIns="0">
+          <a:bodyPr rtlCol="0" anchor="ctr" wrap="none" lIns="22860" rIns="22860" tIns="0" bIns="0">
             <a:noAutofit/>
           </a:bodyPr>
           <a:lstStyle/>
           <a:p>
             <a:pPr algn="l">
               <a:lnSpc>
-                <a:spcPts val="997"/>
+                <a:spcPts val="1022"/>
               </a:lnSpc>
               <a:spcBef>
                 <a:spcPts val="0"/>
@@ -8886,8 +8887,8 @@
         </p:nvSpPr>
         <p:spPr>
           <a:xfrm>
-            <a:off x="4213352" y="3551710"/>
-            <a:ext cx="1882648" cy="154122"/>
+            <a:off x="4213352" y="3590350"/>
+            <a:ext cx="1882648" cy="157289"/>
           </a:xfrm>
           <a:prstGeom prst="rect">
             <a:avLst/>
@@ -8917,14 +8918,14 @@
           </a:fontRef>
         </p:style>
         <p:txBody>
-          <a:bodyPr rtlCol="0" anchor="ctr" wrap="none" lIns="0" rIns="0" tIns="0" bIns="0">
+          <a:bodyPr rtlCol="0" anchor="ctr" wrap="none" lIns="22860" rIns="22860" tIns="0" bIns="0">
             <a:noAutofit/>
           </a:bodyPr>
           <a:lstStyle/>
           <a:p>
             <a:pPr algn="l">
               <a:lnSpc>
-                <a:spcPts val="997"/>
+                <a:spcPts val="1022"/>
               </a:lnSpc>
               <a:spcBef>
                 <a:spcPts val="0"/>
@@ -8940,7 +8941,16 @@
                 </a:solidFill>
                 <a:latin typeface="Segoe UI"/>
               </a:rPr>
-              <a:t>Top players</a:t>
+              <a:t>Top </a:t>
+            </a:r>
+            <a:r>
+              <a:rPr sz="750" b="1" i="0">
+                <a:solidFill>
+                  <a:srgbClr val="3F3F3F"/>
+                </a:solidFill>
+                <a:latin typeface="Segoe UI"/>
+              </a:rPr>
+              <a:t>players</a:t>
             </a:r>
           </a:p>
         </p:txBody>
@@ -8953,8 +8963,8 @@
         </p:nvSpPr>
         <p:spPr>
           <a:xfrm>
-            <a:off x="6096000" y="3551710"/>
-            <a:ext cx="1882648" cy="154122"/>
+            <a:off x="6096000" y="3590350"/>
+            <a:ext cx="1882648" cy="157289"/>
           </a:xfrm>
           <a:prstGeom prst="rect">
             <a:avLst/>
@@ -8984,14 +8994,14 @@
           </a:fontRef>
         </p:style>
         <p:txBody>
-          <a:bodyPr rtlCol="0" anchor="ctr" wrap="none" lIns="0" rIns="0" tIns="0" bIns="0">
+          <a:bodyPr rtlCol="0" anchor="ctr" wrap="none" lIns="22860" rIns="22860" tIns="0" bIns="0">
             <a:noAutofit/>
           </a:bodyPr>
           <a:lstStyle/>
           <a:p>
             <a:pPr algn="l">
               <a:lnSpc>
-                <a:spcPts val="997"/>
+                <a:spcPts val="1022"/>
               </a:lnSpc>
               <a:spcBef>
                 <a:spcPts val="0"/>
@@ -9020,8 +9030,8 @@
         </p:nvSpPr>
         <p:spPr>
           <a:xfrm>
-            <a:off x="4213352" y="3705832"/>
-            <a:ext cx="1882648" cy="154122"/>
+            <a:off x="4213352" y="3747639"/>
+            <a:ext cx="1882648" cy="157289"/>
           </a:xfrm>
           <a:prstGeom prst="rect">
             <a:avLst/>
@@ -9051,14 +9061,14 @@
           </a:fontRef>
         </p:style>
         <p:txBody>
-          <a:bodyPr rtlCol="0" anchor="ctr" wrap="none" lIns="0" rIns="0" tIns="0" bIns="0">
+          <a:bodyPr rtlCol="0" anchor="ctr" wrap="none" lIns="22860" rIns="22860" tIns="0" bIns="0">
             <a:noAutofit/>
           </a:bodyPr>
           <a:lstStyle/>
           <a:p>
             <a:pPr algn="l">
               <a:lnSpc>
-                <a:spcPts val="997"/>
+                <a:spcPts val="1022"/>
               </a:lnSpc>
               <a:spcBef>
                 <a:spcPts val="0"/>
@@ -9087,8 +9097,8 @@
         </p:nvSpPr>
         <p:spPr>
           <a:xfrm>
-            <a:off x="6096000" y="3705832"/>
-            <a:ext cx="1882648" cy="154122"/>
+            <a:off x="6096000" y="3747639"/>
+            <a:ext cx="1882648" cy="157289"/>
           </a:xfrm>
           <a:prstGeom prst="rect">
             <a:avLst/>
@@ -9118,14 +9128,14 @@
           </a:fontRef>
         </p:style>
         <p:txBody>
-          <a:bodyPr rtlCol="0" anchor="ctr" wrap="none" lIns="0" rIns="0" tIns="0" bIns="0">
+          <a:bodyPr rtlCol="0" anchor="ctr" wrap="none" lIns="22860" rIns="22860" tIns="0" bIns="0">
             <a:noAutofit/>
           </a:bodyPr>
           <a:lstStyle/>
           <a:p>
             <a:pPr algn="l">
               <a:lnSpc>
-                <a:spcPts val="997"/>
+                <a:spcPts val="1022"/>
               </a:lnSpc>
               <a:spcBef>
                 <a:spcPts val="0"/>
@@ -9154,8 +9164,8 @@
         </p:nvSpPr>
         <p:spPr>
           <a:xfrm>
-            <a:off x="4213352" y="3859954"/>
-            <a:ext cx="1882648" cy="154122"/>
+            <a:off x="4213352" y="3904928"/>
+            <a:ext cx="1882648" cy="157289"/>
           </a:xfrm>
           <a:prstGeom prst="rect">
             <a:avLst/>
@@ -9185,14 +9195,14 @@
           </a:fontRef>
         </p:style>
         <p:txBody>
-          <a:bodyPr rtlCol="0" anchor="ctr" wrap="none" lIns="0" rIns="0" tIns="0" bIns="0">
+          <a:bodyPr rtlCol="0" anchor="ctr" wrap="none" lIns="22860" rIns="22860" tIns="0" bIns="0">
             <a:noAutofit/>
           </a:bodyPr>
           <a:lstStyle/>
           <a:p>
             <a:pPr algn="l">
               <a:lnSpc>
-                <a:spcPts val="997"/>
+                <a:spcPts val="1022"/>
               </a:lnSpc>
               <a:spcBef>
                 <a:spcPts val="0"/>
@@ -9208,7 +9218,16 @@
                 </a:solidFill>
                 <a:latin typeface="Segoe UI"/>
               </a:rPr>
-              <a:t>Ola Electric</a:t>
+              <a:t>Ola </a:t>
+            </a:r>
+            <a:r>
+              <a:rPr sz="750" b="0" i="0">
+                <a:solidFill>
+                  <a:srgbClr val="3F3F3F"/>
+                </a:solidFill>
+                <a:latin typeface="Segoe UI"/>
+              </a:rPr>
+              <a:t>Electric</a:t>
             </a:r>
           </a:p>
         </p:txBody>
@@ -9221,8 +9240,8 @@
         </p:nvSpPr>
         <p:spPr>
           <a:xfrm>
-            <a:off x="6096000" y="3859954"/>
-            <a:ext cx="1882648" cy="154122"/>
+            <a:off x="6096000" y="3904928"/>
+            <a:ext cx="1882648" cy="157289"/>
           </a:xfrm>
           <a:prstGeom prst="rect">
             <a:avLst/>
@@ -9252,14 +9271,14 @@
           </a:fontRef>
         </p:style>
         <p:txBody>
-          <a:bodyPr rtlCol="0" anchor="ctr" wrap="none" lIns="0" rIns="0" tIns="0" bIns="0">
+          <a:bodyPr rtlCol="0" anchor="ctr" wrap="none" lIns="22860" rIns="22860" tIns="0" bIns="0">
             <a:noAutofit/>
           </a:bodyPr>
           <a:lstStyle/>
           <a:p>
             <a:pPr algn="l">
               <a:lnSpc>
-                <a:spcPts val="997"/>
+                <a:spcPts val="1022"/>
               </a:lnSpc>
               <a:spcBef>
                 <a:spcPts val="0"/>
@@ -9288,8 +9307,8 @@
         </p:nvSpPr>
         <p:spPr>
           <a:xfrm>
-            <a:off x="4213352" y="4014076"/>
-            <a:ext cx="1882648" cy="154122"/>
+            <a:off x="4213352" y="4062217"/>
+            <a:ext cx="1882648" cy="157289"/>
           </a:xfrm>
           <a:prstGeom prst="rect">
             <a:avLst/>
@@ -9319,14 +9338,14 @@
           </a:fontRef>
         </p:style>
         <p:txBody>
-          <a:bodyPr rtlCol="0" anchor="ctr" wrap="none" lIns="0" rIns="0" tIns="0" bIns="0">
+          <a:bodyPr rtlCol="0" anchor="ctr" wrap="none" lIns="22860" rIns="22860" tIns="0" bIns="0">
             <a:noAutofit/>
           </a:bodyPr>
           <a:lstStyle/>
           <a:p>
             <a:pPr algn="l">
               <a:lnSpc>
-                <a:spcPts val="997"/>
+                <a:spcPts val="1022"/>
               </a:lnSpc>
               <a:spcBef>
                 <a:spcPts val="0"/>
@@ -9342,7 +9361,16 @@
                 </a:solidFill>
                 <a:latin typeface="Segoe UI"/>
               </a:rPr>
-              <a:t>Hero Vida</a:t>
+              <a:t>Hero </a:t>
+            </a:r>
+            <a:r>
+              <a:rPr sz="750" b="0" i="0">
+                <a:solidFill>
+                  <a:srgbClr val="3F3F3F"/>
+                </a:solidFill>
+                <a:latin typeface="Segoe UI"/>
+              </a:rPr>
+              <a:t>Vida</a:t>
             </a:r>
           </a:p>
         </p:txBody>
@@ -9355,8 +9383,8 @@
         </p:nvSpPr>
         <p:spPr>
           <a:xfrm>
-            <a:off x="6096000" y="4014076"/>
-            <a:ext cx="1882648" cy="154122"/>
+            <a:off x="6096000" y="4062217"/>
+            <a:ext cx="1882648" cy="157289"/>
           </a:xfrm>
           <a:prstGeom prst="rect">
             <a:avLst/>
@@ -9386,14 +9414,14 @@
           </a:fontRef>
         </p:style>
         <p:txBody>
-          <a:bodyPr rtlCol="0" anchor="ctr" wrap="none" lIns="0" rIns="0" tIns="0" bIns="0">
+          <a:bodyPr rtlCol="0" anchor="ctr" wrap="none" lIns="22860" rIns="22860" tIns="0" bIns="0">
             <a:noAutofit/>
           </a:bodyPr>
           <a:lstStyle/>
           <a:p>
             <a:pPr algn="l">
               <a:lnSpc>
-                <a:spcPts val="997"/>
+                <a:spcPts val="1022"/>
               </a:lnSpc>
               <a:spcBef>
                 <a:spcPts val="0"/>
@@ -9422,8 +9450,8 @@
         </p:nvSpPr>
         <p:spPr>
           <a:xfrm>
-            <a:off x="8015224" y="3551710"/>
-            <a:ext cx="1882648" cy="154122"/>
+            <a:off x="8015224" y="3590350"/>
+            <a:ext cx="1882648" cy="157289"/>
           </a:xfrm>
           <a:prstGeom prst="rect">
             <a:avLst/>
@@ -9453,14 +9481,14 @@
           </a:fontRef>
         </p:style>
         <p:txBody>
-          <a:bodyPr rtlCol="0" anchor="ctr" wrap="none" lIns="0" rIns="0" tIns="0" bIns="0">
+          <a:bodyPr rtlCol="0" anchor="ctr" wrap="none" lIns="22860" rIns="22860" tIns="0" bIns="0">
             <a:noAutofit/>
           </a:bodyPr>
           <a:lstStyle/>
           <a:p>
             <a:pPr algn="l">
               <a:lnSpc>
-                <a:spcPts val="997"/>
+                <a:spcPts val="1022"/>
               </a:lnSpc>
               <a:spcBef>
                 <a:spcPts val="0"/>
@@ -9476,7 +9504,16 @@
                 </a:solidFill>
                 <a:latin typeface="Segoe UI"/>
               </a:rPr>
-              <a:t>Top players</a:t>
+              <a:t>Top </a:t>
+            </a:r>
+            <a:r>
+              <a:rPr sz="750" b="1" i="0">
+                <a:solidFill>
+                  <a:srgbClr val="3F3F3F"/>
+                </a:solidFill>
+                <a:latin typeface="Segoe UI"/>
+              </a:rPr>
+              <a:t>players</a:t>
             </a:r>
           </a:p>
         </p:txBody>
@@ -9489,8 +9526,8 @@
         </p:nvSpPr>
         <p:spPr>
           <a:xfrm>
-            <a:off x="9897872" y="3551710"/>
-            <a:ext cx="1882648" cy="154122"/>
+            <a:off x="9897872" y="3590350"/>
+            <a:ext cx="1882648" cy="157289"/>
           </a:xfrm>
           <a:prstGeom prst="rect">
             <a:avLst/>
@@ -9520,14 +9557,14 @@
           </a:fontRef>
         </p:style>
         <p:txBody>
-          <a:bodyPr rtlCol="0" anchor="ctr" wrap="none" lIns="0" rIns="0" tIns="0" bIns="0">
+          <a:bodyPr rtlCol="0" anchor="ctr" wrap="none" lIns="22860" rIns="22860" tIns="0" bIns="0">
             <a:noAutofit/>
           </a:bodyPr>
           <a:lstStyle/>
           <a:p>
             <a:pPr algn="l">
               <a:lnSpc>
-                <a:spcPts val="997"/>
+                <a:spcPts val="1022"/>
               </a:lnSpc>
               <a:spcBef>
                 <a:spcPts val="0"/>
@@ -9556,8 +9593,8 @@
         </p:nvSpPr>
         <p:spPr>
           <a:xfrm>
-            <a:off x="8015224" y="3705832"/>
-            <a:ext cx="1882648" cy="154122"/>
+            <a:off x="8015224" y="3747639"/>
+            <a:ext cx="1882648" cy="157289"/>
           </a:xfrm>
           <a:prstGeom prst="rect">
             <a:avLst/>
@@ -9587,14 +9624,14 @@
           </a:fontRef>
         </p:style>
         <p:txBody>
-          <a:bodyPr rtlCol="0" anchor="ctr" wrap="none" lIns="0" rIns="0" tIns="0" bIns="0">
+          <a:bodyPr rtlCol="0" anchor="ctr" wrap="none" lIns="22860" rIns="22860" tIns="0" bIns="0">
             <a:noAutofit/>
           </a:bodyPr>
           <a:lstStyle/>
           <a:p>
             <a:pPr algn="l">
               <a:lnSpc>
-                <a:spcPts val="997"/>
+                <a:spcPts val="1022"/>
               </a:lnSpc>
               <a:spcBef>
                 <a:spcPts val="0"/>
@@ -9610,7 +9647,16 @@
                 </a:solidFill>
                 <a:latin typeface="Segoe UI"/>
               </a:rPr>
-              <a:t>Ola Electric</a:t>
+              <a:t>Ola </a:t>
+            </a:r>
+            <a:r>
+              <a:rPr sz="750" b="0" i="0">
+                <a:solidFill>
+                  <a:srgbClr val="3F3F3F"/>
+                </a:solidFill>
+                <a:latin typeface="Segoe UI"/>
+              </a:rPr>
+              <a:t>Electric</a:t>
             </a:r>
           </a:p>
         </p:txBody>
@@ -9623,8 +9669,8 @@
         </p:nvSpPr>
         <p:spPr>
           <a:xfrm>
-            <a:off x="9897872" y="3705832"/>
-            <a:ext cx="1882648" cy="154122"/>
+            <a:off x="9897872" y="3747639"/>
+            <a:ext cx="1882648" cy="157289"/>
           </a:xfrm>
           <a:prstGeom prst="rect">
             <a:avLst/>
@@ -9654,14 +9700,14 @@
           </a:fontRef>
         </p:style>
         <p:txBody>
-          <a:bodyPr rtlCol="0" anchor="ctr" wrap="none" lIns="0" rIns="0" tIns="0" bIns="0">
+          <a:bodyPr rtlCol="0" anchor="ctr" wrap="none" lIns="22860" rIns="22860" tIns="0" bIns="0">
             <a:noAutofit/>
           </a:bodyPr>
           <a:lstStyle/>
           <a:p>
             <a:pPr algn="l">
               <a:lnSpc>
-                <a:spcPts val="997"/>
+                <a:spcPts val="1022"/>
               </a:lnSpc>
               <a:spcBef>
                 <a:spcPts val="0"/>
@@ -9690,8 +9736,8 @@
         </p:nvSpPr>
         <p:spPr>
           <a:xfrm>
-            <a:off x="8015224" y="3859954"/>
-            <a:ext cx="1882648" cy="154122"/>
+            <a:off x="8015224" y="3904928"/>
+            <a:ext cx="1882648" cy="157289"/>
           </a:xfrm>
           <a:prstGeom prst="rect">
             <a:avLst/>
@@ -9721,14 +9767,14 @@
           </a:fontRef>
         </p:style>
         <p:txBody>
-          <a:bodyPr rtlCol="0" anchor="ctr" wrap="none" lIns="0" rIns="0" tIns="0" bIns="0">
+          <a:bodyPr rtlCol="0" anchor="ctr" wrap="none" lIns="22860" rIns="22860" tIns="0" bIns="0">
             <a:noAutofit/>
           </a:bodyPr>
           <a:lstStyle/>
           <a:p>
             <a:pPr algn="l">
               <a:lnSpc>
-                <a:spcPts val="997"/>
+                <a:spcPts val="1022"/>
               </a:lnSpc>
               <a:spcBef>
                 <a:spcPts val="0"/>
@@ -9744,7 +9790,16 @@
                 </a:solidFill>
                 <a:latin typeface="Segoe UI"/>
               </a:rPr>
-              <a:t>TVS iQube</a:t>
+              <a:t>TVS </a:t>
+            </a:r>
+            <a:r>
+              <a:rPr sz="750" b="0" i="0">
+                <a:solidFill>
+                  <a:srgbClr val="3F3F3F"/>
+                </a:solidFill>
+                <a:latin typeface="Segoe UI"/>
+              </a:rPr>
+              <a:t>iQube</a:t>
             </a:r>
           </a:p>
         </p:txBody>
@@ -9757,8 +9812,8 @@
         </p:nvSpPr>
         <p:spPr>
           <a:xfrm>
-            <a:off x="9897872" y="3859954"/>
-            <a:ext cx="1882648" cy="154122"/>
+            <a:off x="9897872" y="3904928"/>
+            <a:ext cx="1882648" cy="157289"/>
           </a:xfrm>
           <a:prstGeom prst="rect">
             <a:avLst/>
@@ -9788,14 +9843,14 @@
           </a:fontRef>
         </p:style>
         <p:txBody>
-          <a:bodyPr rtlCol="0" anchor="ctr" wrap="none" lIns="0" rIns="0" tIns="0" bIns="0">
+          <a:bodyPr rtlCol="0" anchor="ctr" wrap="none" lIns="22860" rIns="22860" tIns="0" bIns="0">
             <a:noAutofit/>
           </a:bodyPr>
           <a:lstStyle/>
           <a:p>
             <a:pPr algn="l">
               <a:lnSpc>
-                <a:spcPts val="997"/>
+                <a:spcPts val="1022"/>
               </a:lnSpc>
               <a:spcBef>
                 <a:spcPts val="0"/>
@@ -9824,8 +9879,8 @@
         </p:nvSpPr>
         <p:spPr>
           <a:xfrm>
-            <a:off x="8015224" y="4014076"/>
-            <a:ext cx="1882648" cy="154122"/>
+            <a:off x="8015224" y="4062217"/>
+            <a:ext cx="1882648" cy="157289"/>
           </a:xfrm>
           <a:prstGeom prst="rect">
             <a:avLst/>
@@ -9855,14 +9910,14 @@
           </a:fontRef>
         </p:style>
         <p:txBody>
-          <a:bodyPr rtlCol="0" anchor="ctr" wrap="none" lIns="0" rIns="0" tIns="0" bIns="0">
+          <a:bodyPr rtlCol="0" anchor="ctr" wrap="none" lIns="22860" rIns="22860" tIns="0" bIns="0">
             <a:noAutofit/>
           </a:bodyPr>
           <a:lstStyle/>
           <a:p>
             <a:pPr algn="l">
               <a:lnSpc>
-                <a:spcPts val="997"/>
+                <a:spcPts val="1022"/>
               </a:lnSpc>
               <a:spcBef>
                 <a:spcPts val="0"/>
@@ -9891,8 +9946,8 @@
         </p:nvSpPr>
         <p:spPr>
           <a:xfrm>
-            <a:off x="9897872" y="4014076"/>
-            <a:ext cx="1882648" cy="154122"/>
+            <a:off x="9897872" y="4062217"/>
+            <a:ext cx="1882648" cy="157289"/>
           </a:xfrm>
           <a:prstGeom prst="rect">
             <a:avLst/>
@@ -9922,14 +9977,14 @@
           </a:fontRef>
         </p:style>
         <p:txBody>
-          <a:bodyPr rtlCol="0" anchor="ctr" wrap="none" lIns="0" rIns="0" tIns="0" bIns="0">
+          <a:bodyPr rtlCol="0" anchor="ctr" wrap="none" lIns="22860" rIns="22860" tIns="0" bIns="0">
             <a:noAutofit/>
           </a:bodyPr>
           <a:lstStyle/>
           <a:p>
             <a:pPr algn="l">
               <a:lnSpc>
-                <a:spcPts val="997"/>
+                <a:spcPts val="1022"/>
               </a:lnSpc>
               <a:spcBef>
                 <a:spcPts val="0"/>
@@ -9959,7 +10014,7 @@
         <p:spPr>
           <a:xfrm>
             <a:off x="4195064" y="1691640"/>
-            <a:ext cx="0" cy="2784802"/>
+            <a:ext cx="0" cy="2842444"/>
           </a:xfrm>
           <a:prstGeom prst="line">
             <a:avLst/>
@@ -9995,7 +10050,7 @@
         <p:spPr>
           <a:xfrm>
             <a:off x="7996936" y="1691640"/>
-            <a:ext cx="0" cy="2784802"/>
+            <a:ext cx="0" cy="2842444"/>
           </a:xfrm>
           <a:prstGeom prst="line">
             <a:avLst/>
@@ -10030,7 +10085,7 @@
         </p:nvSpPr>
         <p:spPr>
           <a:xfrm>
-            <a:off x="411480" y="5341422"/>
+            <a:off x="411480" y="5338255"/>
             <a:ext cx="11369040" cy="822960"/>
           </a:xfrm>
           <a:prstGeom prst="rect">
@@ -10076,7 +10131,7 @@
         </p:nvSpPr>
         <p:spPr>
           <a:xfrm>
-            <a:off x="502920" y="5341422"/>
+            <a:off x="502920" y="5338255"/>
             <a:ext cx="2741676" cy="822960"/>
           </a:xfrm>
           <a:prstGeom prst="rect">
@@ -10092,7 +10147,7 @@
           <a:p>
             <a:pPr algn="ctr">
               <a:lnSpc>
-                <a:spcPts val="1197"/>
+                <a:spcPts val="1227"/>
               </a:lnSpc>
               <a:spcBef>
                 <a:spcPts val="0"/>
@@ -10148,7 +10203,7 @@
         </p:nvSpPr>
         <p:spPr>
           <a:xfrm>
-            <a:off x="3317748" y="5341422"/>
+            <a:off x="3317748" y="5338255"/>
             <a:ext cx="2741676" cy="822960"/>
           </a:xfrm>
           <a:prstGeom prst="rect">
@@ -10164,7 +10219,7 @@
           <a:p>
             <a:pPr algn="ctr">
               <a:lnSpc>
-                <a:spcPts val="1197"/>
+                <a:spcPts val="1227"/>
               </a:lnSpc>
               <a:spcBef>
                 <a:spcPts val="0"/>
@@ -10238,7 +10293,7 @@
         </p:nvSpPr>
         <p:spPr>
           <a:xfrm>
-            <a:off x="6132576" y="5341422"/>
+            <a:off x="6132576" y="5338255"/>
             <a:ext cx="2741676" cy="822960"/>
           </a:xfrm>
           <a:prstGeom prst="rect">
@@ -10254,7 +10309,7 @@
           <a:p>
             <a:pPr algn="ctr">
               <a:lnSpc>
-                <a:spcPts val="1197"/>
+                <a:spcPts val="1227"/>
               </a:lnSpc>
               <a:spcBef>
                 <a:spcPts val="0"/>
@@ -10330,7 +10385,7 @@
           <a:p>
             <a:pPr algn="ctr">
               <a:lnSpc>
-                <a:spcPts val="1197"/>
+                <a:spcPts val="1227"/>
               </a:lnSpc>
               <a:spcBef>
                 <a:spcPts val="0"/>
@@ -10359,7 +10414,7 @@
         </p:nvSpPr>
         <p:spPr>
           <a:xfrm>
-            <a:off x="8947404" y="5341422"/>
+            <a:off x="8947404" y="5338255"/>
             <a:ext cx="2741676" cy="822960"/>
           </a:xfrm>
           <a:prstGeom prst="rect">
@@ -10375,7 +10430,7 @@
           <a:p>
             <a:pPr algn="ctr">
               <a:lnSpc>
-                <a:spcPts val="1197"/>
+                <a:spcPts val="1227"/>
               </a:lnSpc>
               <a:spcBef>
                 <a:spcPts val="0"/>
@@ -10460,7 +10515,7 @@
           <a:p>
             <a:pPr algn="ctr">
               <a:lnSpc>
-                <a:spcPts val="1197"/>
+                <a:spcPts val="1227"/>
               </a:lnSpc>
               <a:spcBef>
                 <a:spcPts val="0"/>
@@ -10516,7 +10571,7 @@
         </p:nvCxnSpPr>
         <p:spPr>
           <a:xfrm>
-            <a:off x="3281172" y="5387142"/>
+            <a:off x="3281172" y="5383975"/>
             <a:ext cx="0" cy="731520"/>
           </a:xfrm>
           <a:prstGeom prst="line">
@@ -10551,7 +10606,7 @@
         </p:nvCxnSpPr>
         <p:spPr>
           <a:xfrm>
-            <a:off x="6096000" y="5387142"/>
+            <a:off x="6096000" y="5383975"/>
             <a:ext cx="0" cy="731520"/>
           </a:xfrm>
           <a:prstGeom prst="line">
@@ -10586,7 +10641,7 @@
         </p:nvCxnSpPr>
         <p:spPr>
           <a:xfrm>
-            <a:off x="8910828" y="5387142"/>
+            <a:off x="8910828" y="5383975"/>
             <a:ext cx="0" cy="731520"/>
           </a:xfrm>
           <a:prstGeom prst="line">
@@ -10621,7 +10676,7 @@
         </p:nvSpPr>
         <p:spPr>
           <a:xfrm>
-            <a:off x="5699348" y="5286558"/>
+            <a:off x="5699348" y="5283391"/>
             <a:ext cx="793304" cy="109728"/>
           </a:xfrm>
           <a:prstGeom prst="roundRect">
@@ -10685,8 +10740,8 @@
         </p:nvSpPr>
         <p:spPr>
           <a:xfrm>
-            <a:off x="411480" y="6210102"/>
-            <a:ext cx="11369040" cy="126690"/>
+            <a:off x="411480" y="6206935"/>
+            <a:ext cx="11369040" cy="129857"/>
           </a:xfrm>
           <a:prstGeom prst="rect">
             <a:avLst/>
@@ -10701,7 +10756,7 @@
           <a:p>
             <a:pPr algn="l">
               <a:lnSpc>
-                <a:spcPts val="997"/>
+                <a:spcPts val="1022"/>
               </a:lnSpc>
               <a:spcBef>
                 <a:spcPts val="0"/>
@@ -10842,8 +10897,8 @@
         </p:nvSpPr>
         <p:spPr>
           <a:xfrm>
-            <a:off x="411480" y="398907"/>
-            <a:ext cx="11369040" cy="577206"/>
+            <a:off x="411480" y="274320"/>
+            <a:ext cx="11369040" cy="591636"/>
           </a:xfrm>
           <a:prstGeom prst="rect">
             <a:avLst/>
@@ -10858,7 +10913,7 @@
           <a:p>
             <a:pPr algn="l">
               <a:lnSpc>
-                <a:spcPts val="2272"/>
+                <a:spcPts val="2329"/>
               </a:lnSpc>
               <a:spcBef>
                 <a:spcPts val="0"/>
@@ -10988,7 +11043,7 @@
           <a:p>
             <a:pPr algn="l">
               <a:lnSpc>
-                <a:spcPts val="2272"/>
+                <a:spcPts val="2329"/>
               </a:lnSpc>
               <a:spcBef>
                 <a:spcPts val="0"/>
@@ -11053,8 +11108,8 @@
         </p:nvSpPr>
         <p:spPr>
           <a:xfrm>
-            <a:off x="411480" y="1003545"/>
-            <a:ext cx="11369040" cy="152028"/>
+            <a:off x="411480" y="893388"/>
+            <a:ext cx="11369040" cy="155829"/>
           </a:xfrm>
           <a:prstGeom prst="rect">
             <a:avLst/>
@@ -11069,7 +11124,7 @@
           <a:p>
             <a:pPr algn="l">
               <a:lnSpc>
-                <a:spcPts val="1197"/>
+                <a:spcPts val="1227"/>
               </a:lnSpc>
               <a:spcBef>
                 <a:spcPts val="0"/>
@@ -11261,7 +11316,7 @@
         <p:spPr>
           <a:xfrm>
             <a:off x="8884006" y="1691640"/>
-            <a:ext cx="2896514" cy="236488"/>
+            <a:ext cx="2896514" cy="242400"/>
           </a:xfrm>
           <a:prstGeom prst="rect">
             <a:avLst/>
@@ -11276,7 +11331,7 @@
           <a:p>
             <a:pPr algn="l">
               <a:lnSpc>
-                <a:spcPts val="1862"/>
+                <a:spcPts val="1908"/>
               </a:lnSpc>
               <a:spcBef>
                 <a:spcPts val="0"/>
@@ -11314,8 +11369,8 @@
         </p:nvSpPr>
         <p:spPr>
           <a:xfrm>
-            <a:off x="8884006" y="2074432"/>
-            <a:ext cx="109728" cy="152028"/>
+            <a:off x="8884006" y="2080344"/>
+            <a:ext cx="109728" cy="155829"/>
           </a:xfrm>
           <a:prstGeom prst="rect">
             <a:avLst/>
@@ -11330,7 +11385,7 @@
           <a:p>
             <a:pPr algn="l">
               <a:lnSpc>
-                <a:spcPts val="1197"/>
+                <a:spcPts val="1227"/>
               </a:lnSpc>
               <a:spcBef>
                 <a:spcPts val="0"/>
@@ -11359,8 +11414,8 @@
         </p:nvSpPr>
         <p:spPr>
           <a:xfrm>
-            <a:off x="8993734" y="2074432"/>
-            <a:ext cx="2786786" cy="456084"/>
+            <a:off x="8993734" y="2080344"/>
+            <a:ext cx="2786786" cy="467487"/>
           </a:xfrm>
           <a:prstGeom prst="rect">
             <a:avLst/>
@@ -11375,7 +11430,7 @@
           <a:p>
             <a:pPr algn="l">
               <a:lnSpc>
-                <a:spcPts val="1197"/>
+                <a:spcPts val="1227"/>
               </a:lnSpc>
               <a:spcBef>
                 <a:spcPts val="0"/>
@@ -11460,7 +11515,7 @@
           <a:p>
             <a:pPr algn="l">
               <a:lnSpc>
-                <a:spcPts val="1197"/>
+                <a:spcPts val="1227"/>
               </a:lnSpc>
               <a:spcBef>
                 <a:spcPts val="0"/>
@@ -11545,7 +11600,7 @@
           <a:p>
             <a:pPr algn="l">
               <a:lnSpc>
-                <a:spcPts val="1197"/>
+                <a:spcPts val="1227"/>
               </a:lnSpc>
               <a:spcBef>
                 <a:spcPts val="0"/>
@@ -11628,8 +11683,8 @@
         </p:nvSpPr>
         <p:spPr>
           <a:xfrm>
-            <a:off x="8884006" y="2562520"/>
-            <a:ext cx="109728" cy="152028"/>
+            <a:off x="8884006" y="2579835"/>
+            <a:ext cx="109728" cy="155829"/>
           </a:xfrm>
           <a:prstGeom prst="rect">
             <a:avLst/>
@@ -11644,7 +11699,7 @@
           <a:p>
             <a:pPr algn="l">
               <a:lnSpc>
-                <a:spcPts val="1197"/>
+                <a:spcPts val="1227"/>
               </a:lnSpc>
               <a:spcBef>
                 <a:spcPts val="0"/>
@@ -11673,8 +11728,8 @@
         </p:nvSpPr>
         <p:spPr>
           <a:xfrm>
-            <a:off x="8993734" y="2562520"/>
-            <a:ext cx="2786786" cy="608112"/>
+            <a:off x="8993734" y="2579835"/>
+            <a:ext cx="2786786" cy="623316"/>
           </a:xfrm>
           <a:prstGeom prst="rect">
             <a:avLst/>
@@ -11689,7 +11744,7 @@
           <a:p>
             <a:pPr algn="l">
               <a:lnSpc>
-                <a:spcPts val="1197"/>
+                <a:spcPts val="1227"/>
               </a:lnSpc>
               <a:spcBef>
                 <a:spcPts val="0"/>
@@ -11792,7 +11847,7 @@
           <a:p>
             <a:pPr algn="l">
               <a:lnSpc>
-                <a:spcPts val="1197"/>
+                <a:spcPts val="1227"/>
               </a:lnSpc>
               <a:spcBef>
                 <a:spcPts val="0"/>
@@ -11877,7 +11932,7 @@
           <a:p>
             <a:pPr algn="l">
               <a:lnSpc>
-                <a:spcPts val="1197"/>
+                <a:spcPts val="1227"/>
               </a:lnSpc>
               <a:spcBef>
                 <a:spcPts val="0"/>
@@ -11962,7 +12017,7 @@
           <a:p>
             <a:pPr algn="l">
               <a:lnSpc>
-                <a:spcPts val="1197"/>
+                <a:spcPts val="1227"/>
               </a:lnSpc>
               <a:spcBef>
                 <a:spcPts val="0"/>
@@ -11991,8 +12046,8 @@
         </p:nvSpPr>
         <p:spPr>
           <a:xfrm>
-            <a:off x="8884006" y="3202636"/>
-            <a:ext cx="109728" cy="152028"/>
+            <a:off x="8884006" y="3235155"/>
+            <a:ext cx="109728" cy="155829"/>
           </a:xfrm>
           <a:prstGeom prst="rect">
             <a:avLst/>
@@ -12007,7 +12062,7 @@
           <a:p>
             <a:pPr algn="l">
               <a:lnSpc>
-                <a:spcPts val="1197"/>
+                <a:spcPts val="1227"/>
               </a:lnSpc>
               <a:spcBef>
                 <a:spcPts val="0"/>
@@ -12036,8 +12091,8 @@
         </p:nvSpPr>
         <p:spPr>
           <a:xfrm>
-            <a:off x="8993734" y="3202636"/>
-            <a:ext cx="2786786" cy="456084"/>
+            <a:off x="8993734" y="3235155"/>
+            <a:ext cx="2786786" cy="467487"/>
           </a:xfrm>
           <a:prstGeom prst="rect">
             <a:avLst/>
@@ -12052,7 +12107,7 @@
           <a:p>
             <a:pPr algn="l">
               <a:lnSpc>
-                <a:spcPts val="1197"/>
+                <a:spcPts val="1227"/>
               </a:lnSpc>
               <a:spcBef>
                 <a:spcPts val="0"/>
@@ -12155,7 +12210,7 @@
           <a:p>
             <a:pPr algn="l">
               <a:lnSpc>
-                <a:spcPts val="1197"/>
+                <a:spcPts val="1227"/>
               </a:lnSpc>
               <a:spcBef>
                 <a:spcPts val="0"/>
@@ -12231,7 +12286,7 @@
           <a:p>
             <a:pPr algn="l">
               <a:lnSpc>
-                <a:spcPts val="1197"/>
+                <a:spcPts val="1227"/>
               </a:lnSpc>
               <a:spcBef>
                 <a:spcPts val="0"/>
@@ -12306,7 +12361,7 @@
         <p:spPr>
           <a:xfrm>
             <a:off x="411480" y="1691640"/>
-            <a:ext cx="236119" cy="144978"/>
+            <a:ext cx="236119" cy="148145"/>
           </a:xfrm>
           <a:prstGeom prst="roundRect">
             <a:avLst>
@@ -12343,7 +12398,7 @@
           <a:p>
             <a:pPr algn="ctr">
               <a:lnSpc>
-                <a:spcPts val="997"/>
+                <a:spcPts val="1022"/>
               </a:lnSpc>
               <a:spcBef>
                 <a:spcPts val="0"/>
@@ -12373,7 +12428,7 @@
         <p:spPr>
           <a:xfrm>
             <a:off x="675031" y="1691640"/>
-            <a:ext cx="375336" cy="144978"/>
+            <a:ext cx="375336" cy="148145"/>
           </a:xfrm>
           <a:prstGeom prst="rect">
             <a:avLst/>
@@ -12388,7 +12443,7 @@
           <a:p>
             <a:pPr algn="l">
               <a:lnSpc>
-                <a:spcPts val="997"/>
+                <a:spcPts val="1022"/>
               </a:lnSpc>
               <a:spcBef>
                 <a:spcPts val="0"/>
@@ -12418,7 +12473,7 @@
         <p:spPr>
           <a:xfrm>
             <a:off x="1105231" y="1691640"/>
-            <a:ext cx="142032" cy="144978"/>
+            <a:ext cx="142032" cy="148145"/>
           </a:xfrm>
           <a:prstGeom prst="roundRect">
             <a:avLst>
@@ -12455,7 +12510,7 @@
           <a:p>
             <a:pPr algn="ctr">
               <a:lnSpc>
-                <a:spcPts val="997"/>
+                <a:spcPts val="1022"/>
               </a:lnSpc>
               <a:spcBef>
                 <a:spcPts val="0"/>
@@ -12485,7 +12540,7 @@
         <p:spPr>
           <a:xfrm>
             <a:off x="1274695" y="1691640"/>
-            <a:ext cx="233391" cy="144978"/>
+            <a:ext cx="233391" cy="148145"/>
           </a:xfrm>
           <a:prstGeom prst="rect">
             <a:avLst/>
@@ -12500,7 +12555,7 @@
           <a:p>
             <a:pPr algn="l">
               <a:lnSpc>
-                <a:spcPts val="997"/>
+                <a:spcPts val="1022"/>
               </a:lnSpc>
               <a:spcBef>
                 <a:spcPts val="0"/>
@@ -12530,7 +12585,7 @@
         <p:spPr>
           <a:xfrm>
             <a:off x="1562950" y="1691640"/>
-            <a:ext cx="221794" cy="144978"/>
+            <a:ext cx="221794" cy="148145"/>
           </a:xfrm>
           <a:prstGeom prst="roundRect">
             <a:avLst>
@@ -12567,7 +12622,7 @@
           <a:p>
             <a:pPr algn="ctr">
               <a:lnSpc>
-                <a:spcPts val="997"/>
+                <a:spcPts val="1022"/>
               </a:lnSpc>
               <a:spcBef>
                 <a:spcPts val="0"/>
@@ -12597,7 +12652,7 @@
         <p:spPr>
           <a:xfrm>
             <a:off x="1812176" y="1691640"/>
-            <a:ext cx="566627" cy="144978"/>
+            <a:ext cx="566627" cy="148145"/>
           </a:xfrm>
           <a:prstGeom prst="rect">
             <a:avLst/>
@@ -12612,7 +12667,7 @@
           <a:p>
             <a:pPr algn="l">
               <a:lnSpc>
-                <a:spcPts val="997"/>
+                <a:spcPts val="1022"/>
               </a:lnSpc>
               <a:spcBef>
                 <a:spcPts val="0"/>
@@ -12642,7 +12697,7 @@
         <p:spPr>
           <a:xfrm>
             <a:off x="2433667" y="1691640"/>
-            <a:ext cx="178773" cy="144978"/>
+            <a:ext cx="178773" cy="148145"/>
           </a:xfrm>
           <a:prstGeom prst="roundRect">
             <a:avLst>
@@ -12679,7 +12734,7 @@
           <a:p>
             <a:pPr algn="ctr">
               <a:lnSpc>
-                <a:spcPts val="997"/>
+                <a:spcPts val="1022"/>
               </a:lnSpc>
               <a:spcBef>
                 <a:spcPts val="0"/>
@@ -12709,7 +12764,7 @@
         <p:spPr>
           <a:xfrm>
             <a:off x="2639872" y="1691640"/>
-            <a:ext cx="327571" cy="144978"/>
+            <a:ext cx="327571" cy="148145"/>
           </a:xfrm>
           <a:prstGeom prst="rect">
             <a:avLst/>
@@ -12724,7 +12779,7 @@
           <a:p>
             <a:pPr algn="l">
               <a:lnSpc>
-                <a:spcPts val="997"/>
+                <a:spcPts val="1022"/>
               </a:lnSpc>
               <a:spcBef>
                 <a:spcPts val="0"/>
@@ -12753,8 +12808,8 @@
         </p:nvSpPr>
         <p:spPr>
           <a:xfrm>
-            <a:off x="411480" y="1982922"/>
-            <a:ext cx="1978542" cy="163266"/>
+            <a:off x="411480" y="1986089"/>
+            <a:ext cx="1978542" cy="166433"/>
           </a:xfrm>
           <a:prstGeom prst="rect">
             <a:avLst/>
@@ -12791,7 +12846,7 @@
           <a:p>
             <a:pPr algn="ctr">
               <a:lnSpc>
-                <a:spcPts val="997"/>
+                <a:spcPts val="1022"/>
               </a:lnSpc>
               <a:spcBef>
                 <a:spcPts val="0"/>
@@ -12820,8 +12875,8 @@
         </p:nvSpPr>
         <p:spPr>
           <a:xfrm>
-            <a:off x="2390022" y="1982922"/>
-            <a:ext cx="1813664" cy="163266"/>
+            <a:off x="2390022" y="1986089"/>
+            <a:ext cx="1813664" cy="166433"/>
           </a:xfrm>
           <a:prstGeom prst="rect">
             <a:avLst/>
@@ -12858,7 +12913,7 @@
           <a:p>
             <a:pPr algn="ctr">
               <a:lnSpc>
-                <a:spcPts val="997"/>
+                <a:spcPts val="1022"/>
               </a:lnSpc>
               <a:spcBef>
                 <a:spcPts val="0"/>
@@ -12887,8 +12942,8 @@
         </p:nvSpPr>
         <p:spPr>
           <a:xfrm>
-            <a:off x="4203686" y="1982922"/>
-            <a:ext cx="1319028" cy="163266"/>
+            <a:off x="4203686" y="1986089"/>
+            <a:ext cx="1319028" cy="166433"/>
           </a:xfrm>
           <a:prstGeom prst="rect">
             <a:avLst/>
@@ -12925,7 +12980,7 @@
           <a:p>
             <a:pPr algn="ctr">
               <a:lnSpc>
-                <a:spcPts val="997"/>
+                <a:spcPts val="1022"/>
               </a:lnSpc>
               <a:spcBef>
                 <a:spcPts val="0"/>
@@ -12954,8 +13009,8 @@
         </p:nvSpPr>
         <p:spPr>
           <a:xfrm>
-            <a:off x="5522714" y="1982922"/>
-            <a:ext cx="1154150" cy="163266"/>
+            <a:off x="5522714" y="1986089"/>
+            <a:ext cx="1154150" cy="166433"/>
           </a:xfrm>
           <a:prstGeom prst="rect">
             <a:avLst/>
@@ -12992,7 +13047,7 @@
           <a:p>
             <a:pPr algn="ctr">
               <a:lnSpc>
-                <a:spcPts val="997"/>
+                <a:spcPts val="1022"/>
               </a:lnSpc>
               <a:spcBef>
                 <a:spcPts val="0"/>
@@ -13021,8 +13076,8 @@
         </p:nvSpPr>
         <p:spPr>
           <a:xfrm>
-            <a:off x="6676864" y="1982922"/>
-            <a:ext cx="989271" cy="163266"/>
+            <a:off x="6676864" y="1986089"/>
+            <a:ext cx="989271" cy="166433"/>
           </a:xfrm>
           <a:prstGeom prst="rect">
             <a:avLst/>
@@ -13059,7 +13114,7 @@
           <a:p>
             <a:pPr algn="ctr">
               <a:lnSpc>
-                <a:spcPts val="997"/>
+                <a:spcPts val="1022"/>
               </a:lnSpc>
               <a:spcBef>
                 <a:spcPts val="0"/>
@@ -13088,8 +13143,8 @@
         </p:nvSpPr>
         <p:spPr>
           <a:xfrm>
-            <a:off x="7666135" y="1982922"/>
-            <a:ext cx="989271" cy="163266"/>
+            <a:off x="7666135" y="1986089"/>
+            <a:ext cx="989271" cy="166433"/>
           </a:xfrm>
           <a:prstGeom prst="rect">
             <a:avLst/>
@@ -13126,7 +13181,7 @@
           <a:p>
             <a:pPr algn="ctr">
               <a:lnSpc>
-                <a:spcPts val="997"/>
+                <a:spcPts val="1022"/>
               </a:lnSpc>
               <a:spcBef>
                 <a:spcPts val="0"/>
@@ -13155,8 +13210,8 @@
         </p:nvSpPr>
         <p:spPr>
           <a:xfrm>
-            <a:off x="411480" y="2146188"/>
-            <a:ext cx="1978542" cy="761730"/>
+            <a:off x="411480" y="2152522"/>
+            <a:ext cx="1978542" cy="776934"/>
           </a:xfrm>
           <a:prstGeom prst="rect">
             <a:avLst/>
@@ -13193,7 +13248,7 @@
           <a:p>
             <a:pPr algn="l">
               <a:lnSpc>
-                <a:spcPts val="997"/>
+                <a:spcPts val="1022"/>
               </a:lnSpc>
               <a:spcBef>
                 <a:spcPts val="0"/>
@@ -13231,8 +13286,8 @@
         </p:nvSpPr>
         <p:spPr>
           <a:xfrm>
-            <a:off x="2390022" y="2146188"/>
-            <a:ext cx="1813664" cy="253910"/>
+            <a:off x="2390022" y="2152522"/>
+            <a:ext cx="1813664" cy="258978"/>
           </a:xfrm>
           <a:prstGeom prst="rect">
             <a:avLst/>
@@ -13269,7 +13324,7 @@
           <a:p>
             <a:pPr algn="l">
               <a:lnSpc>
-                <a:spcPts val="997"/>
+                <a:spcPts val="1022"/>
               </a:lnSpc>
               <a:spcBef>
                 <a:spcPts val="0"/>
@@ -13307,8 +13362,8 @@
         </p:nvSpPr>
         <p:spPr>
           <a:xfrm>
-            <a:off x="4203686" y="2146188"/>
-            <a:ext cx="1319028" cy="253910"/>
+            <a:off x="4203686" y="2152522"/>
+            <a:ext cx="1319028" cy="258978"/>
           </a:xfrm>
           <a:prstGeom prst="rect">
             <a:avLst/>
@@ -13345,7 +13400,7 @@
           <a:p>
             <a:pPr algn="r">
               <a:lnSpc>
-                <a:spcPts val="997"/>
+                <a:spcPts val="1022"/>
               </a:lnSpc>
               <a:spcBef>
                 <a:spcPts val="0"/>
@@ -13383,8 +13438,8 @@
         </p:nvSpPr>
         <p:spPr>
           <a:xfrm>
-            <a:off x="5522714" y="2146188"/>
-            <a:ext cx="1154150" cy="253910"/>
+            <a:off x="5522714" y="2152522"/>
+            <a:ext cx="1154150" cy="258978"/>
           </a:xfrm>
           <a:prstGeom prst="rect">
             <a:avLst/>
@@ -13421,7 +13476,7 @@
           <a:p>
             <a:pPr algn="r">
               <a:lnSpc>
-                <a:spcPts val="997"/>
+                <a:spcPts val="1022"/>
               </a:lnSpc>
               <a:spcBef>
                 <a:spcPts val="0"/>
@@ -13459,8 +13514,8 @@
         </p:nvSpPr>
         <p:spPr>
           <a:xfrm>
-            <a:off x="6676864" y="2146188"/>
-            <a:ext cx="989271" cy="253910"/>
+            <a:off x="6676864" y="2152522"/>
+            <a:ext cx="989271" cy="258978"/>
           </a:xfrm>
           <a:prstGeom prst="rect">
             <a:avLst/>
@@ -13497,7 +13552,7 @@
           <a:p>
             <a:pPr algn="ctr">
               <a:lnSpc>
-                <a:spcPts val="997"/>
+                <a:spcPts val="1022"/>
               </a:lnSpc>
               <a:spcBef>
                 <a:spcPts val="0"/>
@@ -13526,8 +13581,8 @@
         </p:nvSpPr>
         <p:spPr>
           <a:xfrm>
-            <a:off x="7666135" y="2146188"/>
-            <a:ext cx="989271" cy="253910"/>
+            <a:off x="7666135" y="2152522"/>
+            <a:ext cx="989271" cy="258978"/>
           </a:xfrm>
           <a:prstGeom prst="rect">
             <a:avLst/>
@@ -13564,7 +13619,7 @@
           <a:p>
             <a:pPr algn="ctr">
               <a:lnSpc>
-                <a:spcPts val="997"/>
+                <a:spcPts val="1022"/>
               </a:lnSpc>
               <a:spcBef>
                 <a:spcPts val="0"/>
@@ -13593,8 +13648,8 @@
         </p:nvSpPr>
         <p:spPr>
           <a:xfrm>
-            <a:off x="2390022" y="2400098"/>
-            <a:ext cx="1813664" cy="253910"/>
+            <a:off x="2390022" y="2411500"/>
+            <a:ext cx="1813664" cy="258978"/>
           </a:xfrm>
           <a:prstGeom prst="rect">
             <a:avLst/>
@@ -13631,7 +13686,7 @@
           <a:p>
             <a:pPr algn="l">
               <a:lnSpc>
-                <a:spcPts val="997"/>
+                <a:spcPts val="1022"/>
               </a:lnSpc>
               <a:spcBef>
                 <a:spcPts val="0"/>
@@ -13669,8 +13724,8 @@
         </p:nvSpPr>
         <p:spPr>
           <a:xfrm>
-            <a:off x="4203686" y="2400098"/>
-            <a:ext cx="1319028" cy="253910"/>
+            <a:off x="4203686" y="2411500"/>
+            <a:ext cx="1319028" cy="258978"/>
           </a:xfrm>
           <a:prstGeom prst="rect">
             <a:avLst/>
@@ -13707,7 +13762,7 @@
           <a:p>
             <a:pPr algn="r">
               <a:lnSpc>
-                <a:spcPts val="997"/>
+                <a:spcPts val="1022"/>
               </a:lnSpc>
               <a:spcBef>
                 <a:spcPts val="0"/>
@@ -13745,8 +13800,8 @@
         </p:nvSpPr>
         <p:spPr>
           <a:xfrm>
-            <a:off x="5522714" y="2400098"/>
-            <a:ext cx="1154150" cy="253910"/>
+            <a:off x="5522714" y="2411500"/>
+            <a:ext cx="1154150" cy="258978"/>
           </a:xfrm>
           <a:prstGeom prst="rect">
             <a:avLst/>
@@ -13783,7 +13838,7 @@
           <a:p>
             <a:pPr algn="r">
               <a:lnSpc>
-                <a:spcPts val="997"/>
+                <a:spcPts val="1022"/>
               </a:lnSpc>
               <a:spcBef>
                 <a:spcPts val="0"/>
@@ -13821,8 +13876,8 @@
         </p:nvSpPr>
         <p:spPr>
           <a:xfrm>
-            <a:off x="6676864" y="2400098"/>
-            <a:ext cx="989271" cy="253910"/>
+            <a:off x="6676864" y="2411500"/>
+            <a:ext cx="989271" cy="258978"/>
           </a:xfrm>
           <a:prstGeom prst="rect">
             <a:avLst/>
@@ -13859,7 +13914,7 @@
           <a:p>
             <a:pPr algn="ctr">
               <a:lnSpc>
-                <a:spcPts val="997"/>
+                <a:spcPts val="1022"/>
               </a:lnSpc>
               <a:spcBef>
                 <a:spcPts val="0"/>
@@ -13888,8 +13943,8 @@
         </p:nvSpPr>
         <p:spPr>
           <a:xfrm>
-            <a:off x="7666135" y="2400098"/>
-            <a:ext cx="989271" cy="253910"/>
+            <a:off x="7666135" y="2411500"/>
+            <a:ext cx="989271" cy="258978"/>
           </a:xfrm>
           <a:prstGeom prst="rect">
             <a:avLst/>
@@ -13926,7 +13981,7 @@
           <a:p>
             <a:pPr algn="ctr">
               <a:lnSpc>
-                <a:spcPts val="997"/>
+                <a:spcPts val="1022"/>
               </a:lnSpc>
               <a:spcBef>
                 <a:spcPts val="0"/>
@@ -13955,8 +14010,8 @@
         </p:nvSpPr>
         <p:spPr>
           <a:xfrm>
-            <a:off x="2390022" y="2654008"/>
-            <a:ext cx="1813664" cy="253910"/>
+            <a:off x="2390022" y="2670478"/>
+            <a:ext cx="1813664" cy="258978"/>
           </a:xfrm>
           <a:prstGeom prst="rect">
             <a:avLst/>
@@ -13993,7 +14048,7 @@
           <a:p>
             <a:pPr algn="l">
               <a:lnSpc>
-                <a:spcPts val="997"/>
+                <a:spcPts val="1022"/>
               </a:lnSpc>
               <a:spcBef>
                 <a:spcPts val="0"/>
@@ -14031,8 +14086,8 @@
         </p:nvSpPr>
         <p:spPr>
           <a:xfrm>
-            <a:off x="4203686" y="2654008"/>
-            <a:ext cx="1319028" cy="253910"/>
+            <a:off x="4203686" y="2670478"/>
+            <a:ext cx="1319028" cy="258978"/>
           </a:xfrm>
           <a:prstGeom prst="rect">
             <a:avLst/>
@@ -14069,7 +14124,7 @@
           <a:p>
             <a:pPr algn="r">
               <a:lnSpc>
-                <a:spcPts val="997"/>
+                <a:spcPts val="1022"/>
               </a:lnSpc>
               <a:spcBef>
                 <a:spcPts val="0"/>
@@ -14107,8 +14162,8 @@
         </p:nvSpPr>
         <p:spPr>
           <a:xfrm>
-            <a:off x="5522714" y="2654008"/>
-            <a:ext cx="1154150" cy="253910"/>
+            <a:off x="5522714" y="2670478"/>
+            <a:ext cx="1154150" cy="258978"/>
           </a:xfrm>
           <a:prstGeom prst="rect">
             <a:avLst/>
@@ -14145,7 +14200,7 @@
           <a:p>
             <a:pPr algn="r">
               <a:lnSpc>
-                <a:spcPts val="997"/>
+                <a:spcPts val="1022"/>
               </a:lnSpc>
               <a:spcBef>
                 <a:spcPts val="0"/>
@@ -14183,8 +14238,8 @@
         </p:nvSpPr>
         <p:spPr>
           <a:xfrm>
-            <a:off x="6676864" y="2654008"/>
-            <a:ext cx="989271" cy="253910"/>
+            <a:off x="6676864" y="2670478"/>
+            <a:ext cx="989271" cy="258978"/>
           </a:xfrm>
           <a:prstGeom prst="rect">
             <a:avLst/>
@@ -14221,7 +14276,7 @@
           <a:p>
             <a:pPr algn="ctr">
               <a:lnSpc>
-                <a:spcPts val="997"/>
+                <a:spcPts val="1022"/>
               </a:lnSpc>
               <a:spcBef>
                 <a:spcPts val="0"/>
@@ -14250,8 +14305,8 @@
         </p:nvSpPr>
         <p:spPr>
           <a:xfrm>
-            <a:off x="7666135" y="2654008"/>
-            <a:ext cx="989271" cy="253910"/>
+            <a:off x="7666135" y="2670478"/>
+            <a:ext cx="989271" cy="258978"/>
           </a:xfrm>
           <a:prstGeom prst="rect">
             <a:avLst/>
@@ -14288,7 +14343,7 @@
           <a:p>
             <a:pPr algn="ctr">
               <a:lnSpc>
-                <a:spcPts val="997"/>
+                <a:spcPts val="1022"/>
               </a:lnSpc>
               <a:spcBef>
                 <a:spcPts val="0"/>
@@ -14317,8 +14372,8 @@
         </p:nvSpPr>
         <p:spPr>
           <a:xfrm>
-            <a:off x="411480" y="2907918"/>
-            <a:ext cx="1978542" cy="761730"/>
+            <a:off x="411480" y="2929456"/>
+            <a:ext cx="1978542" cy="776934"/>
           </a:xfrm>
           <a:prstGeom prst="rect">
             <a:avLst/>
@@ -14355,7 +14410,7 @@
           <a:p>
             <a:pPr algn="l">
               <a:lnSpc>
-                <a:spcPts val="997"/>
+                <a:spcPts val="1022"/>
               </a:lnSpc>
               <a:spcBef>
                 <a:spcPts val="0"/>
@@ -14393,8 +14448,8 @@
         </p:nvSpPr>
         <p:spPr>
           <a:xfrm>
-            <a:off x="2390022" y="2907918"/>
-            <a:ext cx="1813664" cy="253910"/>
+            <a:off x="2390022" y="2929456"/>
+            <a:ext cx="1813664" cy="258978"/>
           </a:xfrm>
           <a:prstGeom prst="rect">
             <a:avLst/>
@@ -14431,7 +14486,7 @@
           <a:p>
             <a:pPr algn="l">
               <a:lnSpc>
-                <a:spcPts val="997"/>
+                <a:spcPts val="1022"/>
               </a:lnSpc>
               <a:spcBef>
                 <a:spcPts val="0"/>
@@ -14469,8 +14524,8 @@
         </p:nvSpPr>
         <p:spPr>
           <a:xfrm>
-            <a:off x="4203686" y="2907918"/>
-            <a:ext cx="1319028" cy="253910"/>
+            <a:off x="4203686" y="2929456"/>
+            <a:ext cx="1319028" cy="258978"/>
           </a:xfrm>
           <a:prstGeom prst="rect">
             <a:avLst/>
@@ -14507,7 +14562,7 @@
           <a:p>
             <a:pPr algn="r">
               <a:lnSpc>
-                <a:spcPts val="997"/>
+                <a:spcPts val="1022"/>
               </a:lnSpc>
               <a:spcBef>
                 <a:spcPts val="0"/>
@@ -14545,8 +14600,8 @@
         </p:nvSpPr>
         <p:spPr>
           <a:xfrm>
-            <a:off x="5522714" y="2907918"/>
-            <a:ext cx="1154150" cy="253910"/>
+            <a:off x="5522714" y="2929456"/>
+            <a:ext cx="1154150" cy="258978"/>
           </a:xfrm>
           <a:prstGeom prst="rect">
             <a:avLst/>
@@ -14583,7 +14638,7 @@
           <a:p>
             <a:pPr algn="r">
               <a:lnSpc>
-                <a:spcPts val="997"/>
+                <a:spcPts val="1022"/>
               </a:lnSpc>
               <a:spcBef>
                 <a:spcPts val="0"/>
@@ -14621,8 +14676,8 @@
         </p:nvSpPr>
         <p:spPr>
           <a:xfrm>
-            <a:off x="6676864" y="2907918"/>
-            <a:ext cx="989271" cy="253910"/>
+            <a:off x="6676864" y="2929456"/>
+            <a:ext cx="989271" cy="258978"/>
           </a:xfrm>
           <a:prstGeom prst="rect">
             <a:avLst/>
@@ -14659,7 +14714,7 @@
           <a:p>
             <a:pPr algn="ctr">
               <a:lnSpc>
-                <a:spcPts val="997"/>
+                <a:spcPts val="1022"/>
               </a:lnSpc>
               <a:spcBef>
                 <a:spcPts val="0"/>
@@ -14688,8 +14743,8 @@
         </p:nvSpPr>
         <p:spPr>
           <a:xfrm>
-            <a:off x="7666135" y="2907918"/>
-            <a:ext cx="989271" cy="253910"/>
+            <a:off x="7666135" y="2929456"/>
+            <a:ext cx="989271" cy="258978"/>
           </a:xfrm>
           <a:prstGeom prst="rect">
             <a:avLst/>
@@ -14726,7 +14781,7 @@
           <a:p>
             <a:pPr algn="ctr">
               <a:lnSpc>
-                <a:spcPts val="997"/>
+                <a:spcPts val="1022"/>
               </a:lnSpc>
               <a:spcBef>
                 <a:spcPts val="0"/>
@@ -14755,8 +14810,8 @@
         </p:nvSpPr>
         <p:spPr>
           <a:xfrm>
-            <a:off x="2390022" y="3161828"/>
-            <a:ext cx="1813664" cy="253910"/>
+            <a:off x="2390022" y="3188434"/>
+            <a:ext cx="1813664" cy="258978"/>
           </a:xfrm>
           <a:prstGeom prst="rect">
             <a:avLst/>
@@ -14793,7 +14848,7 @@
           <a:p>
             <a:pPr algn="l">
               <a:lnSpc>
-                <a:spcPts val="997"/>
+                <a:spcPts val="1022"/>
               </a:lnSpc>
               <a:spcBef>
                 <a:spcPts val="0"/>
@@ -14831,8 +14886,8 @@
         </p:nvSpPr>
         <p:spPr>
           <a:xfrm>
-            <a:off x="4203686" y="3161828"/>
-            <a:ext cx="1319028" cy="253910"/>
+            <a:off x="4203686" y="3188434"/>
+            <a:ext cx="1319028" cy="258978"/>
           </a:xfrm>
           <a:prstGeom prst="rect">
             <a:avLst/>
@@ -14869,7 +14924,7 @@
           <a:p>
             <a:pPr algn="r">
               <a:lnSpc>
-                <a:spcPts val="997"/>
+                <a:spcPts val="1022"/>
               </a:lnSpc>
               <a:spcBef>
                 <a:spcPts val="0"/>
@@ -14898,8 +14953,8 @@
         </p:nvSpPr>
         <p:spPr>
           <a:xfrm>
-            <a:off x="5522714" y="3161828"/>
-            <a:ext cx="1154150" cy="253910"/>
+            <a:off x="5522714" y="3188434"/>
+            <a:ext cx="1154150" cy="258978"/>
           </a:xfrm>
           <a:prstGeom prst="rect">
             <a:avLst/>
@@ -14936,7 +14991,7 @@
           <a:p>
             <a:pPr algn="r">
               <a:lnSpc>
-                <a:spcPts val="997"/>
+                <a:spcPts val="1022"/>
               </a:lnSpc>
               <a:spcBef>
                 <a:spcPts val="0"/>
@@ -14974,8 +15029,8 @@
         </p:nvSpPr>
         <p:spPr>
           <a:xfrm>
-            <a:off x="6676864" y="3161828"/>
-            <a:ext cx="989271" cy="253910"/>
+            <a:off x="6676864" y="3188434"/>
+            <a:ext cx="989271" cy="258978"/>
           </a:xfrm>
           <a:prstGeom prst="rect">
             <a:avLst/>
@@ -15012,7 +15067,7 @@
           <a:p>
             <a:pPr algn="ctr">
               <a:lnSpc>
-                <a:spcPts val="997"/>
+                <a:spcPts val="1022"/>
               </a:lnSpc>
               <a:spcBef>
                 <a:spcPts val="0"/>
@@ -15041,8 +15096,8 @@
         </p:nvSpPr>
         <p:spPr>
           <a:xfrm>
-            <a:off x="7666135" y="3161828"/>
-            <a:ext cx="989271" cy="253910"/>
+            <a:off x="7666135" y="3188434"/>
+            <a:ext cx="989271" cy="258978"/>
           </a:xfrm>
           <a:prstGeom prst="rect">
             <a:avLst/>
@@ -15079,7 +15134,7 @@
           <a:p>
             <a:pPr algn="ctr">
               <a:lnSpc>
-                <a:spcPts val="997"/>
+                <a:spcPts val="1022"/>
               </a:lnSpc>
               <a:spcBef>
                 <a:spcPts val="0"/>
@@ -15108,8 +15163,8 @@
         </p:nvSpPr>
         <p:spPr>
           <a:xfrm>
-            <a:off x="2390022" y="3415738"/>
-            <a:ext cx="1813664" cy="253910"/>
+            <a:off x="2390022" y="3447412"/>
+            <a:ext cx="1813664" cy="258978"/>
           </a:xfrm>
           <a:prstGeom prst="rect">
             <a:avLst/>
@@ -15146,7 +15201,7 @@
           <a:p>
             <a:pPr algn="l">
               <a:lnSpc>
-                <a:spcPts val="997"/>
+                <a:spcPts val="1022"/>
               </a:lnSpc>
               <a:spcBef>
                 <a:spcPts val="0"/>
@@ -15184,8 +15239,8 @@
         </p:nvSpPr>
         <p:spPr>
           <a:xfrm>
-            <a:off x="4203686" y="3415738"/>
-            <a:ext cx="1319028" cy="253910"/>
+            <a:off x="4203686" y="3447412"/>
+            <a:ext cx="1319028" cy="258978"/>
           </a:xfrm>
           <a:prstGeom prst="rect">
             <a:avLst/>
@@ -15222,7 +15277,7 @@
           <a:p>
             <a:pPr algn="r">
               <a:lnSpc>
-                <a:spcPts val="997"/>
+                <a:spcPts val="1022"/>
               </a:lnSpc>
               <a:spcBef>
                 <a:spcPts val="0"/>
@@ -15260,8 +15315,8 @@
         </p:nvSpPr>
         <p:spPr>
           <a:xfrm>
-            <a:off x="5522714" y="3415738"/>
-            <a:ext cx="1154150" cy="253910"/>
+            <a:off x="5522714" y="3447412"/>
+            <a:ext cx="1154150" cy="258978"/>
           </a:xfrm>
           <a:prstGeom prst="rect">
             <a:avLst/>
@@ -15298,7 +15353,7 @@
           <a:p>
             <a:pPr algn="r">
               <a:lnSpc>
-                <a:spcPts val="997"/>
+                <a:spcPts val="1022"/>
               </a:lnSpc>
               <a:spcBef>
                 <a:spcPts val="0"/>
@@ -15336,8 +15391,8 @@
         </p:nvSpPr>
         <p:spPr>
           <a:xfrm>
-            <a:off x="6676864" y="3415738"/>
-            <a:ext cx="989271" cy="253910"/>
+            <a:off x="6676864" y="3447412"/>
+            <a:ext cx="989271" cy="258978"/>
           </a:xfrm>
           <a:prstGeom prst="rect">
             <a:avLst/>
@@ -15374,7 +15429,7 @@
           <a:p>
             <a:pPr algn="ctr">
               <a:lnSpc>
-                <a:spcPts val="997"/>
+                <a:spcPts val="1022"/>
               </a:lnSpc>
               <a:spcBef>
                 <a:spcPts val="0"/>
@@ -15403,8 +15458,8 @@
         </p:nvSpPr>
         <p:spPr>
           <a:xfrm>
-            <a:off x="7666135" y="3415738"/>
-            <a:ext cx="989271" cy="253910"/>
+            <a:off x="7666135" y="3447412"/>
+            <a:ext cx="989271" cy="258978"/>
           </a:xfrm>
           <a:prstGeom prst="rect">
             <a:avLst/>
@@ -15441,7 +15496,7 @@
           <a:p>
             <a:pPr algn="ctr">
               <a:lnSpc>
-                <a:spcPts val="997"/>
+                <a:spcPts val="1022"/>
               </a:lnSpc>
               <a:spcBef>
                 <a:spcPts val="0"/>
@@ -15470,8 +15525,8 @@
         </p:nvSpPr>
         <p:spPr>
           <a:xfrm>
-            <a:off x="411480" y="3669648"/>
-            <a:ext cx="1978542" cy="761730"/>
+            <a:off x="411480" y="3706390"/>
+            <a:ext cx="1978542" cy="776934"/>
           </a:xfrm>
           <a:prstGeom prst="rect">
             <a:avLst/>
@@ -15508,7 +15563,7 @@
           <a:p>
             <a:pPr algn="l">
               <a:lnSpc>
-                <a:spcPts val="997"/>
+                <a:spcPts val="1022"/>
               </a:lnSpc>
               <a:spcBef>
                 <a:spcPts val="0"/>
@@ -15546,8 +15601,8 @@
         </p:nvSpPr>
         <p:spPr>
           <a:xfrm>
-            <a:off x="2390022" y="3669648"/>
-            <a:ext cx="1813664" cy="253910"/>
+            <a:off x="2390022" y="3706390"/>
+            <a:ext cx="1813664" cy="258978"/>
           </a:xfrm>
           <a:prstGeom prst="rect">
             <a:avLst/>
@@ -15584,7 +15639,7 @@
           <a:p>
             <a:pPr algn="l">
               <a:lnSpc>
-                <a:spcPts val="997"/>
+                <a:spcPts val="1022"/>
               </a:lnSpc>
               <a:spcBef>
                 <a:spcPts val="0"/>
@@ -15622,8 +15677,8 @@
         </p:nvSpPr>
         <p:spPr>
           <a:xfrm>
-            <a:off x="4203686" y="3669648"/>
-            <a:ext cx="1319028" cy="253910"/>
+            <a:off x="4203686" y="3706390"/>
+            <a:ext cx="1319028" cy="258978"/>
           </a:xfrm>
           <a:prstGeom prst="rect">
             <a:avLst/>
@@ -15660,7 +15715,7 @@
           <a:p>
             <a:pPr algn="r">
               <a:lnSpc>
-                <a:spcPts val="997"/>
+                <a:spcPts val="1022"/>
               </a:lnSpc>
               <a:spcBef>
                 <a:spcPts val="0"/>
@@ -15689,8 +15744,8 @@
         </p:nvSpPr>
         <p:spPr>
           <a:xfrm>
-            <a:off x="5522714" y="3669648"/>
-            <a:ext cx="1154150" cy="253910"/>
+            <a:off x="5522714" y="3706390"/>
+            <a:ext cx="1154150" cy="258978"/>
           </a:xfrm>
           <a:prstGeom prst="rect">
             <a:avLst/>
@@ -15727,7 +15782,7 @@
           <a:p>
             <a:pPr algn="r">
               <a:lnSpc>
-                <a:spcPts val="997"/>
+                <a:spcPts val="1022"/>
               </a:lnSpc>
               <a:spcBef>
                 <a:spcPts val="0"/>
@@ -15765,8 +15820,8 @@
         </p:nvSpPr>
         <p:spPr>
           <a:xfrm>
-            <a:off x="6676864" y="3669648"/>
-            <a:ext cx="989271" cy="253910"/>
+            <a:off x="6676864" y="3706390"/>
+            <a:ext cx="989271" cy="258978"/>
           </a:xfrm>
           <a:prstGeom prst="rect">
             <a:avLst/>
@@ -15803,7 +15858,7 @@
           <a:p>
             <a:pPr algn="ctr">
               <a:lnSpc>
-                <a:spcPts val="997"/>
+                <a:spcPts val="1022"/>
               </a:lnSpc>
               <a:spcBef>
                 <a:spcPts val="0"/>
@@ -15832,8 +15887,8 @@
         </p:nvSpPr>
         <p:spPr>
           <a:xfrm>
-            <a:off x="7666135" y="3669648"/>
-            <a:ext cx="989271" cy="253910"/>
+            <a:off x="7666135" y="3706390"/>
+            <a:ext cx="989271" cy="258978"/>
           </a:xfrm>
           <a:prstGeom prst="rect">
             <a:avLst/>
@@ -15870,7 +15925,7 @@
           <a:p>
             <a:pPr algn="ctr">
               <a:lnSpc>
-                <a:spcPts val="997"/>
+                <a:spcPts val="1022"/>
               </a:lnSpc>
               <a:spcBef>
                 <a:spcPts val="0"/>
@@ -15899,8 +15954,8 @@
         </p:nvSpPr>
         <p:spPr>
           <a:xfrm>
-            <a:off x="2390022" y="3923558"/>
-            <a:ext cx="1813664" cy="253910"/>
+            <a:off x="2390022" y="3965368"/>
+            <a:ext cx="1813664" cy="258978"/>
           </a:xfrm>
           <a:prstGeom prst="rect">
             <a:avLst/>
@@ -15937,7 +15992,7 @@
           <a:p>
             <a:pPr algn="l">
               <a:lnSpc>
-                <a:spcPts val="997"/>
+                <a:spcPts val="1022"/>
               </a:lnSpc>
               <a:spcBef>
                 <a:spcPts val="0"/>
@@ -15975,8 +16030,8 @@
         </p:nvSpPr>
         <p:spPr>
           <a:xfrm>
-            <a:off x="4203686" y="3923558"/>
-            <a:ext cx="1319028" cy="253910"/>
+            <a:off x="4203686" y="3965368"/>
+            <a:ext cx="1319028" cy="258978"/>
           </a:xfrm>
           <a:prstGeom prst="rect">
             <a:avLst/>
@@ -16013,7 +16068,7 @@
           <a:p>
             <a:pPr algn="r">
               <a:lnSpc>
-                <a:spcPts val="997"/>
+                <a:spcPts val="1022"/>
               </a:lnSpc>
               <a:spcBef>
                 <a:spcPts val="0"/>
@@ -16042,8 +16097,8 @@
         </p:nvSpPr>
         <p:spPr>
           <a:xfrm>
-            <a:off x="5522714" y="3923558"/>
-            <a:ext cx="1154150" cy="253910"/>
+            <a:off x="5522714" y="3965368"/>
+            <a:ext cx="1154150" cy="258978"/>
           </a:xfrm>
           <a:prstGeom prst="rect">
             <a:avLst/>
@@ -16080,7 +16135,7 @@
           <a:p>
             <a:pPr algn="r">
               <a:lnSpc>
-                <a:spcPts val="997"/>
+                <a:spcPts val="1022"/>
               </a:lnSpc>
               <a:spcBef>
                 <a:spcPts val="0"/>
@@ -16118,8 +16173,8 @@
         </p:nvSpPr>
         <p:spPr>
           <a:xfrm>
-            <a:off x="6676864" y="3923558"/>
-            <a:ext cx="989271" cy="253910"/>
+            <a:off x="6676864" y="3965368"/>
+            <a:ext cx="989271" cy="258978"/>
           </a:xfrm>
           <a:prstGeom prst="rect">
             <a:avLst/>
@@ -16156,7 +16211,7 @@
           <a:p>
             <a:pPr algn="ctr">
               <a:lnSpc>
-                <a:spcPts val="997"/>
+                <a:spcPts val="1022"/>
               </a:lnSpc>
               <a:spcBef>
                 <a:spcPts val="0"/>
@@ -16185,8 +16240,8 @@
         </p:nvSpPr>
         <p:spPr>
           <a:xfrm>
-            <a:off x="7666135" y="3923558"/>
-            <a:ext cx="989271" cy="253910"/>
+            <a:off x="7666135" y="3965368"/>
+            <a:ext cx="989271" cy="258978"/>
           </a:xfrm>
           <a:prstGeom prst="rect">
             <a:avLst/>
@@ -16223,7 +16278,7 @@
           <a:p>
             <a:pPr algn="ctr">
               <a:lnSpc>
-                <a:spcPts val="997"/>
+                <a:spcPts val="1022"/>
               </a:lnSpc>
               <a:spcBef>
                 <a:spcPts val="0"/>
@@ -16252,8 +16307,8 @@
         </p:nvSpPr>
         <p:spPr>
           <a:xfrm>
-            <a:off x="2390022" y="4177468"/>
-            <a:ext cx="1813664" cy="253910"/>
+            <a:off x="2390022" y="4224346"/>
+            <a:ext cx="1813664" cy="258978"/>
           </a:xfrm>
           <a:prstGeom prst="rect">
             <a:avLst/>
@@ -16290,7 +16345,7 @@
           <a:p>
             <a:pPr algn="l">
               <a:lnSpc>
-                <a:spcPts val="997"/>
+                <a:spcPts val="1022"/>
               </a:lnSpc>
               <a:spcBef>
                 <a:spcPts val="0"/>
@@ -16328,8 +16383,8 @@
         </p:nvSpPr>
         <p:spPr>
           <a:xfrm>
-            <a:off x="4203686" y="4177468"/>
-            <a:ext cx="1319028" cy="253910"/>
+            <a:off x="4203686" y="4224346"/>
+            <a:ext cx="1319028" cy="258978"/>
           </a:xfrm>
           <a:prstGeom prst="rect">
             <a:avLst/>
@@ -16366,7 +16421,7 @@
           <a:p>
             <a:pPr algn="r">
               <a:lnSpc>
-                <a:spcPts val="997"/>
+                <a:spcPts val="1022"/>
               </a:lnSpc>
               <a:spcBef>
                 <a:spcPts val="0"/>
@@ -16395,8 +16450,8 @@
         </p:nvSpPr>
         <p:spPr>
           <a:xfrm>
-            <a:off x="5522714" y="4177468"/>
-            <a:ext cx="1154150" cy="253910"/>
+            <a:off x="5522714" y="4224346"/>
+            <a:ext cx="1154150" cy="258978"/>
           </a:xfrm>
           <a:prstGeom prst="rect">
             <a:avLst/>
@@ -16433,7 +16488,7 @@
           <a:p>
             <a:pPr algn="r">
               <a:lnSpc>
-                <a:spcPts val="997"/>
+                <a:spcPts val="1022"/>
               </a:lnSpc>
               <a:spcBef>
                 <a:spcPts val="0"/>
@@ -16471,8 +16526,8 @@
         </p:nvSpPr>
         <p:spPr>
           <a:xfrm>
-            <a:off x="6676864" y="4177468"/>
-            <a:ext cx="989271" cy="253910"/>
+            <a:off x="6676864" y="4224346"/>
+            <a:ext cx="989271" cy="258978"/>
           </a:xfrm>
           <a:prstGeom prst="rect">
             <a:avLst/>
@@ -16509,7 +16564,7 @@
           <a:p>
             <a:pPr algn="ctr">
               <a:lnSpc>
-                <a:spcPts val="997"/>
+                <a:spcPts val="1022"/>
               </a:lnSpc>
               <a:spcBef>
                 <a:spcPts val="0"/>
@@ -16538,8 +16593,8 @@
         </p:nvSpPr>
         <p:spPr>
           <a:xfrm>
-            <a:off x="7666135" y="4177468"/>
-            <a:ext cx="989271" cy="253910"/>
+            <a:off x="7666135" y="4224346"/>
+            <a:ext cx="989271" cy="258978"/>
           </a:xfrm>
           <a:prstGeom prst="rect">
             <a:avLst/>
@@ -16576,7 +16631,7 @@
           <a:p>
             <a:pPr algn="ctr">
               <a:lnSpc>
-                <a:spcPts val="997"/>
+                <a:spcPts val="1022"/>
               </a:lnSpc>
               <a:spcBef>
                 <a:spcPts val="0"/>
@@ -16605,8 +16660,8 @@
         </p:nvSpPr>
         <p:spPr>
           <a:xfrm>
-            <a:off x="411480" y="4431378"/>
-            <a:ext cx="1978542" cy="761730"/>
+            <a:off x="411480" y="4483324"/>
+            <a:ext cx="1978542" cy="776934"/>
           </a:xfrm>
           <a:prstGeom prst="rect">
             <a:avLst/>
@@ -16643,7 +16698,7 @@
           <a:p>
             <a:pPr algn="l">
               <a:lnSpc>
-                <a:spcPts val="997"/>
+                <a:spcPts val="1022"/>
               </a:lnSpc>
               <a:spcBef>
                 <a:spcPts val="0"/>
@@ -16681,8 +16736,8 @@
         </p:nvSpPr>
         <p:spPr>
           <a:xfrm>
-            <a:off x="2390022" y="4431378"/>
-            <a:ext cx="1813664" cy="253910"/>
+            <a:off x="2390022" y="4483324"/>
+            <a:ext cx="1813664" cy="258978"/>
           </a:xfrm>
           <a:prstGeom prst="rect">
             <a:avLst/>
@@ -16719,7 +16774,7 @@
           <a:p>
             <a:pPr algn="l">
               <a:lnSpc>
-                <a:spcPts val="997"/>
+                <a:spcPts val="1022"/>
               </a:lnSpc>
               <a:spcBef>
                 <a:spcPts val="0"/>
@@ -16757,8 +16812,8 @@
         </p:nvSpPr>
         <p:spPr>
           <a:xfrm>
-            <a:off x="4203686" y="4431378"/>
-            <a:ext cx="1319028" cy="253910"/>
+            <a:off x="4203686" y="4483324"/>
+            <a:ext cx="1319028" cy="258978"/>
           </a:xfrm>
           <a:prstGeom prst="rect">
             <a:avLst/>
@@ -16795,7 +16850,7 @@
           <a:p>
             <a:pPr algn="r">
               <a:lnSpc>
-                <a:spcPts val="997"/>
+                <a:spcPts val="1022"/>
               </a:lnSpc>
               <a:spcBef>
                 <a:spcPts val="0"/>
@@ -16824,8 +16879,8 @@
         </p:nvSpPr>
         <p:spPr>
           <a:xfrm>
-            <a:off x="5522714" y="4431378"/>
-            <a:ext cx="1154150" cy="253910"/>
+            <a:off x="5522714" y="4483324"/>
+            <a:ext cx="1154150" cy="258978"/>
           </a:xfrm>
           <a:prstGeom prst="rect">
             <a:avLst/>
@@ -16862,7 +16917,7 @@
           <a:p>
             <a:pPr algn="r">
               <a:lnSpc>
-                <a:spcPts val="997"/>
+                <a:spcPts val="1022"/>
               </a:lnSpc>
               <a:spcBef>
                 <a:spcPts val="0"/>
@@ -16900,8 +16955,8 @@
         </p:nvSpPr>
         <p:spPr>
           <a:xfrm>
-            <a:off x="6676864" y="4431378"/>
-            <a:ext cx="989271" cy="253910"/>
+            <a:off x="6676864" y="4483324"/>
+            <a:ext cx="989271" cy="258978"/>
           </a:xfrm>
           <a:prstGeom prst="rect">
             <a:avLst/>
@@ -16938,7 +16993,7 @@
           <a:p>
             <a:pPr algn="ctr">
               <a:lnSpc>
-                <a:spcPts val="997"/>
+                <a:spcPts val="1022"/>
               </a:lnSpc>
               <a:spcBef>
                 <a:spcPts val="0"/>
@@ -16967,8 +17022,8 @@
         </p:nvSpPr>
         <p:spPr>
           <a:xfrm>
-            <a:off x="7666135" y="4431378"/>
-            <a:ext cx="989271" cy="253910"/>
+            <a:off x="7666135" y="4483324"/>
+            <a:ext cx="989271" cy="258978"/>
           </a:xfrm>
           <a:prstGeom prst="rect">
             <a:avLst/>
@@ -17005,7 +17060,7 @@
           <a:p>
             <a:pPr algn="ctr">
               <a:lnSpc>
-                <a:spcPts val="997"/>
+                <a:spcPts val="1022"/>
               </a:lnSpc>
               <a:spcBef>
                 <a:spcPts val="0"/>
@@ -17034,8 +17089,8 @@
         </p:nvSpPr>
         <p:spPr>
           <a:xfrm>
-            <a:off x="2390022" y="4685288"/>
-            <a:ext cx="1813664" cy="253910"/>
+            <a:off x="2390022" y="4742302"/>
+            <a:ext cx="1813664" cy="258978"/>
           </a:xfrm>
           <a:prstGeom prst="rect">
             <a:avLst/>
@@ -17072,7 +17127,7 @@
           <a:p>
             <a:pPr algn="l">
               <a:lnSpc>
-                <a:spcPts val="997"/>
+                <a:spcPts val="1022"/>
               </a:lnSpc>
               <a:spcBef>
                 <a:spcPts val="0"/>
@@ -17110,8 +17165,8 @@
         </p:nvSpPr>
         <p:spPr>
           <a:xfrm>
-            <a:off x="4203686" y="4685288"/>
-            <a:ext cx="1319028" cy="253910"/>
+            <a:off x="4203686" y="4742302"/>
+            <a:ext cx="1319028" cy="258978"/>
           </a:xfrm>
           <a:prstGeom prst="rect">
             <a:avLst/>
@@ -17148,7 +17203,7 @@
           <a:p>
             <a:pPr algn="r">
               <a:lnSpc>
-                <a:spcPts val="997"/>
+                <a:spcPts val="1022"/>
               </a:lnSpc>
               <a:spcBef>
                 <a:spcPts val="0"/>
@@ -17186,8 +17241,8 @@
         </p:nvSpPr>
         <p:spPr>
           <a:xfrm>
-            <a:off x="5522714" y="4685288"/>
-            <a:ext cx="1154150" cy="253910"/>
+            <a:off x="5522714" y="4742302"/>
+            <a:ext cx="1154150" cy="258978"/>
           </a:xfrm>
           <a:prstGeom prst="rect">
             <a:avLst/>
@@ -17224,7 +17279,7 @@
           <a:p>
             <a:pPr algn="r">
               <a:lnSpc>
-                <a:spcPts val="997"/>
+                <a:spcPts val="1022"/>
               </a:lnSpc>
               <a:spcBef>
                 <a:spcPts val="0"/>
@@ -17262,8 +17317,8 @@
         </p:nvSpPr>
         <p:spPr>
           <a:xfrm>
-            <a:off x="6676864" y="4685288"/>
-            <a:ext cx="989271" cy="253910"/>
+            <a:off x="6676864" y="4742302"/>
+            <a:ext cx="989271" cy="258978"/>
           </a:xfrm>
           <a:prstGeom prst="rect">
             <a:avLst/>
@@ -17300,7 +17355,7 @@
           <a:p>
             <a:pPr algn="ctr">
               <a:lnSpc>
-                <a:spcPts val="997"/>
+                <a:spcPts val="1022"/>
               </a:lnSpc>
               <a:spcBef>
                 <a:spcPts val="0"/>
@@ -17329,8 +17384,8 @@
         </p:nvSpPr>
         <p:spPr>
           <a:xfrm>
-            <a:off x="7666135" y="4685288"/>
-            <a:ext cx="989271" cy="253910"/>
+            <a:off x="7666135" y="4742302"/>
+            <a:ext cx="989271" cy="258978"/>
           </a:xfrm>
           <a:prstGeom prst="rect">
             <a:avLst/>
@@ -17367,7 +17422,7 @@
           <a:p>
             <a:pPr algn="ctr">
               <a:lnSpc>
-                <a:spcPts val="997"/>
+                <a:spcPts val="1022"/>
               </a:lnSpc>
               <a:spcBef>
                 <a:spcPts val="0"/>
@@ -17396,8 +17451,8 @@
         </p:nvSpPr>
         <p:spPr>
           <a:xfrm>
-            <a:off x="2390022" y="4939198"/>
-            <a:ext cx="1813664" cy="253910"/>
+            <a:off x="2390022" y="5001280"/>
+            <a:ext cx="1813664" cy="258978"/>
           </a:xfrm>
           <a:prstGeom prst="rect">
             <a:avLst/>
@@ -17434,7 +17489,7 @@
           <a:p>
             <a:pPr algn="l">
               <a:lnSpc>
-                <a:spcPts val="997"/>
+                <a:spcPts val="1022"/>
               </a:lnSpc>
               <a:spcBef>
                 <a:spcPts val="0"/>
@@ -17472,8 +17527,8 @@
         </p:nvSpPr>
         <p:spPr>
           <a:xfrm>
-            <a:off x="4203686" y="4939198"/>
-            <a:ext cx="1319028" cy="253910"/>
+            <a:off x="4203686" y="5001280"/>
+            <a:ext cx="1319028" cy="258978"/>
           </a:xfrm>
           <a:prstGeom prst="rect">
             <a:avLst/>
@@ -17510,7 +17565,7 @@
           <a:p>
             <a:pPr algn="r">
               <a:lnSpc>
-                <a:spcPts val="997"/>
+                <a:spcPts val="1022"/>
               </a:lnSpc>
               <a:spcBef>
                 <a:spcPts val="0"/>
@@ -17539,8 +17594,8 @@
         </p:nvSpPr>
         <p:spPr>
           <a:xfrm>
-            <a:off x="5522714" y="4939198"/>
-            <a:ext cx="1154150" cy="253910"/>
+            <a:off x="5522714" y="5001280"/>
+            <a:ext cx="1154150" cy="258978"/>
           </a:xfrm>
           <a:prstGeom prst="rect">
             <a:avLst/>
@@ -17577,7 +17632,7 @@
           <a:p>
             <a:pPr algn="r">
               <a:lnSpc>
-                <a:spcPts val="997"/>
+                <a:spcPts val="1022"/>
               </a:lnSpc>
               <a:spcBef>
                 <a:spcPts val="0"/>
@@ -17615,8 +17670,8 @@
         </p:nvSpPr>
         <p:spPr>
           <a:xfrm>
-            <a:off x="6676864" y="4939198"/>
-            <a:ext cx="989271" cy="253910"/>
+            <a:off x="6676864" y="5001280"/>
+            <a:ext cx="989271" cy="258978"/>
           </a:xfrm>
           <a:prstGeom prst="rect">
             <a:avLst/>
@@ -17653,7 +17708,7 @@
           <a:p>
             <a:pPr algn="ctr">
               <a:lnSpc>
-                <a:spcPts val="997"/>
+                <a:spcPts val="1022"/>
               </a:lnSpc>
               <a:spcBef>
                 <a:spcPts val="0"/>
@@ -17682,8 +17737,8 @@
         </p:nvSpPr>
         <p:spPr>
           <a:xfrm>
-            <a:off x="7666135" y="4939198"/>
-            <a:ext cx="989271" cy="253910"/>
+            <a:off x="7666135" y="5001280"/>
+            <a:ext cx="989271" cy="258978"/>
           </a:xfrm>
           <a:prstGeom prst="rect">
             <a:avLst/>
@@ -17720,7 +17775,7 @@
           <a:p>
             <a:pPr algn="ctr">
               <a:lnSpc>
-                <a:spcPts val="997"/>
+                <a:spcPts val="1022"/>
               </a:lnSpc>
               <a:spcBef>
                 <a:spcPts val="0"/>
@@ -17749,8 +17804,8 @@
         </p:nvSpPr>
         <p:spPr>
           <a:xfrm>
-            <a:off x="411480" y="5400800"/>
-            <a:ext cx="8243926" cy="126690"/>
+            <a:off x="411480" y="5469841"/>
+            <a:ext cx="8243926" cy="129857"/>
           </a:xfrm>
           <a:prstGeom prst="rect">
             <a:avLst/>
@@ -17765,7 +17820,7 @@
           <a:p>
             <a:pPr algn="l">
               <a:lnSpc>
-                <a:spcPts val="997"/>
+                <a:spcPts val="1022"/>
               </a:lnSpc>
               <a:spcBef>
                 <a:spcPts val="0"/>
@@ -17906,8 +17961,8 @@
         </p:nvSpPr>
         <p:spPr>
           <a:xfrm>
-            <a:off x="411480" y="374337"/>
-            <a:ext cx="11369040" cy="577206"/>
+            <a:off x="411480" y="274320"/>
+            <a:ext cx="11369040" cy="591636"/>
           </a:xfrm>
           <a:prstGeom prst="rect">
             <a:avLst/>
@@ -17922,7 +17977,7 @@
           <a:p>
             <a:pPr algn="l">
               <a:lnSpc>
-                <a:spcPts val="2272"/>
+                <a:spcPts val="2329"/>
               </a:lnSpc>
               <a:spcBef>
                 <a:spcPts val="0"/>
@@ -18115,7 +18170,7 @@
           <a:p>
             <a:pPr algn="l">
               <a:lnSpc>
-                <a:spcPts val="2272"/>
+                <a:spcPts val="2329"/>
               </a:lnSpc>
               <a:spcBef>
                 <a:spcPts val="0"/>
@@ -18285,8 +18340,8 @@
         </p:nvSpPr>
         <p:spPr>
           <a:xfrm>
-            <a:off x="1677690" y="1249866"/>
-            <a:ext cx="10057110" cy="152028"/>
+            <a:off x="1677690" y="1247965"/>
+            <a:ext cx="10057110" cy="155829"/>
           </a:xfrm>
           <a:prstGeom prst="rect">
             <a:avLst/>
@@ -18301,7 +18356,7 @@
           <a:p>
             <a:pPr algn="l">
               <a:lnSpc>
-                <a:spcPts val="1197"/>
+                <a:spcPts val="1227"/>
               </a:lnSpc>
               <a:spcBef>
                 <a:spcPts val="0"/>
@@ -18597,8 +18652,8 @@
         </p:nvSpPr>
         <p:spPr>
           <a:xfrm>
-            <a:off x="2045871" y="1825938"/>
-            <a:ext cx="9688929" cy="152028"/>
+            <a:off x="2045871" y="1824037"/>
+            <a:ext cx="9688929" cy="155829"/>
           </a:xfrm>
           <a:prstGeom prst="rect">
             <a:avLst/>
@@ -18613,7 +18668,7 @@
           <a:p>
             <a:pPr algn="l">
               <a:lnSpc>
-                <a:spcPts val="1197"/>
+                <a:spcPts val="1227"/>
               </a:lnSpc>
               <a:spcBef>
                 <a:spcPts val="0"/>
@@ -18900,8 +18955,8 @@
         </p:nvSpPr>
         <p:spPr>
           <a:xfrm>
-            <a:off x="1885138" y="2402010"/>
-            <a:ext cx="9849662" cy="152028"/>
+            <a:off x="1885138" y="2400109"/>
+            <a:ext cx="9849662" cy="155829"/>
           </a:xfrm>
           <a:prstGeom prst="rect">
             <a:avLst/>
@@ -18916,7 +18971,7 @@
           <a:p>
             <a:pPr algn="l">
               <a:lnSpc>
-                <a:spcPts val="1197"/>
+                <a:spcPts val="1227"/>
               </a:lnSpc>
               <a:spcBef>
                 <a:spcPts val="0"/>
@@ -19194,8 +19249,8 @@
         </p:nvSpPr>
         <p:spPr>
           <a:xfrm>
-            <a:off x="1916196" y="2978082"/>
-            <a:ext cx="9818604" cy="152028"/>
+            <a:off x="1916196" y="2976181"/>
+            <a:ext cx="9818604" cy="155829"/>
           </a:xfrm>
           <a:prstGeom prst="rect">
             <a:avLst/>
@@ -19210,7 +19265,7 @@
           <a:p>
             <a:pPr algn="l">
               <a:lnSpc>
-                <a:spcPts val="1197"/>
+                <a:spcPts val="1227"/>
               </a:lnSpc>
               <a:spcBef>
                 <a:spcPts val="0"/>
@@ -19365,8 +19420,8 @@
         </p:nvSpPr>
         <p:spPr>
           <a:xfrm>
-            <a:off x="411480" y="3817950"/>
-            <a:ext cx="2807970" cy="1093038"/>
+            <a:off x="411480" y="3810722"/>
+            <a:ext cx="2807970" cy="1085810"/>
           </a:xfrm>
           <a:prstGeom prst="rect">
             <a:avLst/>
@@ -19407,7 +19462,7 @@
           <a:p>
             <a:pPr algn="ctr">
               <a:lnSpc>
-                <a:spcPts val="1795"/>
+                <a:spcPts val="1840"/>
               </a:lnSpc>
               <a:spcBef>
                 <a:spcPts val="0"/>
@@ -19469,7 +19524,7 @@
           <a:p>
             <a:pPr algn="ctr">
               <a:lnSpc>
-                <a:spcPts val="997"/>
+                <a:spcPts val="1022"/>
               </a:lnSpc>
               <a:spcBef>
                 <a:spcPts val="0"/>
@@ -19590,7 +19645,7 @@
           <a:p>
             <a:pPr algn="ctr">
               <a:lnSpc>
-                <a:spcPts val="997"/>
+                <a:spcPts val="1022"/>
               </a:lnSpc>
               <a:spcBef>
                 <a:spcPts val="0"/>
@@ -19655,8 +19710,8 @@
         </p:nvSpPr>
         <p:spPr>
           <a:xfrm>
-            <a:off x="3265170" y="3817950"/>
-            <a:ext cx="2807970" cy="1093038"/>
+            <a:off x="3265170" y="3810722"/>
+            <a:ext cx="2807970" cy="1085810"/>
           </a:xfrm>
           <a:prstGeom prst="rect">
             <a:avLst/>
@@ -19697,7 +19752,7 @@
           <a:p>
             <a:pPr algn="ctr">
               <a:lnSpc>
-                <a:spcPts val="1795"/>
+                <a:spcPts val="1840"/>
               </a:lnSpc>
               <a:spcBef>
                 <a:spcPts val="0"/>
@@ -19759,7 +19814,7 @@
           <a:p>
             <a:pPr algn="ctr">
               <a:lnSpc>
-                <a:spcPts val="997"/>
+                <a:spcPts val="1022"/>
               </a:lnSpc>
               <a:spcBef>
                 <a:spcPts val="0"/>
@@ -19880,7 +19935,7 @@
           <a:p>
             <a:pPr algn="ctr">
               <a:lnSpc>
-                <a:spcPts val="997"/>
+                <a:spcPts val="1022"/>
               </a:lnSpc>
               <a:spcBef>
                 <a:spcPts val="0"/>
@@ -19945,8 +20000,8 @@
         </p:nvSpPr>
         <p:spPr>
           <a:xfrm>
-            <a:off x="6118860" y="3817950"/>
-            <a:ext cx="2807970" cy="1093038"/>
+            <a:off x="6118860" y="3810722"/>
+            <a:ext cx="2807970" cy="1085810"/>
           </a:xfrm>
           <a:prstGeom prst="rect">
             <a:avLst/>
@@ -19987,7 +20042,7 @@
           <a:p>
             <a:pPr algn="ctr">
               <a:lnSpc>
-                <a:spcPts val="1795"/>
+                <a:spcPts val="1840"/>
               </a:lnSpc>
               <a:spcBef>
                 <a:spcPts val="0"/>
@@ -20040,7 +20095,7 @@
           <a:p>
             <a:pPr algn="ctr">
               <a:lnSpc>
-                <a:spcPts val="997"/>
+                <a:spcPts val="1022"/>
               </a:lnSpc>
               <a:spcBef>
                 <a:spcPts val="0"/>
@@ -20170,7 +20225,7 @@
           <a:p>
             <a:pPr algn="ctr">
               <a:lnSpc>
-                <a:spcPts val="997"/>
+                <a:spcPts val="1022"/>
               </a:lnSpc>
               <a:spcBef>
                 <a:spcPts val="0"/>
@@ -20235,8 +20290,8 @@
         </p:nvSpPr>
         <p:spPr>
           <a:xfrm>
-            <a:off x="8972550" y="3817950"/>
-            <a:ext cx="2807970" cy="1093038"/>
+            <a:off x="8972550" y="3810722"/>
+            <a:ext cx="2807970" cy="1085810"/>
           </a:xfrm>
           <a:prstGeom prst="rect">
             <a:avLst/>
@@ -20277,7 +20332,7 @@
           <a:p>
             <a:pPr algn="ctr">
               <a:lnSpc>
-                <a:spcPts val="1795"/>
+                <a:spcPts val="1840"/>
               </a:lnSpc>
               <a:spcBef>
                 <a:spcPts val="0"/>
@@ -20330,7 +20385,7 @@
           <a:p>
             <a:pPr algn="ctr">
               <a:lnSpc>
-                <a:spcPts val="997"/>
+                <a:spcPts val="1022"/>
               </a:lnSpc>
               <a:spcBef>
                 <a:spcPts val="0"/>
@@ -20424,7 +20479,7 @@
           <a:p>
             <a:pPr algn="ctr">
               <a:lnSpc>
-                <a:spcPts val="997"/>
+                <a:spcPts val="1022"/>
               </a:lnSpc>
               <a:spcBef>
                 <a:spcPts val="0"/>
@@ -20518,7 +20573,7 @@
           <a:p>
             <a:pPr algn="ctr">
               <a:lnSpc>
-                <a:spcPts val="997"/>
+                <a:spcPts val="1022"/>
               </a:lnSpc>
               <a:spcBef>
                 <a:spcPts val="0"/>
@@ -20547,8 +20602,8 @@
         </p:nvSpPr>
         <p:spPr>
           <a:xfrm>
-            <a:off x="411480" y="5130444"/>
-            <a:ext cx="11369040" cy="969931"/>
+            <a:off x="411480" y="5115988"/>
+            <a:ext cx="11369040" cy="981219"/>
           </a:xfrm>
           <a:prstGeom prst="rect">
             <a:avLst/>
@@ -20597,8 +20652,8 @@
         </p:nvSpPr>
         <p:spPr>
           <a:xfrm>
-            <a:off x="411480" y="5130444"/>
-            <a:ext cx="32004" cy="969931"/>
+            <a:off x="411480" y="5115988"/>
+            <a:ext cx="32004" cy="981219"/>
           </a:xfrm>
           <a:prstGeom prst="rect">
             <a:avLst/>
@@ -20641,8 +20696,8 @@
         </p:nvSpPr>
         <p:spPr>
           <a:xfrm>
-            <a:off x="484632" y="5203596"/>
-            <a:ext cx="11222736" cy="472976"/>
+            <a:off x="484632" y="5189140"/>
+            <a:ext cx="11222736" cy="484800"/>
           </a:xfrm>
           <a:prstGeom prst="rect">
             <a:avLst/>
@@ -20657,7 +20712,7 @@
           <a:p>
             <a:pPr algn="l">
               <a:lnSpc>
-                <a:spcPts val="1862"/>
+                <a:spcPts val="1908"/>
               </a:lnSpc>
               <a:spcBef>
                 <a:spcPts val="0"/>
@@ -20877,7 +20932,7 @@
           <a:p>
             <a:pPr algn="l">
               <a:lnSpc>
-                <a:spcPts val="1862"/>
+                <a:spcPts val="1908"/>
               </a:lnSpc>
               <a:spcBef>
                 <a:spcPts val="0"/>
@@ -20906,8 +20961,8 @@
         </p:nvSpPr>
         <p:spPr>
           <a:xfrm>
-            <a:off x="484632" y="5713148"/>
-            <a:ext cx="11222736" cy="152028"/>
+            <a:off x="484632" y="5710516"/>
+            <a:ext cx="11222736" cy="155829"/>
           </a:xfrm>
           <a:prstGeom prst="rect">
             <a:avLst/>
@@ -20922,7 +20977,7 @@
           <a:p>
             <a:pPr algn="l">
               <a:lnSpc>
-                <a:spcPts val="1197"/>
+                <a:spcPts val="1227"/>
               </a:lnSpc>
               <a:spcBef>
                 <a:spcPts val="0"/>
@@ -21221,8 +21276,8 @@
         </p:nvSpPr>
         <p:spPr>
           <a:xfrm>
-            <a:off x="411480" y="6210103"/>
-            <a:ext cx="11369040" cy="118244"/>
+            <a:off x="411480" y="6206935"/>
+            <a:ext cx="11369040" cy="129857"/>
           </a:xfrm>
           <a:prstGeom prst="rect">
             <a:avLst/>
@@ -21237,7 +21292,7 @@
           <a:p>
             <a:pPr algn="l">
               <a:lnSpc>
-                <a:spcPts val="931"/>
+                <a:spcPts val="1022"/>
               </a:lnSpc>
               <a:spcBef>
                 <a:spcPts val="0"/>
@@ -21247,7 +21302,7 @@
               </a:spcAft>
             </a:pPr>
             <a:r>
-              <a:rPr sz="700" b="0" i="0">
+              <a:rPr sz="750" b="0" i="0">
                 <a:solidFill>
                   <a:srgbClr val="757575"/>
                 </a:solidFill>
@@ -21256,7 +21311,7 @@
               <a:t>illustrative </a:t>
             </a:r>
             <a:r>
-              <a:rPr sz="700" b="0" i="0">
+              <a:rPr sz="750" b="0" i="0">
                 <a:solidFill>
                   <a:srgbClr val="757575"/>
                 </a:solidFill>
@@ -21379,7 +21434,7 @@
         <p:spPr>
           <a:xfrm>
             <a:off x="411480" y="274320"/>
-            <a:ext cx="11369040" cy="577206"/>
+            <a:ext cx="11369040" cy="591636"/>
           </a:xfrm>
           <a:prstGeom prst="rect">
             <a:avLst/>
@@ -21394,7 +21449,7 @@
           <a:p>
             <a:pPr algn="l">
               <a:lnSpc>
-                <a:spcPts val="2272"/>
+                <a:spcPts val="2329"/>
               </a:lnSpc>
               <a:spcBef>
                 <a:spcPts val="0"/>
@@ -21533,7 +21588,7 @@
           <a:p>
             <a:pPr algn="l">
               <a:lnSpc>
-                <a:spcPts val="2272"/>
+                <a:spcPts val="2329"/>
               </a:lnSpc>
               <a:spcBef>
                 <a:spcPts val="0"/>
@@ -21598,8 +21653,8 @@
         </p:nvSpPr>
         <p:spPr>
           <a:xfrm>
-            <a:off x="411480" y="878958"/>
-            <a:ext cx="11369040" cy="152028"/>
+            <a:off x="411480" y="893388"/>
+            <a:ext cx="11369040" cy="155829"/>
           </a:xfrm>
           <a:prstGeom prst="rect">
             <a:avLst/>
@@ -21614,7 +21669,7 @@
           <a:p>
             <a:pPr algn="l">
               <a:lnSpc>
-                <a:spcPts val="1197"/>
+                <a:spcPts val="1227"/>
               </a:lnSpc>
               <a:spcBef>
                 <a:spcPts val="0"/>
@@ -21743,51 +21798,16 @@
           </a:p>
         </p:txBody>
       </p:sp>
-      <p:cxnSp>
-        <p:nvCxnSpPr>
-          <p:cNvPr id="4" name="Connector 3"/>
-          <p:cNvCxnSpPr/>
-          <p:nvPr/>
-        </p:nvCxnSpPr>
-        <p:spPr>
-          <a:xfrm>
-            <a:off x="411480" y="1076706"/>
-            <a:ext cx="11369040" cy="0"/>
-          </a:xfrm>
-          <a:prstGeom prst="line">
-            <a:avLst/>
-          </a:prstGeom>
-          <a:ln w="9525">
-            <a:solidFill>
-              <a:srgbClr val="BFBFBF"/>
-            </a:solidFill>
-          </a:ln>
-        </p:spPr>
-        <p:style>
-          <a:lnRef idx="2">
-            <a:schemeClr val="accent1"/>
-          </a:lnRef>
-          <a:fillRef idx="0">
-            <a:schemeClr val="accent1"/>
-          </a:fillRef>
-          <a:effectRef idx="1">
-            <a:schemeClr val="accent1"/>
-          </a:effectRef>
-          <a:fontRef idx="minor">
-            <a:schemeClr val="tx1"/>
-          </a:fontRef>
-        </p:style>
-      </p:cxnSp>
-      <p:sp>
-        <p:nvSpPr>
-          <p:cNvPr id="5" name="TextBox 4"/>
+      <p:sp>
+        <p:nvSpPr>
+          <p:cNvPr id="4" name="TextBox 3"/>
           <p:cNvSpPr txBox="1"/>
           <p:nvPr/>
         </p:nvSpPr>
         <p:spPr>
           <a:xfrm>
-            <a:off x="411480" y="1691640"/>
-            <a:ext cx="109728" cy="168920"/>
+            <a:off x="411480" y="1783080"/>
+            <a:ext cx="109728" cy="173143"/>
           </a:xfrm>
           <a:prstGeom prst="rect">
             <a:avLst/>
@@ -21802,7 +21822,7 @@
           <a:p>
             <a:pPr algn="l">
               <a:lnSpc>
-                <a:spcPts val="1330"/>
+                <a:spcPts val="1363"/>
               </a:lnSpc>
               <a:spcBef>
                 <a:spcPts val="0"/>
@@ -21825,14 +21845,14 @@
       </p:sp>
       <p:sp>
         <p:nvSpPr>
-          <p:cNvPr id="6" name="TextBox 5"/>
+          <p:cNvPr id="5" name="TextBox 4"/>
           <p:cNvSpPr txBox="1"/>
           <p:nvPr/>
         </p:nvSpPr>
         <p:spPr>
           <a:xfrm>
-            <a:off x="521208" y="1691640"/>
-            <a:ext cx="11259312" cy="168920"/>
+            <a:off x="521208" y="1783080"/>
+            <a:ext cx="11259312" cy="173143"/>
           </a:xfrm>
           <a:prstGeom prst="rect">
             <a:avLst/>
@@ -21847,7 +21867,7 @@
           <a:p>
             <a:pPr algn="l">
               <a:lnSpc>
-                <a:spcPts val="1330"/>
+                <a:spcPts val="1363"/>
               </a:lnSpc>
               <a:spcBef>
                 <a:spcPts val="0"/>
@@ -22032,14 +22052,14 @@
       </p:sp>
       <p:sp>
         <p:nvSpPr>
-          <p:cNvPr id="7" name="TextBox 6"/>
+          <p:cNvPr id="6" name="TextBox 5"/>
           <p:cNvSpPr txBox="1"/>
           <p:nvPr/>
         </p:nvSpPr>
         <p:spPr>
           <a:xfrm>
-            <a:off x="411480" y="2038456"/>
-            <a:ext cx="109728" cy="168920"/>
+            <a:off x="411480" y="2137286"/>
+            <a:ext cx="109728" cy="173143"/>
           </a:xfrm>
           <a:prstGeom prst="rect">
             <a:avLst/>
@@ -22054,7 +22074,7 @@
           <a:p>
             <a:pPr algn="l">
               <a:lnSpc>
-                <a:spcPts val="1330"/>
+                <a:spcPts val="1363"/>
               </a:lnSpc>
               <a:spcBef>
                 <a:spcPts val="0"/>
@@ -22077,14 +22097,14 @@
       </p:sp>
       <p:sp>
         <p:nvSpPr>
-          <p:cNvPr id="8" name="TextBox 7"/>
+          <p:cNvPr id="7" name="TextBox 6"/>
           <p:cNvSpPr txBox="1"/>
           <p:nvPr/>
         </p:nvSpPr>
         <p:spPr>
           <a:xfrm>
-            <a:off x="521208" y="2038456"/>
-            <a:ext cx="11259312" cy="168920"/>
+            <a:off x="521208" y="2137286"/>
+            <a:ext cx="11259312" cy="173143"/>
           </a:xfrm>
           <a:prstGeom prst="rect">
             <a:avLst/>
@@ -22099,7 +22119,7 @@
           <a:p>
             <a:pPr algn="l">
               <a:lnSpc>
-                <a:spcPts val="1330"/>
+                <a:spcPts val="1363"/>
               </a:lnSpc>
               <a:spcBef>
                 <a:spcPts val="0"/>
@@ -22266,14 +22286,14 @@
       </p:sp>
       <p:sp>
         <p:nvSpPr>
-          <p:cNvPr id="9" name="TextBox 8"/>
+          <p:cNvPr id="8" name="TextBox 7"/>
           <p:cNvSpPr txBox="1"/>
           <p:nvPr/>
         </p:nvSpPr>
         <p:spPr>
           <a:xfrm>
-            <a:off x="411480" y="2385272"/>
-            <a:ext cx="109728" cy="168920"/>
+            <a:off x="411480" y="2491492"/>
+            <a:ext cx="109728" cy="173143"/>
           </a:xfrm>
           <a:prstGeom prst="rect">
             <a:avLst/>
@@ -22288,7 +22308,7 @@
           <a:p>
             <a:pPr algn="l">
               <a:lnSpc>
-                <a:spcPts val="1330"/>
+                <a:spcPts val="1363"/>
               </a:lnSpc>
               <a:spcBef>
                 <a:spcPts val="0"/>
@@ -22311,14 +22331,14 @@
       </p:sp>
       <p:sp>
         <p:nvSpPr>
-          <p:cNvPr id="10" name="TextBox 9"/>
+          <p:cNvPr id="9" name="TextBox 8"/>
           <p:cNvSpPr txBox="1"/>
           <p:nvPr/>
         </p:nvSpPr>
         <p:spPr>
           <a:xfrm>
-            <a:off x="521208" y="2385272"/>
-            <a:ext cx="11259312" cy="168920"/>
+            <a:off x="521208" y="2491492"/>
+            <a:ext cx="11259312" cy="173143"/>
           </a:xfrm>
           <a:prstGeom prst="rect">
             <a:avLst/>
@@ -22333,7 +22353,7 @@
           <a:p>
             <a:pPr algn="l">
               <a:lnSpc>
-                <a:spcPts val="1330"/>
+                <a:spcPts val="1363"/>
               </a:lnSpc>
               <a:spcBef>
                 <a:spcPts val="0"/>
@@ -22500,14 +22520,14 @@
       </p:sp>
       <p:sp>
         <p:nvSpPr>
-          <p:cNvPr id="11" name="TextBox 10"/>
+          <p:cNvPr id="10" name="TextBox 9"/>
           <p:cNvSpPr txBox="1"/>
           <p:nvPr/>
         </p:nvSpPr>
         <p:spPr>
           <a:xfrm>
-            <a:off x="411480" y="2732088"/>
-            <a:ext cx="109728" cy="168920"/>
+            <a:off x="411480" y="2845698"/>
+            <a:ext cx="109728" cy="173143"/>
           </a:xfrm>
           <a:prstGeom prst="rect">
             <a:avLst/>
@@ -22522,7 +22542,7 @@
           <a:p>
             <a:pPr algn="l">
               <a:lnSpc>
-                <a:spcPts val="1330"/>
+                <a:spcPts val="1363"/>
               </a:lnSpc>
               <a:spcBef>
                 <a:spcPts val="0"/>
@@ -22545,14 +22565,14 @@
       </p:sp>
       <p:sp>
         <p:nvSpPr>
-          <p:cNvPr id="12" name="TextBox 11"/>
+          <p:cNvPr id="11" name="TextBox 10"/>
           <p:cNvSpPr txBox="1"/>
           <p:nvPr/>
         </p:nvSpPr>
         <p:spPr>
           <a:xfrm>
-            <a:off x="521208" y="2732088"/>
-            <a:ext cx="11259312" cy="168920"/>
+            <a:off x="521208" y="2845698"/>
+            <a:ext cx="11259312" cy="173143"/>
           </a:xfrm>
           <a:prstGeom prst="rect">
             <a:avLst/>
@@ -22567,7 +22587,7 @@
           <a:p>
             <a:pPr algn="l">
               <a:lnSpc>
-                <a:spcPts val="1330"/>
+                <a:spcPts val="1363"/>
               </a:lnSpc>
               <a:spcBef>
                 <a:spcPts val="0"/>
@@ -22743,14 +22763,14 @@
       </p:sp>
       <p:sp>
         <p:nvSpPr>
-          <p:cNvPr id="13" name="TextBox 12"/>
+          <p:cNvPr id="12" name="TextBox 11"/>
           <p:cNvSpPr txBox="1"/>
           <p:nvPr/>
         </p:nvSpPr>
         <p:spPr>
           <a:xfrm>
-            <a:off x="411480" y="3078904"/>
-            <a:ext cx="109728" cy="168920"/>
+            <a:off x="411480" y="3199904"/>
+            <a:ext cx="109728" cy="173143"/>
           </a:xfrm>
           <a:prstGeom prst="rect">
             <a:avLst/>
@@ -22765,7 +22785,7 @@
           <a:p>
             <a:pPr algn="l">
               <a:lnSpc>
-                <a:spcPts val="1330"/>
+                <a:spcPts val="1363"/>
               </a:lnSpc>
               <a:spcBef>
                 <a:spcPts val="0"/>
@@ -22788,14 +22808,14 @@
       </p:sp>
       <p:sp>
         <p:nvSpPr>
-          <p:cNvPr id="14" name="TextBox 13"/>
+          <p:cNvPr id="13" name="TextBox 12"/>
           <p:cNvSpPr txBox="1"/>
           <p:nvPr/>
         </p:nvSpPr>
         <p:spPr>
           <a:xfrm>
-            <a:off x="521208" y="3078904"/>
-            <a:ext cx="11259312" cy="168920"/>
+            <a:off x="521208" y="3199904"/>
+            <a:ext cx="11259312" cy="173143"/>
           </a:xfrm>
           <a:prstGeom prst="rect">
             <a:avLst/>
@@ -22810,7 +22830,7 @@
           <a:p>
             <a:pPr algn="l">
               <a:lnSpc>
-                <a:spcPts val="1330"/>
+                <a:spcPts val="1363"/>
               </a:lnSpc>
               <a:spcBef>
                 <a:spcPts val="0"/>
@@ -23004,7 +23024,7 @@
       </p:sp>
       <p:cxnSp>
         <p:nvCxnSpPr>
-          <p:cNvPr id="15" name="Connector 14"/>
+          <p:cNvPr id="14" name="Connector 13"/>
           <p:cNvCxnSpPr/>
           <p:nvPr/>
         </p:nvCxnSpPr>
@@ -23039,7 +23059,7 @@
       </p:cxnSp>
       <p:sp>
         <p:nvSpPr>
-          <p:cNvPr id="16" name="TextBox 15"/>
+          <p:cNvPr id="15" name="TextBox 14"/>
           <p:cNvSpPr txBox="1"/>
           <p:nvPr/>
         </p:nvSpPr>

--- a/eval/out/ev_market_entry.spec.pptx
+++ b/eval/out/ev_market_entry.spec.pptx
@@ -10670,7 +10670,7 @@
       </p:cxnSp>
       <p:sp>
         <p:nvSpPr>
-          <p:cNvPr id="71" name="Rounded Rectangle 70"/>
+          <p:cNvPr id="71" name="de:tab"/>
           <p:cNvSpPr/>
           <p:nvPr/>
         </p:nvSpPr>
